--- a/massage_club_cofounder_deck.pptx
+++ b/massage_club_cofounder_deck.pptx
@@ -1082,7 +1082,7 @@
         <p:spPr>
           <a:xfrm>
             <a:off x="0" y="45720"/>
-            <a:ext cx="9144000" cy="475488"/>
+            <a:ext cx="9144000" cy="457200"/>
           </a:xfrm>
           <a:prstGeom prst="rect">
             <a:avLst/>
@@ -1101,24 +1101,24 @@
         </p:nvSpPr>
         <p:spPr>
           <a:xfrm>
-            <a:off x="640080" y="137160"/>
-            <a:ext cx="2743200" cy="274320"/>
-          </a:xfrm>
-          <a:prstGeom prst="rect">
-            <a:avLst/>
-          </a:prstGeom>
-          <a:noFill/>
-          <a:ln/>
-        </p:spPr>
-        <p:txBody>
-          <a:bodyPr wrap="square" lIns="0" tIns="0" rIns="0" bIns="0" rtlCol="0" anchor="ctr"/>
-          <a:lstStyle/>
-          <a:p>
-            <a:pPr indent="0" marL="0">
-              <a:buNone/>
-            </a:pPr>
-            <a:r>
-              <a:rPr lang="en-US" sz="1000" b="1" spc="400" kern="0" dirty="0">
+            <a:off x="640080" y="128016"/>
+            <a:ext cx="2743200" cy="256032"/>
+          </a:xfrm>
+          <a:prstGeom prst="rect">
+            <a:avLst/>
+          </a:prstGeom>
+          <a:noFill/>
+          <a:ln/>
+        </p:spPr>
+        <p:txBody>
+          <a:bodyPr wrap="square" lIns="0" tIns="0" rIns="0" bIns="0" rtlCol="0" anchor="ctr"/>
+          <a:lstStyle/>
+          <a:p>
+            <a:pPr indent="0" marL="0">
+              <a:buNone/>
+            </a:pPr>
+            <a:r>
+              <a:rPr lang="en-US" sz="1000" b="1" spc="500" kern="0" dirty="0">
                 <a:solidFill>
                   <a:srgbClr val="4ADE80"/>
                 </a:solidFill>
@@ -1137,8 +1137,8 @@
         </p:nvSpPr>
         <p:spPr>
           <a:xfrm>
-            <a:off x="4114800" y="137160"/>
-            <a:ext cx="4572000" cy="274320"/>
+            <a:off x="4114800" y="128016"/>
+            <a:ext cx="4389120" cy="256032"/>
           </a:xfrm>
           <a:prstGeom prst="rect">
             <a:avLst/>
@@ -1174,44 +1174,44 @@
         <p:spPr>
           <a:xfrm>
             <a:off x="640080" y="658368"/>
-            <a:ext cx="7772400" cy="1097280"/>
-          </a:xfrm>
-          <a:prstGeom prst="rect">
-            <a:avLst/>
-          </a:prstGeom>
-          <a:noFill/>
-          <a:ln/>
-        </p:spPr>
-        <p:txBody>
-          <a:bodyPr wrap="square" lIns="0" tIns="0" rIns="0" bIns="0" rtlCol="0" anchor="ctr"/>
-          <a:lstStyle/>
-          <a:p>
-            <a:pPr indent="0" marL="0">
-              <a:buNone/>
-            </a:pPr>
-            <a:r>
-              <a:rPr lang="en-US" sz="4200" b="1" dirty="0">
+            <a:ext cx="7772400" cy="1188720"/>
+          </a:xfrm>
+          <a:prstGeom prst="rect">
+            <a:avLst/>
+          </a:prstGeom>
+          <a:noFill/>
+          <a:ln/>
+        </p:spPr>
+        <p:txBody>
+          <a:bodyPr wrap="square" lIns="0" tIns="0" rIns="0" bIns="0" rtlCol="0" anchor="ctr"/>
+          <a:lstStyle/>
+          <a:p>
+            <a:pPr indent="0" marL="0">
+              <a:buNone/>
+            </a:pPr>
+            <a:r>
+              <a:rPr lang="en-US" sz="4800" b="1" dirty="0">
                 <a:solidFill>
                   <a:srgbClr val="FFFFFF"/>
                 </a:solidFill>
               </a:rPr>
               <a:t>Build the future of</a:t>
             </a:r>
-            <a:endParaRPr lang="en-US" sz="4200" dirty="0"/>
-          </a:p>
-          <a:p>
-            <a:pPr indent="0" marL="0">
-              <a:buNone/>
-            </a:pPr>
-            <a:r>
-              <a:rPr lang="en-US" sz="4200" b="1" dirty="0">
+            <a:endParaRPr lang="en-US" sz="4800" dirty="0"/>
+          </a:p>
+          <a:p>
+            <a:pPr indent="0" marL="0">
+              <a:buNone/>
+            </a:pPr>
+            <a:r>
+              <a:rPr lang="en-US" sz="4800" b="1" dirty="0">
                 <a:solidFill>
                   <a:srgbClr val="FFFFFF"/>
                 </a:solidFill>
               </a:rPr>
               <a:t>wellness subscription.</a:t>
             </a:r>
-            <a:endParaRPr lang="en-US" sz="4200" dirty="0"/>
+            <a:endParaRPr lang="en-US" sz="4800" dirty="0"/>
           </a:p>
         </p:txBody>
       </p:sp>
@@ -1223,45 +1223,45 @@
         </p:nvSpPr>
         <p:spPr>
           <a:xfrm>
-            <a:off x="640080" y="1810512"/>
-            <a:ext cx="6858000" cy="594360"/>
-          </a:xfrm>
-          <a:prstGeom prst="rect">
-            <a:avLst/>
-          </a:prstGeom>
-          <a:noFill/>
-          <a:ln/>
-        </p:spPr>
-        <p:txBody>
-          <a:bodyPr wrap="square" lIns="0" tIns="0" rIns="0" bIns="0" rtlCol="0" anchor="ctr"/>
-          <a:lstStyle/>
-          <a:p>
-            <a:pPr indent="0" marL="0">
-              <a:buNone/>
-            </a:pPr>
-            <a:r>
-              <a:rPr lang="en-US" sz="1300" dirty="0">
+            <a:off x="640080" y="1901952"/>
+            <a:ext cx="6858000" cy="548640"/>
+          </a:xfrm>
+          <a:prstGeom prst="rect">
+            <a:avLst/>
+          </a:prstGeom>
+          <a:noFill/>
+          <a:ln/>
+        </p:spPr>
+        <p:txBody>
+          <a:bodyPr wrap="square" lIns="0" tIns="0" rIns="0" bIns="0" rtlCol="0" anchor="ctr"/>
+          <a:lstStyle/>
+          <a:p>
+            <a:pPr indent="0" marL="0">
+              <a:buNone/>
+            </a:pPr>
+            <a:r>
+              <a:rPr lang="en-US" sz="1400" dirty="0">
                 <a:solidFill>
                   <a:srgbClr val="888888"/>
                 </a:solidFill>
               </a:rPr>
               <a:t>One app. Every top studio in Madrid. Instant booking.</a:t>
             </a:r>
-            <a:endParaRPr lang="en-US" sz="1300" dirty="0"/>
-          </a:p>
-          <a:p>
-            <a:pPr indent="0" marL="0">
-              <a:buNone/>
-            </a:pPr>
-            <a:r>
-              <a:rPr lang="en-US" sz="1300" dirty="0">
+            <a:endParaRPr lang="en-US" sz="1400" dirty="0"/>
+          </a:p>
+          <a:p>
+            <a:pPr indent="0" marL="0">
+              <a:buNone/>
+            </a:pPr>
+            <a:r>
+              <a:rPr lang="en-US" sz="1400" dirty="0">
                 <a:solidFill>
                   <a:srgbClr val="888888"/>
                 </a:solidFill>
               </a:rPr>
-              <a:t>We're looking for a technical co-founder to own the product.</a:t>
-            </a:r>
-            <a:endParaRPr lang="en-US" sz="1300" dirty="0"/>
+              <a:t>Real co-founder equity. We're building it now.</a:t>
+            </a:r>
+            <a:endParaRPr lang="en-US" sz="1400" dirty="0"/>
           </a:p>
         </p:txBody>
       </p:sp>
@@ -1273,7 +1273,7 @@
         </p:nvSpPr>
         <p:spPr>
           <a:xfrm>
-            <a:off x="640080" y="2542032"/>
+            <a:off x="640080" y="2651760"/>
             <a:ext cx="7863840" cy="9144"/>
           </a:xfrm>
           <a:prstGeom prst="rect">
@@ -1293,7 +1293,7 @@
         </p:nvSpPr>
         <p:spPr>
           <a:xfrm>
-            <a:off x="640080" y="2724912"/>
+            <a:off x="640080" y="2816352"/>
             <a:ext cx="2377440" cy="228600"/>
           </a:xfrm>
           <a:prstGeom prst="rect">
@@ -1329,8 +1329,8 @@
         </p:nvSpPr>
         <p:spPr>
           <a:xfrm>
-            <a:off x="640080" y="2962656"/>
-            <a:ext cx="548640" cy="22860"/>
+            <a:off x="640080" y="3054096"/>
+            <a:ext cx="457200" cy="22860"/>
           </a:xfrm>
           <a:prstGeom prst="rect">
             <a:avLst/>
@@ -1349,8 +1349,8 @@
         </p:nvSpPr>
         <p:spPr>
           <a:xfrm>
-            <a:off x="640080" y="3063240"/>
-            <a:ext cx="2377440" cy="1645920"/>
+            <a:off x="640080" y="3154680"/>
+            <a:ext cx="2377440" cy="1463040"/>
           </a:xfrm>
           <a:prstGeom prst="rect">
             <a:avLst/>
@@ -1364,7 +1364,7 @@
           <a:p>
             <a:pPr marL="342900" indent="-342900">
               <a:spcAft>
-                <a:spcPts val="500"/>
+                <a:spcPts val="600"/>
               </a:spcAft>
               <a:buSzPct val="100000"/>
               <a:buChar char="•"/>
@@ -1375,14 +1375,14 @@
                   <a:srgbClr val="CBD5E1"/>
                 </a:solidFill>
               </a:rPr>
-              <a:t>No central platform — booking is fragmented across Google, FB, walk-ins</a:t>
+              <a:t>No central platform — fragmented across Google, FB, walk-ins</a:t>
             </a:r>
             <a:endParaRPr lang="en-US" sz="1000" dirty="0"/>
           </a:p>
           <a:p>
             <a:pPr marL="342900" indent="-342900">
               <a:spcAft>
-                <a:spcPts val="500"/>
+                <a:spcPts val="600"/>
               </a:spcAft>
               <a:buSzPct val="100000"/>
               <a:buChar char="•"/>
@@ -1393,14 +1393,14 @@
                   <a:srgbClr val="CBD5E1"/>
                 </a:solidFill>
               </a:rPr>
-              <a:t>Platforms take 30–40% commission, therapists hate it</a:t>
+              <a:t>Platforms take 30–40% commission, therapists lose</a:t>
             </a:r>
             <a:endParaRPr lang="en-US" sz="1000" dirty="0"/>
           </a:p>
           <a:p>
             <a:pPr marL="342900" indent="-342900">
               <a:spcAft>
-                <a:spcPts val="500"/>
+                <a:spcPts val="600"/>
               </a:spcAft>
               <a:buSzPct val="100000"/>
               <a:buChar char="•"/>
@@ -1425,7 +1425,7 @@
         </p:nvSpPr>
         <p:spPr>
           <a:xfrm>
-            <a:off x="3291840" y="2724912"/>
+            <a:off x="3291840" y="2816352"/>
             <a:ext cx="2377440" cy="228600"/>
           </a:xfrm>
           <a:prstGeom prst="rect">
@@ -1461,8 +1461,8 @@
         </p:nvSpPr>
         <p:spPr>
           <a:xfrm>
-            <a:off x="3291840" y="2962656"/>
-            <a:ext cx="548640" cy="22860"/>
+            <a:off x="3291840" y="3054096"/>
+            <a:ext cx="457200" cy="22860"/>
           </a:xfrm>
           <a:prstGeom prst="rect">
             <a:avLst/>
@@ -1481,8 +1481,8 @@
         </p:nvSpPr>
         <p:spPr>
           <a:xfrm>
-            <a:off x="3291840" y="3063240"/>
-            <a:ext cx="2377440" cy="1645920"/>
+            <a:off x="3291840" y="3154680"/>
+            <a:ext cx="2377440" cy="1463040"/>
           </a:xfrm>
           <a:prstGeom prst="rect">
             <a:avLst/>
@@ -1496,7 +1496,7 @@
           <a:p>
             <a:pPr marL="342900" indent="-342900">
               <a:spcAft>
-                <a:spcPts val="500"/>
+                <a:spcPts val="600"/>
               </a:spcAft>
               <a:buSzPct val="100000"/>
               <a:buChar char="•"/>
@@ -1514,7 +1514,7 @@
           <a:p>
             <a:pPr marL="342900" indent="-342900">
               <a:spcAft>
-                <a:spcPts val="500"/>
+                <a:spcPts val="600"/>
               </a:spcAft>
               <a:buSzPct val="100000"/>
               <a:buChar char="•"/>
@@ -1532,7 +1532,7 @@
           <a:p>
             <a:pPr marL="342900" indent="-342900">
               <a:spcAft>
-                <a:spcPts val="500"/>
+                <a:spcPts val="600"/>
               </a:spcAft>
               <a:buSzPct val="100000"/>
               <a:buChar char="•"/>
@@ -1557,7 +1557,7 @@
         </p:nvSpPr>
         <p:spPr>
           <a:xfrm>
-            <a:off x="5943600" y="2724912"/>
+            <a:off x="5943600" y="2816352"/>
             <a:ext cx="2377440" cy="228600"/>
           </a:xfrm>
           <a:prstGeom prst="rect">
@@ -1574,7 +1574,7 @@
               <a:buNone/>
             </a:pPr>
             <a:r>
-              <a:rPr lang="en-US" sz="800" b="1" spc="300" kern="0" dirty="0">
+              <a:rPr lang="en-US" sz="800" b="1" spc="400" kern="0" dirty="0">
                 <a:solidFill>
                   <a:srgbClr val="60A5FA"/>
                 </a:solidFill>
@@ -1593,8 +1593,8 @@
         </p:nvSpPr>
         <p:spPr>
           <a:xfrm>
-            <a:off x="5943600" y="2962656"/>
-            <a:ext cx="548640" cy="22860"/>
+            <a:off x="5943600" y="3054096"/>
+            <a:ext cx="457200" cy="22860"/>
           </a:xfrm>
           <a:prstGeom prst="rect">
             <a:avLst/>
@@ -1613,8 +1613,8 @@
         </p:nvSpPr>
         <p:spPr>
           <a:xfrm>
-            <a:off x="5943600" y="3063240"/>
-            <a:ext cx="2377440" cy="1645920"/>
+            <a:off x="5943600" y="3154680"/>
+            <a:ext cx="2377440" cy="1463040"/>
           </a:xfrm>
           <a:prstGeom prst="rect">
             <a:avLst/>
@@ -1628,7 +1628,7 @@
           <a:p>
             <a:pPr marL="342900" indent="-342900">
               <a:spcAft>
-                <a:spcPts val="500"/>
+                <a:spcPts val="600"/>
               </a:spcAft>
               <a:buSzPct val="100000"/>
               <a:buChar char="•"/>
@@ -1646,7 +1646,7 @@
           <a:p>
             <a:pPr marL="342900" indent="-342900">
               <a:spcAft>
-                <a:spcPts val="500"/>
+                <a:spcPts val="600"/>
               </a:spcAft>
               <a:buSzPct val="100000"/>
               <a:buChar char="•"/>
@@ -1657,14 +1657,14 @@
                   <a:srgbClr val="CBD5E1"/>
                 </a:solidFill>
               </a:rPr>
-              <a:t>Value wellbeing + time equally</a:t>
+              <a:t>Value wellbeing and time equally</a:t>
             </a:r>
             <a:endParaRPr lang="en-US" sz="1000" dirty="0"/>
           </a:p>
           <a:p>
             <a:pPr marL="342900" indent="-342900">
               <a:spcAft>
-                <a:spcPts val="500"/>
+                <a:spcPts val="600"/>
               </a:spcAft>
               <a:buSzPct val="100000"/>
               <a:buChar char="•"/>
@@ -1675,7 +1675,7 @@
                   <a:srgbClr val="CBD5E1"/>
                 </a:solidFill>
               </a:rPr>
-              <a:t>Frequent visitors to massage studios</a:t>
+              <a:t>Frequent massage-goers, underserved</a:t>
             </a:r>
             <a:endParaRPr lang="en-US" sz="1000" dirty="0"/>
           </a:p>
@@ -1798,7 +1798,7 @@
         <p:spPr>
           <a:xfrm>
             <a:off x="0" y="45720"/>
-            <a:ext cx="9144000" cy="475488"/>
+            <a:ext cx="9144000" cy="457200"/>
           </a:xfrm>
           <a:prstGeom prst="rect">
             <a:avLst/>
@@ -1817,24 +1817,24 @@
         </p:nvSpPr>
         <p:spPr>
           <a:xfrm>
-            <a:off x="640080" y="137160"/>
-            <a:ext cx="2743200" cy="274320"/>
-          </a:xfrm>
-          <a:prstGeom prst="rect">
-            <a:avLst/>
-          </a:prstGeom>
-          <a:noFill/>
-          <a:ln/>
-        </p:spPr>
-        <p:txBody>
-          <a:bodyPr wrap="square" lIns="0" tIns="0" rIns="0" bIns="0" rtlCol="0" anchor="ctr"/>
-          <a:lstStyle/>
-          <a:p>
-            <a:pPr indent="0" marL="0">
-              <a:buNone/>
-            </a:pPr>
-            <a:r>
-              <a:rPr lang="en-US" sz="1000" b="1" spc="400" kern="0" dirty="0">
+            <a:off x="640080" y="128016"/>
+            <a:ext cx="2743200" cy="256032"/>
+          </a:xfrm>
+          <a:prstGeom prst="rect">
+            <a:avLst/>
+          </a:prstGeom>
+          <a:noFill/>
+          <a:ln/>
+        </p:spPr>
+        <p:txBody>
+          <a:bodyPr wrap="square" lIns="0" tIns="0" rIns="0" bIns="0" rtlCol="0" anchor="ctr"/>
+          <a:lstStyle/>
+          <a:p>
+            <a:pPr indent="0" marL="0">
+              <a:buNone/>
+            </a:pPr>
+            <a:r>
+              <a:rPr lang="en-US" sz="1000" b="1" spc="500" kern="0" dirty="0">
                 <a:solidFill>
                   <a:srgbClr val="4ADE80"/>
                 </a:solidFill>
@@ -1853,8 +1853,8 @@
         </p:nvSpPr>
         <p:spPr>
           <a:xfrm>
-            <a:off x="4572000" y="137160"/>
-            <a:ext cx="3931920" cy="274320"/>
+            <a:off x="4572000" y="128016"/>
+            <a:ext cx="3931920" cy="256032"/>
           </a:xfrm>
           <a:prstGeom prst="rect">
             <a:avLst/>
@@ -1890,44 +1890,44 @@
         <p:spPr>
           <a:xfrm>
             <a:off x="640080" y="658368"/>
-            <a:ext cx="7772400" cy="914400"/>
-          </a:xfrm>
-          <a:prstGeom prst="rect">
-            <a:avLst/>
-          </a:prstGeom>
-          <a:noFill/>
-          <a:ln/>
-        </p:spPr>
-        <p:txBody>
-          <a:bodyPr wrap="square" lIns="0" tIns="0" rIns="0" bIns="0" rtlCol="0" anchor="ctr"/>
-          <a:lstStyle/>
-          <a:p>
-            <a:pPr indent="0" marL="0">
-              <a:buNone/>
-            </a:pPr>
-            <a:r>
-              <a:rPr lang="en-US" sz="4200" b="1" dirty="0">
+            <a:ext cx="7772400" cy="1005840"/>
+          </a:xfrm>
+          <a:prstGeom prst="rect">
+            <a:avLst/>
+          </a:prstGeom>
+          <a:noFill/>
+          <a:ln/>
+        </p:spPr>
+        <p:txBody>
+          <a:bodyPr wrap="square" lIns="0" tIns="0" rIns="0" bIns="0" rtlCol="0" anchor="ctr"/>
+          <a:lstStyle/>
+          <a:p>
+            <a:pPr indent="0" marL="0">
+              <a:buNone/>
+            </a:pPr>
+            <a:r>
+              <a:rPr lang="en-US" sz="4800" b="1" dirty="0">
                 <a:solidFill>
                   <a:srgbClr val="FFFFFF"/>
                 </a:solidFill>
               </a:rPr>
               <a:t>Looking for a technical</a:t>
             </a:r>
-            <a:endParaRPr lang="en-US" sz="4200" dirty="0"/>
-          </a:p>
-          <a:p>
-            <a:pPr indent="0" marL="0">
-              <a:buNone/>
-            </a:pPr>
-            <a:r>
-              <a:rPr lang="en-US" sz="4200" b="1" dirty="0">
+            <a:endParaRPr lang="en-US" sz="4800" dirty="0"/>
+          </a:p>
+          <a:p>
+            <a:pPr indent="0" marL="0">
+              <a:buNone/>
+            </a:pPr>
+            <a:r>
+              <a:rPr lang="en-US" sz="4800" b="1" dirty="0">
                 <a:solidFill>
                   <a:srgbClr val="FFFFFF"/>
                 </a:solidFill>
               </a:rPr>
               <a:t>co-founder.</a:t>
             </a:r>
-            <a:endParaRPr lang="en-US" sz="4200" dirty="0"/>
+            <a:endParaRPr lang="en-US" sz="4800" dirty="0"/>
           </a:p>
         </p:txBody>
       </p:sp>
@@ -1939,8 +1939,8 @@
         </p:nvSpPr>
         <p:spPr>
           <a:xfrm>
-            <a:off x="640080" y="1645920"/>
-            <a:ext cx="2926080" cy="292608"/>
+            <a:off x="640080" y="1737360"/>
+            <a:ext cx="3108960" cy="310896"/>
           </a:xfrm>
           <a:prstGeom prst="rect">
             <a:avLst/>
@@ -1948,7 +1948,7 @@
           <a:solidFill>
             <a:srgbClr val="0F1A14"/>
           </a:solidFill>
-          <a:ln w="6350">
+          <a:ln w="9525">
             <a:solidFill>
               <a:srgbClr val="4ADE80"/>
             </a:solidFill>
@@ -1964,8 +1964,8 @@
         </p:nvSpPr>
         <p:spPr>
           <a:xfrm>
-            <a:off x="640080" y="1645920"/>
-            <a:ext cx="2926080" cy="292608"/>
+            <a:off x="640080" y="1737360"/>
+            <a:ext cx="3108960" cy="310896"/>
           </a:xfrm>
           <a:prstGeom prst="rect">
             <a:avLst/>
@@ -1981,14 +1981,14 @@
               <a:buNone/>
             </a:pPr>
             <a:r>
-              <a:rPr lang="en-US" sz="700" b="1" dirty="0">
+              <a:rPr lang="en-US" sz="800" b="1" dirty="0">
                 <a:solidFill>
                   <a:srgbClr val="4ADE80"/>
                 </a:solidFill>
               </a:rPr>
               <a:t>EQUITY-BASED  ·  MADRID (HYBRID)</a:t>
             </a:r>
-            <a:endParaRPr lang="en-US" sz="700" dirty="0"/>
+            <a:endParaRPr lang="en-US" sz="800" dirty="0"/>
           </a:p>
         </p:txBody>
       </p:sp>
@@ -2000,7 +2000,7 @@
         </p:nvSpPr>
         <p:spPr>
           <a:xfrm>
-            <a:off x="640080" y="2103120"/>
+            <a:off x="640080" y="2212848"/>
             <a:ext cx="7863840" cy="9144"/>
           </a:xfrm>
           <a:prstGeom prst="rect">
@@ -2020,7 +2020,7 @@
         </p:nvSpPr>
         <p:spPr>
           <a:xfrm>
-            <a:off x="640080" y="2286000"/>
+            <a:off x="640080" y="2377440"/>
             <a:ext cx="3840480" cy="228600"/>
           </a:xfrm>
           <a:prstGeom prst="rect">
@@ -2056,8 +2056,8 @@
         </p:nvSpPr>
         <p:spPr>
           <a:xfrm>
-            <a:off x="640080" y="2523744"/>
-            <a:ext cx="548640" cy="22860"/>
+            <a:off x="640080" y="2615184"/>
+            <a:ext cx="457200" cy="22860"/>
           </a:xfrm>
           <a:prstGeom prst="rect">
             <a:avLst/>
@@ -2076,7 +2076,223 @@
         </p:nvSpPr>
         <p:spPr>
           <a:xfrm>
-            <a:off x="640080" y="2670048"/>
+            <a:off x="640080" y="2761488"/>
+            <a:ext cx="3840480" cy="237744"/>
+          </a:xfrm>
+          <a:prstGeom prst="rect">
+            <a:avLst/>
+          </a:prstGeom>
+          <a:noFill/>
+          <a:ln/>
+        </p:spPr>
+        <p:txBody>
+          <a:bodyPr wrap="square" lIns="0" tIns="0" rIns="0" bIns="0" rtlCol="0" anchor="ctr"/>
+          <a:lstStyle/>
+          <a:p>
+            <a:pPr indent="0" marL="0">
+              <a:buNone/>
+            </a:pPr>
+            <a:r>
+              <a:rPr lang="en-US" sz="1200" b="1" dirty="0">
+                <a:solidFill>
+                  <a:srgbClr val="FFFFFF"/>
+                </a:solidFill>
+              </a:rPr>
+              <a:t>Full-Stack Engineer</a:t>
+            </a:r>
+            <a:endParaRPr lang="en-US" sz="1200" dirty="0"/>
+          </a:p>
+        </p:txBody>
+      </p:sp>
+      <p:sp>
+        <p:nvSpPr>
+          <p:cNvPr id="13" name="Text 11"/>
+          <p:cNvSpPr/>
+          <p:nvPr/>
+        </p:nvSpPr>
+        <p:spPr>
+          <a:xfrm>
+            <a:off x="640080" y="3017520"/>
+            <a:ext cx="3840480" cy="329184"/>
+          </a:xfrm>
+          <a:prstGeom prst="rect">
+            <a:avLst/>
+          </a:prstGeom>
+          <a:noFill/>
+          <a:ln/>
+        </p:spPr>
+        <p:txBody>
+          <a:bodyPr wrap="square" lIns="0" tIns="0" rIns="0" bIns="0" rtlCol="0" anchor="ctr"/>
+          <a:lstStyle/>
+          <a:p>
+            <a:pPr indent="0" marL="0">
+              <a:buNone/>
+            </a:pPr>
+            <a:r>
+              <a:rPr lang="en-US" sz="1000" dirty="0">
+                <a:solidFill>
+                  <a:srgbClr val="888888"/>
+                </a:solidFill>
+              </a:rPr>
+              <a:t>React, TypeScript, Supabase — our stack is live. You own the product end-to-end.</a:t>
+            </a:r>
+            <a:endParaRPr lang="en-US" sz="1000" dirty="0"/>
+          </a:p>
+        </p:txBody>
+      </p:sp>
+      <p:sp>
+        <p:nvSpPr>
+          <p:cNvPr id="14" name="Text 12"/>
+          <p:cNvSpPr/>
+          <p:nvPr/>
+        </p:nvSpPr>
+        <p:spPr>
+          <a:xfrm>
+            <a:off x="640080" y="3383280"/>
+            <a:ext cx="3840480" cy="237744"/>
+          </a:xfrm>
+          <a:prstGeom prst="rect">
+            <a:avLst/>
+          </a:prstGeom>
+          <a:noFill/>
+          <a:ln/>
+        </p:spPr>
+        <p:txBody>
+          <a:bodyPr wrap="square" lIns="0" tIns="0" rIns="0" bIns="0" rtlCol="0" anchor="ctr"/>
+          <a:lstStyle/>
+          <a:p>
+            <a:pPr indent="0" marL="0">
+              <a:buNone/>
+            </a:pPr>
+            <a:r>
+              <a:rPr lang="en-US" sz="1200" b="1" dirty="0">
+                <a:solidFill>
+                  <a:srgbClr val="FFFFFF"/>
+                </a:solidFill>
+              </a:rPr>
+              <a:t>Product Thinker</a:t>
+            </a:r>
+            <a:endParaRPr lang="en-US" sz="1200" dirty="0"/>
+          </a:p>
+        </p:txBody>
+      </p:sp>
+      <p:sp>
+        <p:nvSpPr>
+          <p:cNvPr id="15" name="Text 13"/>
+          <p:cNvSpPr/>
+          <p:nvPr/>
+        </p:nvSpPr>
+        <p:spPr>
+          <a:xfrm>
+            <a:off x="640080" y="3639312"/>
+            <a:ext cx="3840480" cy="329184"/>
+          </a:xfrm>
+          <a:prstGeom prst="rect">
+            <a:avLst/>
+          </a:prstGeom>
+          <a:noFill/>
+          <a:ln/>
+        </p:spPr>
+        <p:txBody>
+          <a:bodyPr wrap="square" lIns="0" tIns="0" rIns="0" bIns="0" rtlCol="0" anchor="ctr"/>
+          <a:lstStyle/>
+          <a:p>
+            <a:pPr indent="0" marL="0">
+              <a:buNone/>
+            </a:pPr>
+            <a:r>
+              <a:rPr lang="en-US" sz="1000" dirty="0">
+                <a:solidFill>
+                  <a:srgbClr val="888888"/>
+                </a:solidFill>
+              </a:rPr>
+              <a:t>Build what users want, not what sounds good in a pitch.</a:t>
+            </a:r>
+            <a:endParaRPr lang="en-US" sz="1000" dirty="0"/>
+          </a:p>
+        </p:txBody>
+      </p:sp>
+      <p:sp>
+        <p:nvSpPr>
+          <p:cNvPr id="16" name="Text 14"/>
+          <p:cNvSpPr/>
+          <p:nvPr/>
+        </p:nvSpPr>
+        <p:spPr>
+          <a:xfrm>
+            <a:off x="640080" y="4005072"/>
+            <a:ext cx="3840480" cy="237744"/>
+          </a:xfrm>
+          <a:prstGeom prst="rect">
+            <a:avLst/>
+          </a:prstGeom>
+          <a:noFill/>
+          <a:ln/>
+        </p:spPr>
+        <p:txBody>
+          <a:bodyPr wrap="square" lIns="0" tIns="0" rIns="0" bIns="0" rtlCol="0" anchor="ctr"/>
+          <a:lstStyle/>
+          <a:p>
+            <a:pPr indent="0" marL="0">
+              <a:buNone/>
+            </a:pPr>
+            <a:r>
+              <a:rPr lang="en-US" sz="1200" b="1" dirty="0">
+                <a:solidFill>
+                  <a:srgbClr val="FFFFFF"/>
+                </a:solidFill>
+              </a:rPr>
+              <a:t>Bias for Action</a:t>
+            </a:r>
+            <a:endParaRPr lang="en-US" sz="1200" dirty="0"/>
+          </a:p>
+        </p:txBody>
+      </p:sp>
+      <p:sp>
+        <p:nvSpPr>
+          <p:cNvPr id="17" name="Text 15"/>
+          <p:cNvSpPr/>
+          <p:nvPr/>
+        </p:nvSpPr>
+        <p:spPr>
+          <a:xfrm>
+            <a:off x="640080" y="4261104"/>
+            <a:ext cx="3840480" cy="329184"/>
+          </a:xfrm>
+          <a:prstGeom prst="rect">
+            <a:avLst/>
+          </a:prstGeom>
+          <a:noFill/>
+          <a:ln/>
+        </p:spPr>
+        <p:txBody>
+          <a:bodyPr wrap="square" lIns="0" tIns="0" rIns="0" bIns="0" rtlCol="0" anchor="ctr"/>
+          <a:lstStyle/>
+          <a:p>
+            <a:pPr indent="0" marL="0">
+              <a:buNone/>
+            </a:pPr>
+            <a:r>
+              <a:rPr lang="en-US" sz="1000" dirty="0">
+                <a:solidFill>
+                  <a:srgbClr val="888888"/>
+                </a:solidFill>
+              </a:rPr>
+              <a:t>We have a product and a plan. You ship, iterate, make it real.</a:t>
+            </a:r>
+            <a:endParaRPr lang="en-US" sz="1000" dirty="0"/>
+          </a:p>
+        </p:txBody>
+      </p:sp>
+      <p:sp>
+        <p:nvSpPr>
+          <p:cNvPr id="18" name="Text 16"/>
+          <p:cNvSpPr/>
+          <p:nvPr/>
+        </p:nvSpPr>
+        <p:spPr>
+          <a:xfrm>
+            <a:off x="4846320" y="2377440"/>
             <a:ext cx="3840480" cy="228600"/>
           </a:xfrm>
           <a:prstGeom prst="rect">
@@ -2093,538 +2309,322 @@
               <a:buNone/>
             </a:pPr>
             <a:r>
-              <a:rPr lang="en-US" sz="1100" b="1" dirty="0">
+              <a:rPr lang="en-US" sz="800" b="1" spc="400" kern="0" dirty="0">
+                <a:solidFill>
+                  <a:srgbClr val="4ADE80"/>
+                </a:solidFill>
+              </a:rPr>
+              <a:t>THE OPPORTUNITY</a:t>
+            </a:r>
+            <a:endParaRPr lang="en-US" sz="800" dirty="0"/>
+          </a:p>
+        </p:txBody>
+      </p:sp>
+      <p:sp>
+        <p:nvSpPr>
+          <p:cNvPr id="19" name="Shape 17"/>
+          <p:cNvSpPr/>
+          <p:nvPr/>
+        </p:nvSpPr>
+        <p:spPr>
+          <a:xfrm>
+            <a:off x="4846320" y="2615184"/>
+            <a:ext cx="457200" cy="22860"/>
+          </a:xfrm>
+          <a:prstGeom prst="rect">
+            <a:avLst/>
+          </a:prstGeom>
+          <a:solidFill>
+            <a:srgbClr val="4ADE80"/>
+          </a:solidFill>
+          <a:ln/>
+        </p:spPr>
+      </p:sp>
+      <p:sp>
+        <p:nvSpPr>
+          <p:cNvPr id="20" name="Text 18"/>
+          <p:cNvSpPr/>
+          <p:nvPr/>
+        </p:nvSpPr>
+        <p:spPr>
+          <a:xfrm>
+            <a:off x="4846320" y="2761488"/>
+            <a:ext cx="3840480" cy="237744"/>
+          </a:xfrm>
+          <a:prstGeom prst="rect">
+            <a:avLst/>
+          </a:prstGeom>
+          <a:noFill/>
+          <a:ln/>
+        </p:spPr>
+        <p:txBody>
+          <a:bodyPr wrap="square" lIns="0" tIns="0" rIns="0" bIns="0" rtlCol="0" anchor="ctr"/>
+          <a:lstStyle/>
+          <a:p>
+            <a:pPr indent="0" marL="0">
+              <a:buNone/>
+            </a:pPr>
+            <a:r>
+              <a:rPr lang="en-US" sz="1200" b="1" dirty="0">
                 <a:solidFill>
                   <a:srgbClr val="FFFFFF"/>
                 </a:solidFill>
               </a:rPr>
-              <a:t>Full-Stack Engineer</a:t>
-            </a:r>
-            <a:endParaRPr lang="en-US" sz="1100" dirty="0"/>
-          </a:p>
-        </p:txBody>
-      </p:sp>
-      <p:sp>
-        <p:nvSpPr>
-          <p:cNvPr id="13" name="Text 11"/>
-          <p:cNvSpPr/>
-          <p:nvPr/>
-        </p:nvSpPr>
-        <p:spPr>
-          <a:xfrm>
-            <a:off x="640080" y="2907792"/>
-            <a:ext cx="3840480" cy="365760"/>
-          </a:xfrm>
-          <a:prstGeom prst="rect">
-            <a:avLst/>
-          </a:prstGeom>
-          <a:noFill/>
-          <a:ln/>
-        </p:spPr>
-        <p:txBody>
-          <a:bodyPr wrap="square" lIns="0" tIns="0" rIns="0" bIns="0" rtlCol="0" anchor="ctr"/>
-          <a:lstStyle/>
-          <a:p>
-            <a:pPr indent="0" marL="0">
-              <a:buNone/>
-            </a:pPr>
-            <a:r>
-              <a:rPr lang="en-US" sz="950" dirty="0">
+              <a:t>Co-founder title</a:t>
+            </a:r>
+            <a:endParaRPr lang="en-US" sz="1200" dirty="0"/>
+          </a:p>
+        </p:txBody>
+      </p:sp>
+      <p:sp>
+        <p:nvSpPr>
+          <p:cNvPr id="21" name="Text 19"/>
+          <p:cNvSpPr/>
+          <p:nvPr/>
+        </p:nvSpPr>
+        <p:spPr>
+          <a:xfrm>
+            <a:off x="4846320" y="3017520"/>
+            <a:ext cx="3840480" cy="329184"/>
+          </a:xfrm>
+          <a:prstGeom prst="rect">
+            <a:avLst/>
+          </a:prstGeom>
+          <a:noFill/>
+          <a:ln/>
+        </p:spPr>
+        <p:txBody>
+          <a:bodyPr wrap="square" lIns="0" tIns="0" rIns="0" bIns="0" rtlCol="0" anchor="ctr"/>
+          <a:lstStyle/>
+          <a:p>
+            <a:pPr indent="0" marL="0">
+              <a:buNone/>
+            </a:pPr>
+            <a:r>
+              <a:rPr lang="en-US" sz="1000" dirty="0">
                 <a:solidFill>
                   <a:srgbClr val="888888"/>
                 </a:solidFill>
               </a:rPr>
-              <a:t>React, TypeScript, Supabase — our stack is live. You own the product end-to-end.</a:t>
-            </a:r>
-            <a:endParaRPr lang="en-US" sz="950" dirty="0"/>
-          </a:p>
-        </p:txBody>
-      </p:sp>
-      <p:sp>
-        <p:nvSpPr>
-          <p:cNvPr id="14" name="Text 12"/>
-          <p:cNvSpPr/>
-          <p:nvPr/>
-        </p:nvSpPr>
-        <p:spPr>
-          <a:xfrm>
-            <a:off x="640080" y="3328416"/>
-            <a:ext cx="3840480" cy="228600"/>
-          </a:xfrm>
-          <a:prstGeom prst="rect">
-            <a:avLst/>
-          </a:prstGeom>
-          <a:noFill/>
-          <a:ln/>
-        </p:spPr>
-        <p:txBody>
-          <a:bodyPr wrap="square" lIns="0" tIns="0" rIns="0" bIns="0" rtlCol="0" anchor="ctr"/>
-          <a:lstStyle/>
-          <a:p>
-            <a:pPr indent="0" marL="0">
-              <a:buNone/>
-            </a:pPr>
-            <a:r>
-              <a:rPr lang="en-US" sz="1100" b="1" dirty="0">
+              <a:t>Not an early employee — real equity, real ownership.</a:t>
+            </a:r>
+            <a:endParaRPr lang="en-US" sz="1000" dirty="0"/>
+          </a:p>
+        </p:txBody>
+      </p:sp>
+      <p:sp>
+        <p:nvSpPr>
+          <p:cNvPr id="22" name="Text 20"/>
+          <p:cNvSpPr/>
+          <p:nvPr/>
+        </p:nvSpPr>
+        <p:spPr>
+          <a:xfrm>
+            <a:off x="4846320" y="3383280"/>
+            <a:ext cx="3840480" cy="237744"/>
+          </a:xfrm>
+          <a:prstGeom prst="rect">
+            <a:avLst/>
+          </a:prstGeom>
+          <a:noFill/>
+          <a:ln/>
+        </p:spPr>
+        <p:txBody>
+          <a:bodyPr wrap="square" lIns="0" tIns="0" rIns="0" bIns="0" rtlCol="0" anchor="ctr"/>
+          <a:lstStyle/>
+          <a:p>
+            <a:pPr indent="0" marL="0">
+              <a:buNone/>
+            </a:pPr>
+            <a:r>
+              <a:rPr lang="en-US" sz="1200" b="1" dirty="0">
                 <a:solidFill>
                   <a:srgbClr val="FFFFFF"/>
                 </a:solidFill>
               </a:rPr>
-              <a:t>Product Thinker</a:t>
-            </a:r>
-            <a:endParaRPr lang="en-US" sz="1100" dirty="0"/>
-          </a:p>
-        </p:txBody>
-      </p:sp>
-      <p:sp>
-        <p:nvSpPr>
-          <p:cNvPr id="15" name="Text 13"/>
-          <p:cNvSpPr/>
-          <p:nvPr/>
-        </p:nvSpPr>
-        <p:spPr>
-          <a:xfrm>
-            <a:off x="640080" y="3566160"/>
-            <a:ext cx="3840480" cy="365760"/>
-          </a:xfrm>
-          <a:prstGeom prst="rect">
-            <a:avLst/>
-          </a:prstGeom>
-          <a:noFill/>
-          <a:ln/>
-        </p:spPr>
-        <p:txBody>
-          <a:bodyPr wrap="square" lIns="0" tIns="0" rIns="0" bIns="0" rtlCol="0" anchor="ctr"/>
-          <a:lstStyle/>
-          <a:p>
-            <a:pPr indent="0" marL="0">
-              <a:buNone/>
-            </a:pPr>
-            <a:r>
-              <a:rPr lang="en-US" sz="950" dirty="0">
+              <a:t>Ship something real</a:t>
+            </a:r>
+            <a:endParaRPr lang="en-US" sz="1200" dirty="0"/>
+          </a:p>
+        </p:txBody>
+      </p:sp>
+      <p:sp>
+        <p:nvSpPr>
+          <p:cNvPr id="23" name="Text 21"/>
+          <p:cNvSpPr/>
+          <p:nvPr/>
+        </p:nvSpPr>
+        <p:spPr>
+          <a:xfrm>
+            <a:off x="4846320" y="3639312"/>
+            <a:ext cx="3840480" cy="329184"/>
+          </a:xfrm>
+          <a:prstGeom prst="rect">
+            <a:avLst/>
+          </a:prstGeom>
+          <a:noFill/>
+          <a:ln/>
+        </p:spPr>
+        <p:txBody>
+          <a:bodyPr wrap="square" lIns="0" tIns="0" rIns="0" bIns="0" rtlCol="0" anchor="ctr"/>
+          <a:lstStyle/>
+          <a:p>
+            <a:pPr indent="0" marL="0">
+              <a:buNone/>
+            </a:pPr>
+            <a:r>
+              <a:rPr lang="en-US" sz="1000" dirty="0">
                 <a:solidFill>
                   <a:srgbClr val="888888"/>
                 </a:solidFill>
               </a:rPr>
-              <a:t>Someone who builds what users actually want, not just what sounds good in a pitch.</a:t>
-            </a:r>
-            <a:endParaRPr lang="en-US" sz="950" dirty="0"/>
-          </a:p>
-        </p:txBody>
-      </p:sp>
-      <p:sp>
-        <p:nvSpPr>
-          <p:cNvPr id="16" name="Text 14"/>
-          <p:cNvSpPr/>
-          <p:nvPr/>
-        </p:nvSpPr>
-        <p:spPr>
-          <a:xfrm>
-            <a:off x="640080" y="3986784"/>
-            <a:ext cx="3840480" cy="228600"/>
-          </a:xfrm>
-          <a:prstGeom prst="rect">
-            <a:avLst/>
-          </a:prstGeom>
-          <a:noFill/>
-          <a:ln/>
-        </p:spPr>
-        <p:txBody>
-          <a:bodyPr wrap="square" lIns="0" tIns="0" rIns="0" bIns="0" rtlCol="0" anchor="ctr"/>
-          <a:lstStyle/>
-          <a:p>
-            <a:pPr indent="0" marL="0">
-              <a:buNone/>
-            </a:pPr>
-            <a:r>
-              <a:rPr lang="en-US" sz="1100" b="1" dirty="0">
+              <a:t>A live consumer app. Real bookings in a city you live in.</a:t>
+            </a:r>
+            <a:endParaRPr lang="en-US" sz="1000" dirty="0"/>
+          </a:p>
+        </p:txBody>
+      </p:sp>
+      <p:sp>
+        <p:nvSpPr>
+          <p:cNvPr id="24" name="Text 22"/>
+          <p:cNvSpPr/>
+          <p:nvPr/>
+        </p:nvSpPr>
+        <p:spPr>
+          <a:xfrm>
+            <a:off x="4846320" y="4005072"/>
+            <a:ext cx="3840480" cy="237744"/>
+          </a:xfrm>
+          <a:prstGeom prst="rect">
+            <a:avLst/>
+          </a:prstGeom>
+          <a:noFill/>
+          <a:ln/>
+        </p:spPr>
+        <p:txBody>
+          <a:bodyPr wrap="square" lIns="0" tIns="0" rIns="0" bIns="0" rtlCol="0" anchor="ctr"/>
+          <a:lstStyle/>
+          <a:p>
+            <a:pPr indent="0" marL="0">
+              <a:buNone/>
+            </a:pPr>
+            <a:r>
+              <a:rPr lang="en-US" sz="1200" b="1" dirty="0">
                 <a:solidFill>
                   <a:srgbClr val="FFFFFF"/>
                 </a:solidFill>
               </a:rPr>
-              <a:t>Bias for Action</a:t>
-            </a:r>
-            <a:endParaRPr lang="en-US" sz="1100" dirty="0"/>
-          </a:p>
-        </p:txBody>
-      </p:sp>
-      <p:sp>
-        <p:nvSpPr>
-          <p:cNvPr id="17" name="Text 15"/>
-          <p:cNvSpPr/>
-          <p:nvPr/>
-        </p:nvSpPr>
-        <p:spPr>
-          <a:xfrm>
-            <a:off x="640080" y="4224528"/>
-            <a:ext cx="3840480" cy="365760"/>
-          </a:xfrm>
-          <a:prstGeom prst="rect">
-            <a:avLst/>
-          </a:prstGeom>
-          <a:noFill/>
-          <a:ln/>
-        </p:spPr>
-        <p:txBody>
-          <a:bodyPr wrap="square" lIns="0" tIns="0" rIns="0" bIns="0" rtlCol="0" anchor="ctr"/>
-          <a:lstStyle/>
-          <a:p>
-            <a:pPr indent="0" marL="0">
-              <a:buNone/>
-            </a:pPr>
-            <a:r>
-              <a:rPr lang="en-US" sz="950" dirty="0">
+              <a:t>Madrid is open</a:t>
+            </a:r>
+            <a:endParaRPr lang="en-US" sz="1200" dirty="0"/>
+          </a:p>
+        </p:txBody>
+      </p:sp>
+      <p:sp>
+        <p:nvSpPr>
+          <p:cNvPr id="25" name="Text 23"/>
+          <p:cNvSpPr/>
+          <p:nvPr/>
+        </p:nvSpPr>
+        <p:spPr>
+          <a:xfrm>
+            <a:off x="4846320" y="4261104"/>
+            <a:ext cx="3840480" cy="329184"/>
+          </a:xfrm>
+          <a:prstGeom prst="rect">
+            <a:avLst/>
+          </a:prstGeom>
+          <a:noFill/>
+          <a:ln/>
+        </p:spPr>
+        <p:txBody>
+          <a:bodyPr wrap="square" lIns="0" tIns="0" rIns="0" bIns="0" rtlCol="0" anchor="ctr"/>
+          <a:lstStyle/>
+          <a:p>
+            <a:pPr indent="0" marL="0">
+              <a:buNone/>
+            </a:pPr>
+            <a:r>
+              <a:rPr lang="en-US" sz="1000" dirty="0">
                 <a:solidFill>
                   <a:srgbClr val="888888"/>
                 </a:solidFill>
               </a:rPr>
-              <a:t>We have a product, a market, and a plan. You ship, iterate, and make it real.</a:t>
-            </a:r>
-            <a:endParaRPr lang="en-US" sz="950" dirty="0"/>
-          </a:p>
-        </p:txBody>
-      </p:sp>
-      <p:sp>
-        <p:nvSpPr>
-          <p:cNvPr id="18" name="Text 16"/>
-          <p:cNvSpPr/>
-          <p:nvPr/>
-        </p:nvSpPr>
-        <p:spPr>
-          <a:xfrm>
-            <a:off x="4846320" y="2286000"/>
-            <a:ext cx="3840480" cy="228600"/>
-          </a:xfrm>
-          <a:prstGeom prst="rect">
-            <a:avLst/>
-          </a:prstGeom>
-          <a:noFill/>
-          <a:ln/>
-        </p:spPr>
-        <p:txBody>
-          <a:bodyPr wrap="square" lIns="0" tIns="0" rIns="0" bIns="0" rtlCol="0" anchor="ctr"/>
-          <a:lstStyle/>
-          <a:p>
-            <a:pPr indent="0" marL="0">
-              <a:buNone/>
-            </a:pPr>
-            <a:r>
-              <a:rPr lang="en-US" sz="800" b="1" spc="400" kern="0" dirty="0">
-                <a:solidFill>
-                  <a:srgbClr val="4ADE80"/>
-                </a:solidFill>
-              </a:rPr>
-              <a:t>THE OPPORTUNITY</a:t>
-            </a:r>
-            <a:endParaRPr lang="en-US" sz="800" dirty="0"/>
-          </a:p>
-        </p:txBody>
-      </p:sp>
-      <p:sp>
-        <p:nvSpPr>
-          <p:cNvPr id="19" name="Shape 17"/>
-          <p:cNvSpPr/>
-          <p:nvPr/>
-        </p:nvSpPr>
-        <p:spPr>
-          <a:xfrm>
-            <a:off x="4846320" y="2523744"/>
-            <a:ext cx="548640" cy="22860"/>
-          </a:xfrm>
-          <a:prstGeom prst="rect">
-            <a:avLst/>
-          </a:prstGeom>
-          <a:solidFill>
-            <a:srgbClr val="4ADE80"/>
-          </a:solidFill>
-          <a:ln/>
-        </p:spPr>
-      </p:sp>
-      <p:sp>
-        <p:nvSpPr>
-          <p:cNvPr id="20" name="Text 18"/>
-          <p:cNvSpPr/>
-          <p:nvPr/>
-        </p:nvSpPr>
-        <p:spPr>
-          <a:xfrm>
-            <a:off x="4846320" y="2670048"/>
-            <a:ext cx="3840480" cy="228600"/>
-          </a:xfrm>
-          <a:prstGeom prst="rect">
-            <a:avLst/>
-          </a:prstGeom>
-          <a:noFill/>
-          <a:ln/>
-        </p:spPr>
-        <p:txBody>
-          <a:bodyPr wrap="square" lIns="0" tIns="0" rIns="0" bIns="0" rtlCol="0" anchor="ctr"/>
-          <a:lstStyle/>
-          <a:p>
-            <a:pPr indent="0" marL="0">
-              <a:buNone/>
-            </a:pPr>
-            <a:r>
-              <a:rPr lang="en-US" sz="1100" b="1" dirty="0">
+              <a:t>No dominant player. Timing is right. Market is ready.</a:t>
+            </a:r>
+            <a:endParaRPr lang="en-US" sz="1000" dirty="0"/>
+          </a:p>
+        </p:txBody>
+      </p:sp>
+      <p:sp>
+        <p:nvSpPr>
+          <p:cNvPr id="26" name="Text 24"/>
+          <p:cNvSpPr/>
+          <p:nvPr/>
+        </p:nvSpPr>
+        <p:spPr>
+          <a:xfrm>
+            <a:off x="4846320" y="4626864"/>
+            <a:ext cx="3840480" cy="237744"/>
+          </a:xfrm>
+          <a:prstGeom prst="rect">
+            <a:avLst/>
+          </a:prstGeom>
+          <a:noFill/>
+          <a:ln/>
+        </p:spPr>
+        <p:txBody>
+          <a:bodyPr wrap="square" lIns="0" tIns="0" rIns="0" bIns="0" rtlCol="0" anchor="ctr"/>
+          <a:lstStyle/>
+          <a:p>
+            <a:pPr indent="0" marL="0">
+              <a:buNone/>
+            </a:pPr>
+            <a:r>
+              <a:rPr lang="en-US" sz="1200" b="1" dirty="0">
                 <a:solidFill>
                   <a:srgbClr val="FFFFFF"/>
                 </a:solidFill>
               </a:rPr>
-              <a:t>Co-founder title</a:t>
-            </a:r>
-            <a:endParaRPr lang="en-US" sz="1100" dirty="0"/>
-          </a:p>
-        </p:txBody>
-      </p:sp>
-      <p:sp>
-        <p:nvSpPr>
-          <p:cNvPr id="21" name="Text 19"/>
-          <p:cNvSpPr/>
-          <p:nvPr/>
-        </p:nvSpPr>
-        <p:spPr>
-          <a:xfrm>
-            <a:off x="4846320" y="2907792"/>
-            <a:ext cx="3840480" cy="365760"/>
-          </a:xfrm>
-          <a:prstGeom prst="rect">
-            <a:avLst/>
-          </a:prstGeom>
-          <a:noFill/>
-          <a:ln/>
-        </p:spPr>
-        <p:txBody>
-          <a:bodyPr wrap="square" lIns="0" tIns="0" rIns="0" bIns="0" rtlCol="0" anchor="ctr"/>
-          <a:lstStyle/>
-          <a:p>
-            <a:pPr indent="0" marL="0">
-              <a:buNone/>
-            </a:pPr>
-            <a:r>
-              <a:rPr lang="en-US" sz="950" dirty="0">
+              <a:t>Your sandbox</a:t>
+            </a:r>
+            <a:endParaRPr lang="en-US" sz="1200" dirty="0"/>
+          </a:p>
+        </p:txBody>
+      </p:sp>
+      <p:sp>
+        <p:nvSpPr>
+          <p:cNvPr id="27" name="Text 25"/>
+          <p:cNvSpPr/>
+          <p:nvPr/>
+        </p:nvSpPr>
+        <p:spPr>
+          <a:xfrm>
+            <a:off x="4846320" y="4882896"/>
+            <a:ext cx="3840480" cy="329184"/>
+          </a:xfrm>
+          <a:prstGeom prst="rect">
+            <a:avLst/>
+          </a:prstGeom>
+          <a:noFill/>
+          <a:ln/>
+        </p:spPr>
+        <p:txBody>
+          <a:bodyPr wrap="square" lIns="0" tIns="0" rIns="0" bIns="0" rtlCol="0" anchor="ctr"/>
+          <a:lstStyle/>
+          <a:p>
+            <a:pPr indent="0" marL="0">
+              <a:buNone/>
+            </a:pPr>
+            <a:r>
+              <a:rPr lang="en-US" sz="1000" dirty="0">
                 <a:solidFill>
                   <a:srgbClr val="888888"/>
                 </a:solidFill>
               </a:rPr>
-              <a:t>Not an early employee — a real co-founder with real equity.</a:t>
-            </a:r>
-            <a:endParaRPr lang="en-US" sz="950" dirty="0"/>
-          </a:p>
-        </p:txBody>
-      </p:sp>
-      <p:sp>
-        <p:nvSpPr>
-          <p:cNvPr id="22" name="Text 20"/>
-          <p:cNvSpPr/>
-          <p:nvPr/>
-        </p:nvSpPr>
-        <p:spPr>
-          <a:xfrm>
-            <a:off x="4846320" y="3328416"/>
-            <a:ext cx="3840480" cy="228600"/>
-          </a:xfrm>
-          <a:prstGeom prst="rect">
-            <a:avLst/>
-          </a:prstGeom>
-          <a:noFill/>
-          <a:ln/>
-        </p:spPr>
-        <p:txBody>
-          <a:bodyPr wrap="square" lIns="0" tIns="0" rIns="0" bIns="0" rtlCol="0" anchor="ctr"/>
-          <a:lstStyle/>
-          <a:p>
-            <a:pPr indent="0" marL="0">
-              <a:buNone/>
-            </a:pPr>
-            <a:r>
-              <a:rPr lang="en-US" sz="1100" b="1" dirty="0">
-                <a:solidFill>
-                  <a:srgbClr val="FFFFFF"/>
-                </a:solidFill>
-              </a:rPr>
-              <a:t>Ship something real</a:t>
-            </a:r>
-            <a:endParaRPr lang="en-US" sz="1100" dirty="0"/>
-          </a:p>
-        </p:txBody>
-      </p:sp>
-      <p:sp>
-        <p:nvSpPr>
-          <p:cNvPr id="23" name="Text 21"/>
-          <p:cNvSpPr/>
-          <p:nvPr/>
-        </p:nvSpPr>
-        <p:spPr>
-          <a:xfrm>
-            <a:off x="4846320" y="3566160"/>
-            <a:ext cx="3840480" cy="365760"/>
-          </a:xfrm>
-          <a:prstGeom prst="rect">
-            <a:avLst/>
-          </a:prstGeom>
-          <a:noFill/>
-          <a:ln/>
-        </p:spPr>
-        <p:txBody>
-          <a:bodyPr wrap="square" lIns="0" tIns="0" rIns="0" bIns="0" rtlCol="0" anchor="ctr"/>
-          <a:lstStyle/>
-          <a:p>
-            <a:pPr indent="0" marL="0">
-              <a:buNone/>
-            </a:pPr>
-            <a:r>
-              <a:rPr lang="en-US" sz="950" dirty="0">
-                <a:solidFill>
-                  <a:srgbClr val="888888"/>
-                </a:solidFill>
-              </a:rPr>
-              <a:t>A live consumer app in a city you live in. Real bookings.</a:t>
-            </a:r>
-            <a:endParaRPr lang="en-US" sz="950" dirty="0"/>
-          </a:p>
-        </p:txBody>
-      </p:sp>
-      <p:sp>
-        <p:nvSpPr>
-          <p:cNvPr id="24" name="Text 22"/>
-          <p:cNvSpPr/>
-          <p:nvPr/>
-        </p:nvSpPr>
-        <p:spPr>
-          <a:xfrm>
-            <a:off x="4846320" y="3986784"/>
-            <a:ext cx="3840480" cy="228600"/>
-          </a:xfrm>
-          <a:prstGeom prst="rect">
-            <a:avLst/>
-          </a:prstGeom>
-          <a:noFill/>
-          <a:ln/>
-        </p:spPr>
-        <p:txBody>
-          <a:bodyPr wrap="square" lIns="0" tIns="0" rIns="0" bIns="0" rtlCol="0" anchor="ctr"/>
-          <a:lstStyle/>
-          <a:p>
-            <a:pPr indent="0" marL="0">
-              <a:buNone/>
-            </a:pPr>
-            <a:r>
-              <a:rPr lang="en-US" sz="1100" b="1" dirty="0">
-                <a:solidFill>
-                  <a:srgbClr val="FFFFFF"/>
-                </a:solidFill>
-              </a:rPr>
-              <a:t>Madrid is open</a:t>
-            </a:r>
-            <a:endParaRPr lang="en-US" sz="1100" dirty="0"/>
-          </a:p>
-        </p:txBody>
-      </p:sp>
-      <p:sp>
-        <p:nvSpPr>
-          <p:cNvPr id="25" name="Text 23"/>
-          <p:cNvSpPr/>
-          <p:nvPr/>
-        </p:nvSpPr>
-        <p:spPr>
-          <a:xfrm>
-            <a:off x="4846320" y="4224528"/>
-            <a:ext cx="3840480" cy="365760"/>
-          </a:xfrm>
-          <a:prstGeom prst="rect">
-            <a:avLst/>
-          </a:prstGeom>
-          <a:noFill/>
-          <a:ln/>
-        </p:spPr>
-        <p:txBody>
-          <a:bodyPr wrap="square" lIns="0" tIns="0" rIns="0" bIns="0" rtlCol="0" anchor="ctr"/>
-          <a:lstStyle/>
-          <a:p>
-            <a:pPr indent="0" marL="0">
-              <a:buNone/>
-            </a:pPr>
-            <a:r>
-              <a:rPr lang="en-US" sz="950" dirty="0">
-                <a:solidFill>
-                  <a:srgbClr val="888888"/>
-                </a:solidFill>
-              </a:rPr>
-              <a:t>The market is untapped. No dominant player. Timing is right.</a:t>
-            </a:r>
-            <a:endParaRPr lang="en-US" sz="950" dirty="0"/>
-          </a:p>
-        </p:txBody>
-      </p:sp>
-      <p:sp>
-        <p:nvSpPr>
-          <p:cNvPr id="26" name="Text 24"/>
-          <p:cNvSpPr/>
-          <p:nvPr/>
-        </p:nvSpPr>
-        <p:spPr>
-          <a:xfrm>
-            <a:off x="4846320" y="4645152"/>
-            <a:ext cx="3840480" cy="228600"/>
-          </a:xfrm>
-          <a:prstGeom prst="rect">
-            <a:avLst/>
-          </a:prstGeom>
-          <a:noFill/>
-          <a:ln/>
-        </p:spPr>
-        <p:txBody>
-          <a:bodyPr wrap="square" lIns="0" tIns="0" rIns="0" bIns="0" rtlCol="0" anchor="ctr"/>
-          <a:lstStyle/>
-          <a:p>
-            <a:pPr indent="0" marL="0">
-              <a:buNone/>
-            </a:pPr>
-            <a:r>
-              <a:rPr lang="en-US" sz="1100" b="1" dirty="0">
-                <a:solidFill>
-                  <a:srgbClr val="FFFFFF"/>
-                </a:solidFill>
-              </a:rPr>
-              <a:t>Your sandbox</a:t>
-            </a:r>
-            <a:endParaRPr lang="en-US" sz="1100" dirty="0"/>
-          </a:p>
-        </p:txBody>
-      </p:sp>
-      <p:sp>
-        <p:nvSpPr>
-          <p:cNvPr id="27" name="Text 25"/>
-          <p:cNvSpPr/>
-          <p:nvPr/>
-        </p:nvSpPr>
-        <p:spPr>
-          <a:xfrm>
-            <a:off x="4846320" y="4882896"/>
-            <a:ext cx="3840480" cy="365760"/>
-          </a:xfrm>
-          <a:prstGeom prst="rect">
-            <a:avLst/>
-          </a:prstGeom>
-          <a:noFill/>
-          <a:ln/>
-        </p:spPr>
-        <p:txBody>
-          <a:bodyPr wrap="square" lIns="0" tIns="0" rIns="0" bIns="0" rtlCol="0" anchor="ctr"/>
-          <a:lstStyle/>
-          <a:p>
-            <a:pPr indent="0" marL="0">
-              <a:buNone/>
-            </a:pPr>
-            <a:r>
-              <a:rPr lang="en-US" sz="950" dirty="0">
-                <a:solidFill>
-                  <a:srgbClr val="888888"/>
-                </a:solidFill>
-              </a:rPr>
-              <a:t>React, Supabase, AI features, booking flow — you decide the roadmap.</a:t>
-            </a:r>
-            <a:endParaRPr lang="en-US" sz="950" dirty="0"/>
+              <a:t>React, Supabase, AI features — you own the roadmap.</a:t>
+            </a:r>
+            <a:endParaRPr lang="en-US" sz="1000" dirty="0"/>
           </a:p>
         </p:txBody>
       </p:sp>
@@ -2745,7 +2745,7 @@
         <p:spPr>
           <a:xfrm>
             <a:off x="0" y="45720"/>
-            <a:ext cx="9144000" cy="475488"/>
+            <a:ext cx="9144000" cy="457200"/>
           </a:xfrm>
           <a:prstGeom prst="rect">
             <a:avLst/>
@@ -2764,24 +2764,24 @@
         </p:nvSpPr>
         <p:spPr>
           <a:xfrm>
-            <a:off x="640080" y="137160"/>
-            <a:ext cx="2743200" cy="274320"/>
-          </a:xfrm>
-          <a:prstGeom prst="rect">
-            <a:avLst/>
-          </a:prstGeom>
-          <a:noFill/>
-          <a:ln/>
-        </p:spPr>
-        <p:txBody>
-          <a:bodyPr wrap="square" lIns="0" tIns="0" rIns="0" bIns="0" rtlCol="0" anchor="ctr"/>
-          <a:lstStyle/>
-          <a:p>
-            <a:pPr indent="0" marL="0">
-              <a:buNone/>
-            </a:pPr>
-            <a:r>
-              <a:rPr lang="en-US" sz="1000" b="1" spc="400" kern="0" dirty="0">
+            <a:off x="640080" y="128016"/>
+            <a:ext cx="2743200" cy="256032"/>
+          </a:xfrm>
+          <a:prstGeom prst="rect">
+            <a:avLst/>
+          </a:prstGeom>
+          <a:noFill/>
+          <a:ln/>
+        </p:spPr>
+        <p:txBody>
+          <a:bodyPr wrap="square" lIns="0" tIns="0" rIns="0" bIns="0" rtlCol="0" anchor="ctr"/>
+          <a:lstStyle/>
+          <a:p>
+            <a:pPr indent="0" marL="0">
+              <a:buNone/>
+            </a:pPr>
+            <a:r>
+              <a:rPr lang="en-US" sz="1000" b="1" spc="500" kern="0" dirty="0">
                 <a:solidFill>
                   <a:srgbClr val="4ADE80"/>
                 </a:solidFill>
@@ -2800,8 +2800,8 @@
         </p:nvSpPr>
         <p:spPr>
           <a:xfrm>
-            <a:off x="4572000" y="137160"/>
-            <a:ext cx="3931920" cy="274320"/>
+            <a:off x="4572000" y="128016"/>
+            <a:ext cx="3931920" cy="256032"/>
           </a:xfrm>
           <a:prstGeom prst="rect">
             <a:avLst/>
@@ -2837,44 +2837,44 @@
         <p:spPr>
           <a:xfrm>
             <a:off x="640080" y="658368"/>
-            <a:ext cx="7772400" cy="914400"/>
-          </a:xfrm>
-          <a:prstGeom prst="rect">
-            <a:avLst/>
-          </a:prstGeom>
-          <a:noFill/>
-          <a:ln/>
-        </p:spPr>
-        <p:txBody>
-          <a:bodyPr wrap="square" lIns="0" tIns="0" rIns="0" bIns="0" rtlCol="0" anchor="ctr"/>
-          <a:lstStyle/>
-          <a:p>
-            <a:pPr indent="0" marL="0">
-              <a:buNone/>
-            </a:pPr>
-            <a:r>
-              <a:rPr lang="en-US" sz="4200" b="1" dirty="0">
+            <a:ext cx="7772400" cy="1005840"/>
+          </a:xfrm>
+          <a:prstGeom prst="rect">
+            <a:avLst/>
+          </a:prstGeom>
+          <a:noFill/>
+          <a:ln/>
+        </p:spPr>
+        <p:txBody>
+          <a:bodyPr wrap="square" lIns="0" tIns="0" rIns="0" bIns="0" rtlCol="0" anchor="ctr"/>
+          <a:lstStyle/>
+          <a:p>
+            <a:pPr indent="0" marL="0">
+              <a:buNone/>
+            </a:pPr>
+            <a:r>
+              <a:rPr lang="en-US" sz="4800" b="1" dirty="0">
                 <a:solidFill>
                   <a:srgbClr val="FFFFFF"/>
                 </a:solidFill>
               </a:rPr>
               <a:t>Why this. Why now.</a:t>
             </a:r>
-            <a:endParaRPr lang="en-US" sz="4200" dirty="0"/>
-          </a:p>
-          <a:p>
-            <a:pPr indent="0" marL="0">
-              <a:buNone/>
-            </a:pPr>
-            <a:r>
-              <a:rPr lang="en-US" sz="4200" b="1" dirty="0">
+            <a:endParaRPr lang="en-US" sz="4800" dirty="0"/>
+          </a:p>
+          <a:p>
+            <a:pPr indent="0" marL="0">
+              <a:buNone/>
+            </a:pPr>
+            <a:r>
+              <a:rPr lang="en-US" sz="4800" b="1" dirty="0">
                 <a:solidFill>
                   <a:srgbClr val="FFFFFF"/>
                 </a:solidFill>
               </a:rPr>
               <a:t>Why you.</a:t>
             </a:r>
-            <a:endParaRPr lang="en-US" sz="4200" dirty="0"/>
+            <a:endParaRPr lang="en-US" sz="4800" dirty="0"/>
           </a:p>
         </p:txBody>
       </p:sp>
@@ -2886,7 +2886,7 @@
         </p:nvSpPr>
         <p:spPr>
           <a:xfrm>
-            <a:off x="640080" y="1627632"/>
+            <a:off x="640080" y="1719072"/>
             <a:ext cx="6858000" cy="320040"/>
           </a:xfrm>
           <a:prstGeom prst="rect">
@@ -2922,7 +2922,7 @@
         </p:nvSpPr>
         <p:spPr>
           <a:xfrm>
-            <a:off x="640080" y="2057400"/>
+            <a:off x="640080" y="2194560"/>
             <a:ext cx="7863840" cy="9144"/>
           </a:xfrm>
           <a:prstGeom prst="rect">
@@ -2942,8 +2942,8 @@
         </p:nvSpPr>
         <p:spPr>
           <a:xfrm>
-            <a:off x="640080" y="2240280"/>
-            <a:ext cx="3794760" cy="1097280"/>
+            <a:off x="640080" y="2331720"/>
+            <a:ext cx="3794760" cy="1078992"/>
           </a:xfrm>
           <a:prstGeom prst="rect">
             <a:avLst/>
@@ -2962,8 +2962,8 @@
         </p:nvSpPr>
         <p:spPr>
           <a:xfrm>
-            <a:off x="640080" y="2240280"/>
-            <a:ext cx="45720" cy="1097280"/>
+            <a:off x="640080" y="2331720"/>
+            <a:ext cx="45720" cy="1078992"/>
           </a:xfrm>
           <a:prstGeom prst="rect">
             <a:avLst/>
@@ -2982,31 +2982,31 @@
         </p:nvSpPr>
         <p:spPr>
           <a:xfrm>
-            <a:off x="822960" y="2350008"/>
-            <a:ext cx="457200" cy="274320"/>
-          </a:xfrm>
-          <a:prstGeom prst="rect">
-            <a:avLst/>
-          </a:prstGeom>
-          <a:noFill/>
-          <a:ln/>
-        </p:spPr>
-        <p:txBody>
-          <a:bodyPr wrap="square" lIns="0" tIns="0" rIns="0" bIns="0" rtlCol="0" anchor="ctr"/>
-          <a:lstStyle/>
-          <a:p>
-            <a:pPr indent="0" marL="0">
-              <a:buNone/>
-            </a:pPr>
-            <a:r>
-              <a:rPr lang="en-US" sz="1800" b="1" dirty="0">
+            <a:off x="822960" y="2459736"/>
+            <a:ext cx="548640" cy="320040"/>
+          </a:xfrm>
+          <a:prstGeom prst="rect">
+            <a:avLst/>
+          </a:prstGeom>
+          <a:noFill/>
+          <a:ln/>
+        </p:spPr>
+        <p:txBody>
+          <a:bodyPr wrap="square" lIns="0" tIns="0" rIns="0" bIns="0" rtlCol="0" anchor="ctr"/>
+          <a:lstStyle/>
+          <a:p>
+            <a:pPr indent="0" marL="0">
+              <a:buNone/>
+            </a:pPr>
+            <a:r>
+              <a:rPr lang="en-US" sz="2200" b="1" dirty="0">
                 <a:solidFill>
                   <a:srgbClr val="4ADE80"/>
                 </a:solidFill>
               </a:rPr>
               <a:t>01</a:t>
             </a:r>
-            <a:endParaRPr lang="en-US" sz="1800" dirty="0"/>
+            <a:endParaRPr lang="en-US" sz="2200" dirty="0"/>
           </a:p>
         </p:txBody>
       </p:sp>
@@ -3018,31 +3018,31 @@
         </p:nvSpPr>
         <p:spPr>
           <a:xfrm>
-            <a:off x="1280160" y="2368296"/>
-            <a:ext cx="2926080" cy="274320"/>
-          </a:xfrm>
-          <a:prstGeom prst="rect">
-            <a:avLst/>
-          </a:prstGeom>
-          <a:noFill/>
-          <a:ln/>
-        </p:spPr>
-        <p:txBody>
-          <a:bodyPr wrap="square" lIns="0" tIns="0" rIns="0" bIns="0" rtlCol="0" anchor="ctr"/>
-          <a:lstStyle/>
-          <a:p>
-            <a:pPr indent="0" marL="0">
-              <a:buNone/>
-            </a:pPr>
-            <a:r>
-              <a:rPr lang="en-US" sz="1100" b="1" dirty="0">
+            <a:off x="1371600" y="2478024"/>
+            <a:ext cx="2834640" cy="292608"/>
+          </a:xfrm>
+          <a:prstGeom prst="rect">
+            <a:avLst/>
+          </a:prstGeom>
+          <a:noFill/>
+          <a:ln/>
+        </p:spPr>
+        <p:txBody>
+          <a:bodyPr wrap="square" lIns="0" tIns="0" rIns="0" bIns="0" rtlCol="0" anchor="ctr"/>
+          <a:lstStyle/>
+          <a:p>
+            <a:pPr indent="0" marL="0">
+              <a:buNone/>
+            </a:pPr>
+            <a:r>
+              <a:rPr lang="en-US" sz="1200" b="1" dirty="0">
                 <a:solidFill>
                   <a:srgbClr val="FFFFFF"/>
                 </a:solidFill>
               </a:rPr>
               <a:t>Real product, real market</a:t>
             </a:r>
-            <a:endParaRPr lang="en-US" sz="1100" dirty="0"/>
+            <a:endParaRPr lang="en-US" sz="1200" dirty="0"/>
           </a:p>
         </p:txBody>
       </p:sp>
@@ -3054,31 +3054,31 @@
         </p:nvSpPr>
         <p:spPr>
           <a:xfrm>
-            <a:off x="822960" y="2697480"/>
-            <a:ext cx="3383280" cy="548640"/>
-          </a:xfrm>
-          <a:prstGeom prst="rect">
-            <a:avLst/>
-          </a:prstGeom>
-          <a:noFill/>
-          <a:ln/>
-        </p:spPr>
-        <p:txBody>
-          <a:bodyPr wrap="square" lIns="0" tIns="0" rIns="0" bIns="0" rtlCol="0" anchor="ctr"/>
-          <a:lstStyle/>
-          <a:p>
-            <a:pPr indent="0" marL="0">
-              <a:buNone/>
-            </a:pPr>
-            <a:r>
-              <a:rPr lang="en-US" sz="950" dirty="0">
+            <a:off x="822960" y="2843784"/>
+            <a:ext cx="3383280" cy="502920"/>
+          </a:xfrm>
+          <a:prstGeom prst="rect">
+            <a:avLst/>
+          </a:prstGeom>
+          <a:noFill/>
+          <a:ln/>
+        </p:spPr>
+        <p:txBody>
+          <a:bodyPr wrap="square" lIns="0" tIns="0" rIns="0" bIns="0" rtlCol="0" anchor="ctr"/>
+          <a:lstStyle/>
+          <a:p>
+            <a:pPr indent="0" marL="0">
+              <a:buNone/>
+            </a:pPr>
+            <a:r>
+              <a:rPr lang="en-US" sz="1000" dirty="0">
                 <a:solidFill>
                   <a:srgbClr val="888888"/>
                 </a:solidFill>
               </a:rPr>
-              <a:t>The app is live. The subscription model is proven elsewhere. Madrid is untapped and ready.</a:t>
-            </a:r>
-            <a:endParaRPr lang="en-US" sz="950" dirty="0"/>
+              <a:t>The app is live. The subscription model proven elsewhere. Madrid is untapped.</a:t>
+            </a:r>
+            <a:endParaRPr lang="en-US" sz="1000" dirty="0"/>
           </a:p>
         </p:txBody>
       </p:sp>
@@ -3090,8 +3090,8 @@
         </p:nvSpPr>
         <p:spPr>
           <a:xfrm>
-            <a:off x="4709160" y="2240280"/>
-            <a:ext cx="3794760" cy="1097280"/>
+            <a:off x="4709160" y="2331720"/>
+            <a:ext cx="3794760" cy="1078992"/>
           </a:xfrm>
           <a:prstGeom prst="rect">
             <a:avLst/>
@@ -3110,8 +3110,8 @@
         </p:nvSpPr>
         <p:spPr>
           <a:xfrm>
-            <a:off x="4709160" y="2240280"/>
-            <a:ext cx="45720" cy="1097280"/>
+            <a:off x="4709160" y="2331720"/>
+            <a:ext cx="45720" cy="1078992"/>
           </a:xfrm>
           <a:prstGeom prst="rect">
             <a:avLst/>
@@ -3130,31 +3130,31 @@
         </p:nvSpPr>
         <p:spPr>
           <a:xfrm>
-            <a:off x="4892040" y="2350008"/>
-            <a:ext cx="457200" cy="274320"/>
-          </a:xfrm>
-          <a:prstGeom prst="rect">
-            <a:avLst/>
-          </a:prstGeom>
-          <a:noFill/>
-          <a:ln/>
-        </p:spPr>
-        <p:txBody>
-          <a:bodyPr wrap="square" lIns="0" tIns="0" rIns="0" bIns="0" rtlCol="0" anchor="ctr"/>
-          <a:lstStyle/>
-          <a:p>
-            <a:pPr indent="0" marL="0">
-              <a:buNone/>
-            </a:pPr>
-            <a:r>
-              <a:rPr lang="en-US" sz="1800" b="1" dirty="0">
+            <a:off x="4892040" y="2459736"/>
+            <a:ext cx="548640" cy="320040"/>
+          </a:xfrm>
+          <a:prstGeom prst="rect">
+            <a:avLst/>
+          </a:prstGeom>
+          <a:noFill/>
+          <a:ln/>
+        </p:spPr>
+        <p:txBody>
+          <a:bodyPr wrap="square" lIns="0" tIns="0" rIns="0" bIns="0" rtlCol="0" anchor="ctr"/>
+          <a:lstStyle/>
+          <a:p>
+            <a:pPr indent="0" marL="0">
+              <a:buNone/>
+            </a:pPr>
+            <a:r>
+              <a:rPr lang="en-US" sz="2200" b="1" dirty="0">
                 <a:solidFill>
                   <a:srgbClr val="60A5FA"/>
                 </a:solidFill>
               </a:rPr>
               <a:t>02</a:t>
             </a:r>
-            <a:endParaRPr lang="en-US" sz="1800" dirty="0"/>
+            <a:endParaRPr lang="en-US" sz="2200" dirty="0"/>
           </a:p>
         </p:txBody>
       </p:sp>
@@ -3166,31 +3166,31 @@
         </p:nvSpPr>
         <p:spPr>
           <a:xfrm>
-            <a:off x="5349240" y="2368296"/>
-            <a:ext cx="2926080" cy="274320"/>
-          </a:xfrm>
-          <a:prstGeom prst="rect">
-            <a:avLst/>
-          </a:prstGeom>
-          <a:noFill/>
-          <a:ln/>
-        </p:spPr>
-        <p:txBody>
-          <a:bodyPr wrap="square" lIns="0" tIns="0" rIns="0" bIns="0" rtlCol="0" anchor="ctr"/>
-          <a:lstStyle/>
-          <a:p>
-            <a:pPr indent="0" marL="0">
-              <a:buNone/>
-            </a:pPr>
-            <a:r>
-              <a:rPr lang="en-US" sz="1100" b="1" dirty="0">
+            <a:off x="5440680" y="2478024"/>
+            <a:ext cx="2834640" cy="292608"/>
+          </a:xfrm>
+          <a:prstGeom prst="rect">
+            <a:avLst/>
+          </a:prstGeom>
+          <a:noFill/>
+          <a:ln/>
+        </p:spPr>
+        <p:txBody>
+          <a:bodyPr wrap="square" lIns="0" tIns="0" rIns="0" bIns="0" rtlCol="0" anchor="ctr"/>
+          <a:lstStyle/>
+          <a:p>
+            <a:pPr indent="0" marL="0">
+              <a:buNone/>
+            </a:pPr>
+            <a:r>
+              <a:rPr lang="en-US" sz="1200" b="1" dirty="0">
                 <a:solidFill>
                   <a:srgbClr val="FFFFFF"/>
                 </a:solidFill>
               </a:rPr>
               <a:t>Get in at the start</a:t>
             </a:r>
-            <a:endParaRPr lang="en-US" sz="1100" dirty="0"/>
+            <a:endParaRPr lang="en-US" sz="1200" dirty="0"/>
           </a:p>
         </p:txBody>
       </p:sp>
@@ -3202,31 +3202,31 @@
         </p:nvSpPr>
         <p:spPr>
           <a:xfrm>
-            <a:off x="4892040" y="2697480"/>
-            <a:ext cx="3383280" cy="548640"/>
-          </a:xfrm>
-          <a:prstGeom prst="rect">
-            <a:avLst/>
-          </a:prstGeom>
-          <a:noFill/>
-          <a:ln/>
-        </p:spPr>
-        <p:txBody>
-          <a:bodyPr wrap="square" lIns="0" tIns="0" rIns="0" bIns="0" rtlCol="0" anchor="ctr"/>
-          <a:lstStyle/>
-          <a:p>
-            <a:pPr indent="0" marL="0">
-              <a:buNone/>
-            </a:pPr>
-            <a:r>
-              <a:rPr lang="en-US" sz="950" dirty="0">
+            <a:off x="4892040" y="2843784"/>
+            <a:ext cx="3383280" cy="502920"/>
+          </a:xfrm>
+          <a:prstGeom prst="rect">
+            <a:avLst/>
+          </a:prstGeom>
+          <a:noFill/>
+          <a:ln/>
+        </p:spPr>
+        <p:txBody>
+          <a:bodyPr wrap="square" lIns="0" tIns="0" rIns="0" bIns="0" rtlCol="0" anchor="ctr"/>
+          <a:lstStyle/>
+          <a:p>
+            <a:pPr indent="0" marL="0">
+              <a:buNone/>
+            </a:pPr>
+            <a:r>
+              <a:rPr lang="en-US" sz="1000" dirty="0">
                 <a:solidFill>
                   <a:srgbClr val="888888"/>
                 </a:solidFill>
               </a:rPr>
-              <a:t>Co-founder title, meaningful equity. You won't be employee #47 — you'll be the person who built this.</a:t>
-            </a:r>
-            <a:endParaRPr lang="en-US" sz="950" dirty="0"/>
+              <a:t>Co-founder title, meaningful equity. You build this — not join it.</a:t>
+            </a:r>
+            <a:endParaRPr lang="en-US" sz="1000" dirty="0"/>
           </a:p>
         </p:txBody>
       </p:sp>
@@ -3238,8 +3238,8 @@
         </p:nvSpPr>
         <p:spPr>
           <a:xfrm>
-            <a:off x="640080" y="3520440"/>
-            <a:ext cx="3794760" cy="1097280"/>
+            <a:off x="640080" y="3566160"/>
+            <a:ext cx="3794760" cy="1078992"/>
           </a:xfrm>
           <a:prstGeom prst="rect">
             <a:avLst/>
@@ -3258,8 +3258,8 @@
         </p:nvSpPr>
         <p:spPr>
           <a:xfrm>
-            <a:off x="640080" y="3520440"/>
-            <a:ext cx="45720" cy="1097280"/>
+            <a:off x="640080" y="3566160"/>
+            <a:ext cx="45720" cy="1078992"/>
           </a:xfrm>
           <a:prstGeom prst="rect">
             <a:avLst/>
@@ -3278,31 +3278,31 @@
         </p:nvSpPr>
         <p:spPr>
           <a:xfrm>
-            <a:off x="822960" y="3630168"/>
-            <a:ext cx="457200" cy="274320"/>
-          </a:xfrm>
-          <a:prstGeom prst="rect">
-            <a:avLst/>
-          </a:prstGeom>
-          <a:noFill/>
-          <a:ln/>
-        </p:spPr>
-        <p:txBody>
-          <a:bodyPr wrap="square" lIns="0" tIns="0" rIns="0" bIns="0" rtlCol="0" anchor="ctr"/>
-          <a:lstStyle/>
-          <a:p>
-            <a:pPr indent="0" marL="0">
-              <a:buNone/>
-            </a:pPr>
-            <a:r>
-              <a:rPr lang="en-US" sz="1800" b="1" dirty="0">
+            <a:off x="822960" y="3694176"/>
+            <a:ext cx="548640" cy="320040"/>
+          </a:xfrm>
+          <a:prstGeom prst="rect">
+            <a:avLst/>
+          </a:prstGeom>
+          <a:noFill/>
+          <a:ln/>
+        </p:spPr>
+        <p:txBody>
+          <a:bodyPr wrap="square" lIns="0" tIns="0" rIns="0" bIns="0" rtlCol="0" anchor="ctr"/>
+          <a:lstStyle/>
+          <a:p>
+            <a:pPr indent="0" marL="0">
+              <a:buNone/>
+            </a:pPr>
+            <a:r>
+              <a:rPr lang="en-US" sz="2200" b="1" dirty="0">
                 <a:solidFill>
                   <a:srgbClr val="FB923C"/>
                 </a:solidFill>
               </a:rPr>
               <a:t>03</a:t>
             </a:r>
-            <a:endParaRPr lang="en-US" sz="1800" dirty="0"/>
+            <a:endParaRPr lang="en-US" sz="2200" dirty="0"/>
           </a:p>
         </p:txBody>
       </p:sp>
@@ -3314,31 +3314,31 @@
         </p:nvSpPr>
         <p:spPr>
           <a:xfrm>
-            <a:off x="1280160" y="3648456"/>
-            <a:ext cx="2926080" cy="274320"/>
-          </a:xfrm>
-          <a:prstGeom prst="rect">
-            <a:avLst/>
-          </a:prstGeom>
-          <a:noFill/>
-          <a:ln/>
-        </p:spPr>
-        <p:txBody>
-          <a:bodyPr wrap="square" lIns="0" tIns="0" rIns="0" bIns="0" rtlCol="0" anchor="ctr"/>
-          <a:lstStyle/>
-          <a:p>
-            <a:pPr indent="0" marL="0">
-              <a:buNone/>
-            </a:pPr>
-            <a:r>
-              <a:rPr lang="en-US" sz="1100" b="1" dirty="0">
+            <a:off x="1371600" y="3712464"/>
+            <a:ext cx="2834640" cy="292608"/>
+          </a:xfrm>
+          <a:prstGeom prst="rect">
+            <a:avLst/>
+          </a:prstGeom>
+          <a:noFill/>
+          <a:ln/>
+        </p:spPr>
+        <p:txBody>
+          <a:bodyPr wrap="square" lIns="0" tIns="0" rIns="0" bIns="0" rtlCol="0" anchor="ctr"/>
+          <a:lstStyle/>
+          <a:p>
+            <a:pPr indent="0" marL="0">
+              <a:buNone/>
+            </a:pPr>
+            <a:r>
+              <a:rPr lang="en-US" sz="1200" b="1" dirty="0">
                 <a:solidFill>
                   <a:srgbClr val="FFFFFF"/>
                 </a:solidFill>
               </a:rPr>
-              <a:t>A market that isn't going anywhere</a:t>
-            </a:r>
-            <a:endParaRPr lang="en-US" sz="1100" dirty="0"/>
+              <a:t>A market that isn’t going anywhere</a:t>
+            </a:r>
+            <a:endParaRPr lang="en-US" sz="1200" dirty="0"/>
           </a:p>
         </p:txBody>
       </p:sp>
@@ -3350,31 +3350,31 @@
         </p:nvSpPr>
         <p:spPr>
           <a:xfrm>
-            <a:off x="822960" y="3977640"/>
-            <a:ext cx="3383280" cy="548640"/>
-          </a:xfrm>
-          <a:prstGeom prst="rect">
-            <a:avLst/>
-          </a:prstGeom>
-          <a:noFill/>
-          <a:ln/>
-        </p:spPr>
-        <p:txBody>
-          <a:bodyPr wrap="square" lIns="0" tIns="0" rIns="0" bIns="0" rtlCol="0" anchor="ctr"/>
-          <a:lstStyle/>
-          <a:p>
-            <a:pPr indent="0" marL="0">
-              <a:buNone/>
-            </a:pPr>
-            <a:r>
-              <a:rPr lang="en-US" sz="950" dirty="0">
+            <a:off x="822960" y="4078224"/>
+            <a:ext cx="3383280" cy="502920"/>
+          </a:xfrm>
+          <a:prstGeom prst="rect">
+            <a:avLst/>
+          </a:prstGeom>
+          <a:noFill/>
+          <a:ln/>
+        </p:spPr>
+        <p:txBody>
+          <a:bodyPr wrap="square" lIns="0" tIns="0" rIns="0" bIns="0" rtlCol="0" anchor="ctr"/>
+          <a:lstStyle/>
+          <a:p>
+            <a:pPr indent="0" marL="0">
+              <a:buNone/>
+            </a:pPr>
+            <a:r>
+              <a:rPr lang="en-US" sz="1000" dirty="0">
                 <a:solidFill>
                   <a:srgbClr val="888888"/>
                 </a:solidFill>
               </a:rPr>
-              <a:t>Wellness is growing. People are spending more on their bodies. This is the right category at the right time.</a:t>
-            </a:r>
-            <a:endParaRPr lang="en-US" sz="950" dirty="0"/>
+              <a:t>Wellness is growing. People spend more on their bodies. Right category, right time.</a:t>
+            </a:r>
+            <a:endParaRPr lang="en-US" sz="1000" dirty="0"/>
           </a:p>
         </p:txBody>
       </p:sp>
@@ -3386,8 +3386,8 @@
         </p:nvSpPr>
         <p:spPr>
           <a:xfrm>
-            <a:off x="4709160" y="3520440"/>
-            <a:ext cx="3794760" cy="1097280"/>
+            <a:off x="4709160" y="3566160"/>
+            <a:ext cx="3794760" cy="1078992"/>
           </a:xfrm>
           <a:prstGeom prst="rect">
             <a:avLst/>
@@ -3406,8 +3406,8 @@
         </p:nvSpPr>
         <p:spPr>
           <a:xfrm>
-            <a:off x="4709160" y="3520440"/>
-            <a:ext cx="45720" cy="1097280"/>
+            <a:off x="4709160" y="3566160"/>
+            <a:ext cx="45720" cy="1078992"/>
           </a:xfrm>
           <a:prstGeom prst="rect">
             <a:avLst/>
@@ -3426,31 +3426,31 @@
         </p:nvSpPr>
         <p:spPr>
           <a:xfrm>
-            <a:off x="4892040" y="3630168"/>
-            <a:ext cx="457200" cy="274320"/>
-          </a:xfrm>
-          <a:prstGeom prst="rect">
-            <a:avLst/>
-          </a:prstGeom>
-          <a:noFill/>
-          <a:ln/>
-        </p:spPr>
-        <p:txBody>
-          <a:bodyPr wrap="square" lIns="0" tIns="0" rIns="0" bIns="0" rtlCol="0" anchor="ctr"/>
-          <a:lstStyle/>
-          <a:p>
-            <a:pPr indent="0" marL="0">
-              <a:buNone/>
-            </a:pPr>
-            <a:r>
-              <a:rPr lang="en-US" sz="1800" b="1" dirty="0">
+            <a:off x="4892040" y="3694176"/>
+            <a:ext cx="548640" cy="320040"/>
+          </a:xfrm>
+          <a:prstGeom prst="rect">
+            <a:avLst/>
+          </a:prstGeom>
+          <a:noFill/>
+          <a:ln/>
+        </p:spPr>
+        <p:txBody>
+          <a:bodyPr wrap="square" lIns="0" tIns="0" rIns="0" bIns="0" rtlCol="0" anchor="ctr"/>
+          <a:lstStyle/>
+          <a:p>
+            <a:pPr indent="0" marL="0">
+              <a:buNone/>
+            </a:pPr>
+            <a:r>
+              <a:rPr lang="en-US" sz="2200" b="1" dirty="0">
                 <a:solidFill>
                   <a:srgbClr val="4ADE80"/>
                 </a:solidFill>
               </a:rPr>
               <a:t>04</a:t>
             </a:r>
-            <a:endParaRPr lang="en-US" sz="1800" dirty="0"/>
+            <a:endParaRPr lang="en-US" sz="2200" dirty="0"/>
           </a:p>
         </p:txBody>
       </p:sp>
@@ -3462,31 +3462,31 @@
         </p:nvSpPr>
         <p:spPr>
           <a:xfrm>
-            <a:off x="5349240" y="3648456"/>
-            <a:ext cx="2926080" cy="274320"/>
-          </a:xfrm>
-          <a:prstGeom prst="rect">
-            <a:avLst/>
-          </a:prstGeom>
-          <a:noFill/>
-          <a:ln/>
-        </p:spPr>
-        <p:txBody>
-          <a:bodyPr wrap="square" lIns="0" tIns="0" rIns="0" bIns="0" rtlCol="0" anchor="ctr"/>
-          <a:lstStyle/>
-          <a:p>
-            <a:pPr indent="0" marL="0">
-              <a:buNone/>
-            </a:pPr>
-            <a:r>
-              <a:rPr lang="en-US" sz="1100" b="1" dirty="0">
+            <a:off x="5440680" y="3712464"/>
+            <a:ext cx="2834640" cy="292608"/>
+          </a:xfrm>
+          <a:prstGeom prst="rect">
+            <a:avLst/>
+          </a:prstGeom>
+          <a:noFill/>
+          <a:ln/>
+        </p:spPr>
+        <p:txBody>
+          <a:bodyPr wrap="square" lIns="0" tIns="0" rIns="0" bIns="0" rtlCol="0" anchor="ctr"/>
+          <a:lstStyle/>
+          <a:p>
+            <a:pPr indent="0" marL="0">
+              <a:buNone/>
+            </a:pPr>
+            <a:r>
+              <a:rPr lang="en-US" sz="1200" b="1" dirty="0">
                 <a:solidFill>
                   <a:srgbClr val="FFFFFF"/>
                 </a:solidFill>
               </a:rPr>
               <a:t>Build something you can show</a:t>
             </a:r>
-            <a:endParaRPr lang="en-US" sz="1100" dirty="0"/>
+            <a:endParaRPr lang="en-US" sz="1200" dirty="0"/>
           </a:p>
         </p:txBody>
       </p:sp>
@@ -3498,31 +3498,31 @@
         </p:nvSpPr>
         <p:spPr>
           <a:xfrm>
-            <a:off x="4892040" y="3977640"/>
-            <a:ext cx="3383280" cy="548640"/>
-          </a:xfrm>
-          <a:prstGeom prst="rect">
-            <a:avLst/>
-          </a:prstGeom>
-          <a:noFill/>
-          <a:ln/>
-        </p:spPr>
-        <p:txBody>
-          <a:bodyPr wrap="square" lIns="0" tIns="0" rIns="0" bIns="0" rtlCol="0" anchor="ctr"/>
-          <a:lstStyle/>
-          <a:p>
-            <a:pPr indent="0" marL="0">
-              <a:buNone/>
-            </a:pPr>
-            <a:r>
-              <a:rPr lang="en-US" sz="950" dirty="0">
+            <a:off x="4892040" y="4078224"/>
+            <a:ext cx="3383280" cy="502920"/>
+          </a:xfrm>
+          <a:prstGeom prst="rect">
+            <a:avLst/>
+          </a:prstGeom>
+          <a:noFill/>
+          <a:ln/>
+        </p:spPr>
+        <p:txBody>
+          <a:bodyPr wrap="square" lIns="0" tIns="0" rIns="0" bIns="0" rtlCol="0" anchor="ctr"/>
+          <a:lstStyle/>
+          <a:p>
+            <a:pPr indent="0" marL="0">
+              <a:buNone/>
+            </a:pPr>
+            <a:r>
+              <a:rPr lang="en-US" sz="1000" dirty="0">
                 <a:solidFill>
                   <a:srgbClr val="888888"/>
                 </a:solidFill>
               </a:rPr>
-              <a:t>A consumer app in a city you live in. Real users, real bookings, real impact on people's lives.</a:t>
-            </a:r>
-            <a:endParaRPr lang="en-US" sz="950" dirty="0"/>
+              <a:t>Consumer app in a city you live in. Real users, real bookings, real impact.</a:t>
+            </a:r>
+            <a:endParaRPr lang="en-US" sz="1000" dirty="0"/>
           </a:p>
         </p:txBody>
       </p:sp>
@@ -3554,99 +3554,43 @@
         </p:nvSpPr>
         <p:spPr>
           <a:xfrm>
+            <a:off x="640080" y="4736592"/>
+            <a:ext cx="6400800" cy="320040"/>
+          </a:xfrm>
+          <a:prstGeom prst="rect">
+            <a:avLst/>
+          </a:prstGeom>
+          <a:noFill/>
+          <a:ln/>
+        </p:spPr>
+        <p:txBody>
+          <a:bodyPr wrap="square" lIns="0" tIns="0" rIns="0" bIns="0" rtlCol="0" anchor="ctr"/>
+          <a:lstStyle/>
+          <a:p>
+            <a:pPr indent="0" marL="0">
+              <a:buNone/>
+            </a:pPr>
+            <a:r>
+              <a:rPr lang="en-US" sz="1100" dirty="0">
+                <a:solidFill>
+                  <a:srgbClr val="4ADE80"/>
+                </a:solidFill>
+              </a:rPr>
+              <a:t>Interested? Let's talk.  →  jordan@massageclub.io</a:t>
+            </a:r>
+            <a:endParaRPr lang="en-US" sz="1100" dirty="0"/>
+          </a:p>
+        </p:txBody>
+      </p:sp>
+      <p:sp>
+        <p:nvSpPr>
+          <p:cNvPr id="31" name="Text 29"/>
+          <p:cNvSpPr/>
+          <p:nvPr/>
+        </p:nvSpPr>
+        <p:spPr>
+          <a:xfrm>
             <a:off x="8412480" y="4754880"/>
-            <a:ext cx="548640" cy="256032"/>
-          </a:xfrm>
-          <a:prstGeom prst="rect">
-            <a:avLst/>
-          </a:prstGeom>
-          <a:noFill/>
-          <a:ln/>
-        </p:spPr>
-        <p:txBody>
-          <a:bodyPr wrap="square" lIns="0" tIns="0" rIns="0" bIns="0" rtlCol="0" anchor="ctr"/>
-          <a:lstStyle/>
-          <a:p>
-            <a:pPr algn="r" indent="0" marL="0">
-              <a:buNone/>
-            </a:pPr>
-            <a:r>
-              <a:rPr lang="en-US" sz="900" dirty="0">
-                <a:solidFill>
-                  <a:srgbClr val="555555"/>
-                </a:solidFill>
-              </a:rPr>
-              <a:t>03</a:t>
-            </a:r>
-            <a:endParaRPr lang="en-US" sz="900" dirty="0"/>
-          </a:p>
-        </p:txBody>
-      </p:sp>
-      <p:sp>
-        <p:nvSpPr>
-          <p:cNvPr id="31" name="Shape 29"/>
-          <p:cNvSpPr/>
-          <p:nvPr/>
-        </p:nvSpPr>
-        <p:spPr>
-          <a:xfrm>
-            <a:off x="0" y="4663440"/>
-            <a:ext cx="9144000" cy="480060"/>
-          </a:xfrm>
-          <a:prstGeom prst="rect">
-            <a:avLst/>
-          </a:prstGeom>
-          <a:solidFill>
-            <a:srgbClr val="111111"/>
-          </a:solidFill>
-          <a:ln/>
-        </p:spPr>
-      </p:sp>
-      <p:sp>
-        <p:nvSpPr>
-          <p:cNvPr id="32" name="Text 30"/>
-          <p:cNvSpPr/>
-          <p:nvPr/>
-        </p:nvSpPr>
-        <p:spPr>
-          <a:xfrm>
-            <a:off x="640080" y="4736592"/>
-            <a:ext cx="7315200" cy="320040"/>
-          </a:xfrm>
-          <a:prstGeom prst="rect">
-            <a:avLst/>
-          </a:prstGeom>
-          <a:noFill/>
-          <a:ln/>
-        </p:spPr>
-        <p:txBody>
-          <a:bodyPr wrap="square" lIns="0" tIns="0" rIns="0" bIns="0" rtlCol="0" anchor="ctr"/>
-          <a:lstStyle/>
-          <a:p>
-            <a:pPr indent="0" marL="0">
-              <a:buNone/>
-            </a:pPr>
-            <a:r>
-              <a:rPr lang="en-US" sz="1000" dirty="0">
-                <a:solidFill>
-                  <a:srgbClr val="4ADE80"/>
-                </a:solidFill>
-              </a:rPr>
-              <a:t>Interested? Let's talk.  →  jordan@massageclub.io</a:t>
-            </a:r>
-            <a:endParaRPr lang="en-US" sz="1000" dirty="0"/>
-          </a:p>
-        </p:txBody>
-      </p:sp>
-      <p:sp>
-        <p:nvSpPr>
-          <p:cNvPr id="33" name="Text 31"/>
-          <p:cNvSpPr/>
-          <p:nvPr/>
-        </p:nvSpPr>
-        <p:spPr>
-          <a:xfrm>
-            <a:off x="8412480" y="4736592"/>
             <a:ext cx="548640" cy="256032"/>
           </a:xfrm>
           <a:prstGeom prst="rect">

--- a/massage_club_cofounder_deck.pptx
+++ b/massage_club_cofounder_deck.pptx
@@ -1035,7 +1035,7 @@
     <p:bg>
       <p:bgPr>
         <a:solidFill>
-          <a:srgbClr val="F5F0E8"/>
+          <a:srgbClr val="F8F6F0"/>
         </a:solidFill>
       </p:bgPr>
     </p:bg>
@@ -1062,13 +1062,13 @@
         <p:spPr>
           <a:xfrm>
             <a:off x="0" y="0"/>
-            <a:ext cx="9144000" cy="777240"/>
-          </a:xfrm>
-          <a:prstGeom prst="rect">
-            <a:avLst/>
-          </a:prstGeom>
-          <a:solidFill>
-            <a:srgbClr val="3D0A10"/>
+            <a:ext cx="9144000" cy="804672"/>
+          </a:xfrm>
+          <a:prstGeom prst="rect">
+            <a:avLst/>
+          </a:prstGeom>
+          <a:solidFill>
+            <a:srgbClr val="A31422"/>
           </a:solidFill>
           <a:ln/>
         </p:spPr>
@@ -1081,14 +1081,14 @@
         </p:nvSpPr>
         <p:spPr>
           <a:xfrm>
-            <a:off x="0" y="777240"/>
-            <a:ext cx="9144000" cy="54864"/>
-          </a:xfrm>
-          <a:prstGeom prst="rect">
-            <a:avLst/>
-          </a:prstGeom>
-          <a:solidFill>
-            <a:srgbClr val="D4A532"/>
+            <a:off x="0" y="804672"/>
+            <a:ext cx="9144000" cy="50292"/>
+          </a:xfrm>
+          <a:prstGeom prst="rect">
+            <a:avLst/>
+          </a:prstGeom>
+          <a:solidFill>
+            <a:srgbClr val="E4AA25"/>
           </a:solidFill>
           <a:ln/>
         </p:spPr>
@@ -1101,8 +1101,8 @@
         </p:nvSpPr>
         <p:spPr>
           <a:xfrm>
-            <a:off x="640080" y="164592"/>
-            <a:ext cx="2743200" cy="274320"/>
+            <a:off x="594360" y="146304"/>
+            <a:ext cx="3200400" cy="292608"/>
           </a:xfrm>
           <a:prstGeom prst="rect">
             <a:avLst/>
@@ -1120,8 +1120,11 @@
             <a:r>
               <a:rPr lang="en-US" sz="1100" b="1" spc="500" kern="0" dirty="0">
                 <a:solidFill>
-                  <a:srgbClr val="D4A532"/>
-                </a:solidFill>
+                  <a:srgbClr val="E4AA25"/>
+                </a:solidFill>
+                <a:latin typeface="Calibri" pitchFamily="34" charset="0"/>
+                <a:ea typeface="Calibri" pitchFamily="34" charset="-122"/>
+                <a:cs typeface="Calibri" pitchFamily="34" charset="-120"/>
               </a:rPr>
               <a:t>MASSAGE CLUB</a:t>
             </a:r>
@@ -1137,8 +1140,125 @@
         </p:nvSpPr>
         <p:spPr>
           <a:xfrm>
-            <a:off x="4114800" y="164592"/>
-            <a:ext cx="4389120" cy="274320"/>
+            <a:off x="594360" y="475488"/>
+            <a:ext cx="3657600" cy="228600"/>
+          </a:xfrm>
+          <a:prstGeom prst="rect">
+            <a:avLst/>
+          </a:prstGeom>
+          <a:noFill/>
+          <a:ln/>
+        </p:spPr>
+        <p:txBody>
+          <a:bodyPr wrap="square" lIns="0" tIns="0" rIns="0" bIns="0" rtlCol="0" anchor="ctr"/>
+          <a:lstStyle/>
+          <a:p>
+            <a:pPr indent="0" marL="0">
+              <a:buNone/>
+            </a:pPr>
+            <a:r>
+              <a:rPr lang="en-US" sz="800" spc="300" kern="0" dirty="0">
+                <a:solidFill>
+                  <a:srgbClr val="E8B4B4"/>
+                </a:solidFill>
+                <a:latin typeface="Calibri" pitchFamily="34" charset="0"/>
+                <a:ea typeface="Calibri" pitchFamily="34" charset="-122"/>
+                <a:cs typeface="Calibri" pitchFamily="34" charset="-120"/>
+              </a:rPr>
+              <a:t>THE COMPANY</a:t>
+            </a:r>
+            <a:endParaRPr lang="en-US" sz="800" dirty="0"/>
+          </a:p>
+        </p:txBody>
+      </p:sp>
+      <p:sp>
+        <p:nvSpPr>
+          <p:cNvPr id="6" name="Text 4"/>
+          <p:cNvSpPr/>
+          <p:nvPr/>
+        </p:nvSpPr>
+        <p:spPr>
+          <a:xfrm>
+            <a:off x="594360" y="987552"/>
+            <a:ext cx="6400800" cy="658368"/>
+          </a:xfrm>
+          <a:prstGeom prst="rect">
+            <a:avLst/>
+          </a:prstGeom>
+          <a:noFill/>
+          <a:ln/>
+        </p:spPr>
+        <p:txBody>
+          <a:bodyPr wrap="square" lIns="0" tIns="0" rIns="0" bIns="0" rtlCol="0" anchor="ctr"/>
+          <a:lstStyle/>
+          <a:p>
+            <a:pPr indent="0" marL="0">
+              <a:buNone/>
+            </a:pPr>
+            <a:r>
+              <a:rPr lang="en-US" sz="4200" b="1" dirty="0">
+                <a:solidFill>
+                  <a:srgbClr val="A31422"/>
+                </a:solidFill>
+                <a:latin typeface="Calibri" pitchFamily="34" charset="0"/>
+                <a:ea typeface="Calibri" pitchFamily="34" charset="-122"/>
+                <a:cs typeface="Calibri" pitchFamily="34" charset="-120"/>
+              </a:rPr>
+              <a:t>Massage Club</a:t>
+            </a:r>
+            <a:endParaRPr lang="en-US" sz="4200" dirty="0"/>
+          </a:p>
+        </p:txBody>
+      </p:sp>
+      <p:sp>
+        <p:nvSpPr>
+          <p:cNvPr id="7" name="Text 5"/>
+          <p:cNvSpPr/>
+          <p:nvPr/>
+        </p:nvSpPr>
+        <p:spPr>
+          <a:xfrm>
+            <a:off x="594360" y="1664208"/>
+            <a:ext cx="5486400" cy="292608"/>
+          </a:xfrm>
+          <a:prstGeom prst="rect">
+            <a:avLst/>
+          </a:prstGeom>
+          <a:noFill/>
+          <a:ln/>
+        </p:spPr>
+        <p:txBody>
+          <a:bodyPr wrap="square" lIns="0" tIns="0" rIns="0" bIns="0" rtlCol="0" anchor="ctr"/>
+          <a:lstStyle/>
+          <a:p>
+            <a:pPr indent="0" marL="0">
+              <a:buNone/>
+            </a:pPr>
+            <a:r>
+              <a:rPr lang="en-US" sz="1400" dirty="0">
+                <a:solidFill>
+                  <a:srgbClr val="E8E2D8"/>
+                </a:solidFill>
+                <a:latin typeface="Calibri" pitchFamily="34" charset="0"/>
+                <a:ea typeface="Calibri" pitchFamily="34" charset="-122"/>
+                <a:cs typeface="Calibri" pitchFamily="34" charset="-120"/>
+              </a:rPr>
+              <a:t>Masajes ilimitados. Una suscripción.</a:t>
+            </a:r>
+            <a:endParaRPr lang="en-US" sz="1400" dirty="0"/>
+          </a:p>
+        </p:txBody>
+      </p:sp>
+      <p:sp>
+        <p:nvSpPr>
+          <p:cNvPr id="8" name="Text 6"/>
+          <p:cNvSpPr/>
+          <p:nvPr/>
+        </p:nvSpPr>
+        <p:spPr>
+          <a:xfrm>
+            <a:off x="6858000" y="1664208"/>
+            <a:ext cx="1828800" cy="228600"/>
           </a:xfrm>
           <a:prstGeom prst="rect">
             <a:avLst/>
@@ -1154,27 +1274,90 @@
               <a:buNone/>
             </a:pPr>
             <a:r>
-              <a:rPr lang="en-US" sz="900" dirty="0">
-                <a:solidFill>
-                  <a:srgbClr val="EDE5D8"/>
-                </a:solidFill>
-              </a:rPr>
-              <a:t>massageclub.io  ·  Madrid, Spain</a:t>
-            </a:r>
-            <a:endParaRPr lang="en-US" sz="900" dirty="0"/>
-          </a:p>
-        </p:txBody>
-      </p:sp>
-      <p:sp>
-        <p:nvSpPr>
-          <p:cNvPr id="6" name="Text 4"/>
-          <p:cNvSpPr/>
-          <p:nvPr/>
-        </p:nvSpPr>
-        <p:spPr>
-          <a:xfrm>
-            <a:off x="640080" y="475488"/>
-            <a:ext cx="2743200" cy="201168"/>
+              <a:rPr lang="en-US" sz="800" dirty="0">
+                <a:solidFill>
+                  <a:srgbClr val="B8A98A"/>
+                </a:solidFill>
+                <a:latin typeface="Calibri" pitchFamily="34" charset="0"/>
+                <a:ea typeface="Calibri" pitchFamily="34" charset="-122"/>
+                <a:cs typeface="Calibri" pitchFamily="34" charset="-120"/>
+              </a:rPr>
+              <a:t>Slide 1 of 3</a:t>
+            </a:r>
+            <a:endParaRPr lang="en-US" sz="800" dirty="0"/>
+          </a:p>
+        </p:txBody>
+      </p:sp>
+      <p:sp>
+        <p:nvSpPr>
+          <p:cNvPr id="9" name="Shape 7"/>
+          <p:cNvSpPr/>
+          <p:nvPr/>
+        </p:nvSpPr>
+        <p:spPr>
+          <a:xfrm>
+            <a:off x="594360" y="2057400"/>
+            <a:ext cx="7955280" cy="18288"/>
+          </a:xfrm>
+          <a:prstGeom prst="rect">
+            <a:avLst/>
+          </a:prstGeom>
+          <a:solidFill>
+            <a:srgbClr val="DED5C3"/>
+          </a:solidFill>
+          <a:ln/>
+        </p:spPr>
+      </p:sp>
+      <p:sp>
+        <p:nvSpPr>
+          <p:cNvPr id="10" name="Shape 8"/>
+          <p:cNvSpPr/>
+          <p:nvPr/>
+        </p:nvSpPr>
+        <p:spPr>
+          <a:xfrm>
+            <a:off x="594360" y="2212848"/>
+            <a:ext cx="2331720" cy="2359152"/>
+          </a:xfrm>
+          <a:prstGeom prst="rect">
+            <a:avLst/>
+          </a:prstGeom>
+          <a:solidFill>
+            <a:srgbClr val="FCFAF7"/>
+          </a:solidFill>
+          <a:ln/>
+        </p:spPr>
+      </p:sp>
+      <p:sp>
+        <p:nvSpPr>
+          <p:cNvPr id="11" name="Shape 9"/>
+          <p:cNvSpPr/>
+          <p:nvPr/>
+        </p:nvSpPr>
+        <p:spPr>
+          <a:xfrm>
+            <a:off x="594360" y="2212848"/>
+            <a:ext cx="2331720" cy="50292"/>
+          </a:xfrm>
+          <a:prstGeom prst="rect">
+            <a:avLst/>
+          </a:prstGeom>
+          <a:solidFill>
+            <a:srgbClr val="A31422"/>
+          </a:solidFill>
+          <a:ln/>
+        </p:spPr>
+      </p:sp>
+      <p:sp>
+        <p:nvSpPr>
+          <p:cNvPr id="12" name="Text 10"/>
+          <p:cNvSpPr/>
+          <p:nvPr/>
+        </p:nvSpPr>
+        <p:spPr>
+          <a:xfrm>
+            <a:off x="777240" y="2377440"/>
+            <a:ext cx="2286000" cy="201168"/>
           </a:xfrm>
           <a:prstGeom prst="rect">
             <a:avLst/>
@@ -1190,27 +1373,155 @@
               <a:buNone/>
             </a:pPr>
             <a:r>
-              <a:rPr lang="en-US" sz="800" b="1" spc="300" kern="0" dirty="0">
-                <a:solidFill>
-                  <a:srgbClr val="C9B89A"/>
-                </a:solidFill>
-              </a:rPr>
-              <a:t>THE COMPANY</a:t>
-            </a:r>
-            <a:endParaRPr lang="en-US" sz="800" dirty="0"/>
-          </a:p>
-        </p:txBody>
-      </p:sp>
-      <p:sp>
-        <p:nvSpPr>
-          <p:cNvPr id="7" name="Text 5"/>
-          <p:cNvSpPr/>
-          <p:nvPr/>
-        </p:nvSpPr>
-        <p:spPr>
-          <a:xfrm>
-            <a:off x="640080" y="1005840"/>
-            <a:ext cx="5486400" cy="594360"/>
+              <a:rPr lang="en-US" sz="750" b="1" spc="300" kern="0" dirty="0">
+                <a:solidFill>
+                  <a:srgbClr val="A31422"/>
+                </a:solidFill>
+                <a:latin typeface="Calibri" pitchFamily="34" charset="0"/>
+                <a:ea typeface="Calibri" pitchFamily="34" charset="-122"/>
+                <a:cs typeface="Calibri" pitchFamily="34" charset="-120"/>
+              </a:rPr>
+              <a:t>THE PROBLEM</a:t>
+            </a:r>
+            <a:endParaRPr lang="en-US" sz="750" dirty="0"/>
+          </a:p>
+        </p:txBody>
+      </p:sp>
+      <p:sp>
+        <p:nvSpPr>
+          <p:cNvPr id="13" name="Text 11"/>
+          <p:cNvSpPr/>
+          <p:nvPr/>
+        </p:nvSpPr>
+        <p:spPr>
+          <a:xfrm>
+            <a:off x="777240" y="2670048"/>
+            <a:ext cx="1965960" cy="1737360"/>
+          </a:xfrm>
+          <a:prstGeom prst="rect">
+            <a:avLst/>
+          </a:prstGeom>
+          <a:noFill/>
+          <a:ln/>
+        </p:spPr>
+        <p:txBody>
+          <a:bodyPr wrap="square" lIns="0" tIns="0" rIns="0" bIns="0" rtlCol="0" anchor="ctr"/>
+          <a:lstStyle/>
+          <a:p>
+            <a:pPr marL="342900" indent="-342900">
+              <a:spcAft>
+                <a:spcPts val="500"/>
+              </a:spcAft>
+              <a:buSzPct val="100000"/>
+              <a:buChar char="•"/>
+            </a:pPr>
+            <a:r>
+              <a:rPr lang="en-US" sz="1000" dirty="0">
+                <a:solidFill>
+                  <a:srgbClr val="331313"/>
+                </a:solidFill>
+                <a:latin typeface="Calibri" pitchFamily="34" charset="0"/>
+                <a:ea typeface="Calibri" pitchFamily="34" charset="-122"/>
+                <a:cs typeface="Calibri" pitchFamily="34" charset="-120"/>
+              </a:rPr>
+              <a:t>No hay plataforma central — reserva fragmentada entre Google, FB y paseos</a:t>
+            </a:r>
+            <a:endParaRPr lang="en-US" sz="1000" dirty="0"/>
+          </a:p>
+          <a:p>
+            <a:pPr marL="342900" indent="-342900">
+              <a:spcAft>
+                <a:spcPts val="500"/>
+              </a:spcAft>
+              <a:buSzPct val="100000"/>
+              <a:buChar char="•"/>
+            </a:pPr>
+            <a:r>
+              <a:rPr lang="en-US" sz="1000" dirty="0">
+                <a:solidFill>
+                  <a:srgbClr val="331313"/>
+                </a:solidFill>
+                <a:latin typeface="Calibri" pitchFamily="34" charset="0"/>
+                <a:ea typeface="Calibri" pitchFamily="34" charset="-122"/>
+                <a:cs typeface="Calibri" pitchFamily="34" charset="-120"/>
+              </a:rPr>
+              <a:t>Las plataformas cobran 30–40% de comisión</a:t>
+            </a:r>
+            <a:endParaRPr lang="en-US" sz="1000" dirty="0"/>
+          </a:p>
+          <a:p>
+            <a:pPr marL="342900" indent="-342900">
+              <a:spcAft>
+                <a:spcPts val="500"/>
+              </a:spcAft>
+              <a:buSzPct val="100000"/>
+              <a:buChar char="•"/>
+            </a:pPr>
+            <a:r>
+              <a:rPr lang="en-US" sz="1000" dirty="0">
+                <a:solidFill>
+                  <a:srgbClr val="331313"/>
+                </a:solidFill>
+                <a:latin typeface="Calibri" pitchFamily="34" charset="0"/>
+                <a:ea typeface="Calibri" pitchFamily="34" charset="-122"/>
+                <a:cs typeface="Calibri" pitchFamily="34" charset="-120"/>
+              </a:rPr>
+              <a:t>Sin disponibilidad en tiempo real, sin descubrimiento fácil</a:t>
+            </a:r>
+            <a:endParaRPr lang="en-US" sz="1000" dirty="0"/>
+          </a:p>
+        </p:txBody>
+      </p:sp>
+      <p:sp>
+        <p:nvSpPr>
+          <p:cNvPr id="14" name="Shape 12"/>
+          <p:cNvSpPr/>
+          <p:nvPr/>
+        </p:nvSpPr>
+        <p:spPr>
+          <a:xfrm>
+            <a:off x="3200400" y="2212848"/>
+            <a:ext cx="2331720" cy="2359152"/>
+          </a:xfrm>
+          <a:prstGeom prst="rect">
+            <a:avLst/>
+          </a:prstGeom>
+          <a:solidFill>
+            <a:srgbClr val="FCFAF7"/>
+          </a:solidFill>
+          <a:ln/>
+        </p:spPr>
+      </p:sp>
+      <p:sp>
+        <p:nvSpPr>
+          <p:cNvPr id="15" name="Shape 13"/>
+          <p:cNvSpPr/>
+          <p:nvPr/>
+        </p:nvSpPr>
+        <p:spPr>
+          <a:xfrm>
+            <a:off x="3200400" y="2212848"/>
+            <a:ext cx="2331720" cy="50292"/>
+          </a:xfrm>
+          <a:prstGeom prst="rect">
+            <a:avLst/>
+          </a:prstGeom>
+          <a:solidFill>
+            <a:srgbClr val="E4AA25"/>
+          </a:solidFill>
+          <a:ln/>
+        </p:spPr>
+      </p:sp>
+      <p:sp>
+        <p:nvSpPr>
+          <p:cNvPr id="16" name="Text 14"/>
+          <p:cNvSpPr/>
+          <p:nvPr/>
+        </p:nvSpPr>
+        <p:spPr>
+          <a:xfrm>
+            <a:off x="3383280" y="2377440"/>
+            <a:ext cx="2286000" cy="201168"/>
           </a:xfrm>
           <a:prstGeom prst="rect">
             <a:avLst/>
@@ -1226,27 +1537,155 @@
               <a:buNone/>
             </a:pPr>
             <a:r>
-              <a:rPr lang="en-US" sz="4200" b="1" dirty="0">
-                <a:solidFill>
-                  <a:srgbClr val="3D0A10"/>
-                </a:solidFill>
-              </a:rPr>
-              <a:t>Massage Club</a:t>
-            </a:r>
-            <a:endParaRPr lang="en-US" sz="4200" dirty="0"/>
-          </a:p>
-        </p:txBody>
-      </p:sp>
-      <p:sp>
-        <p:nvSpPr>
-          <p:cNvPr id="8" name="Text 6"/>
-          <p:cNvSpPr/>
-          <p:nvPr/>
-        </p:nvSpPr>
-        <p:spPr>
-          <a:xfrm>
-            <a:off x="640080" y="1600200"/>
-            <a:ext cx="3657600" cy="320040"/>
+              <a:rPr lang="en-US" sz="750" b="1" spc="300" kern="0" dirty="0">
+                <a:solidFill>
+                  <a:srgbClr val="E4AA25"/>
+                </a:solidFill>
+                <a:latin typeface="Calibri" pitchFamily="34" charset="0"/>
+                <a:ea typeface="Calibri" pitchFamily="34" charset="-122"/>
+                <a:cs typeface="Calibri" pitchFamily="34" charset="-120"/>
+              </a:rPr>
+              <a:t>THE SOLUTION</a:t>
+            </a:r>
+            <a:endParaRPr lang="en-US" sz="750" dirty="0"/>
+          </a:p>
+        </p:txBody>
+      </p:sp>
+      <p:sp>
+        <p:nvSpPr>
+          <p:cNvPr id="17" name="Text 15"/>
+          <p:cNvSpPr/>
+          <p:nvPr/>
+        </p:nvSpPr>
+        <p:spPr>
+          <a:xfrm>
+            <a:off x="3383280" y="2670048"/>
+            <a:ext cx="1965960" cy="1737360"/>
+          </a:xfrm>
+          <a:prstGeom prst="rect">
+            <a:avLst/>
+          </a:prstGeom>
+          <a:noFill/>
+          <a:ln/>
+        </p:spPr>
+        <p:txBody>
+          <a:bodyPr wrap="square" lIns="0" tIns="0" rIns="0" bIns="0" rtlCol="0" anchor="ctr"/>
+          <a:lstStyle/>
+          <a:p>
+            <a:pPr marL="342900" indent="-342900">
+              <a:spcAft>
+                <a:spcPts val="500"/>
+              </a:spcAft>
+              <a:buSzPct val="100000"/>
+              <a:buChar char="•"/>
+            </a:pPr>
+            <a:r>
+              <a:rPr lang="en-US" sz="1000" dirty="0">
+                <a:solidFill>
+                  <a:srgbClr val="331313"/>
+                </a:solidFill>
+                <a:latin typeface="Calibri" pitchFamily="34" charset="0"/>
+                <a:ea typeface="Calibri" pitchFamily="34" charset="-122"/>
+                <a:cs typeface="Calibri" pitchFamily="34" charset="-120"/>
+              </a:rPr>
+              <a:t>Suscripción €79/mes — masajes ilimitados</a:t>
+            </a:r>
+            <a:endParaRPr lang="en-US" sz="1000" dirty="0"/>
+          </a:p>
+          <a:p>
+            <a:pPr marL="342900" indent="-342900">
+              <a:spcAft>
+                <a:spcPts val="500"/>
+              </a:spcAft>
+              <a:buSzPct val="100000"/>
+              <a:buChar char="•"/>
+            </a:pPr>
+            <a:r>
+              <a:rPr lang="en-US" sz="1000" dirty="0">
+                <a:solidFill>
+                  <a:srgbClr val="331313"/>
+                </a:solidFill>
+                <a:latin typeface="Calibri" pitchFamily="34" charset="0"/>
+                <a:ea typeface="Calibri" pitchFamily="34" charset="-122"/>
+                <a:cs typeface="Calibri" pitchFamily="34" charset="-120"/>
+              </a:rPr>
+              <a:t>Reserva directa — terapeuta cobra 100%</a:t>
+            </a:r>
+            <a:endParaRPr lang="en-US" sz="1000" dirty="0"/>
+          </a:p>
+          <a:p>
+            <a:pPr marL="342900" indent="-342900">
+              <a:spcAft>
+                <a:spcPts val="500"/>
+              </a:spcAft>
+              <a:buSzPct val="100000"/>
+              <a:buChar char="•"/>
+            </a:pPr>
+            <a:r>
+              <a:rPr lang="en-US" sz="1000" dirty="0">
+                <a:solidFill>
+                  <a:srgbClr val="331313"/>
+                </a:solidFill>
+                <a:latin typeface="Calibri" pitchFamily="34" charset="0"/>
+                <a:ea typeface="Calibri" pitchFamily="34" charset="-122"/>
+                <a:cs typeface="Calibri" pitchFamily="34" charset="-120"/>
+              </a:rPr>
+              <a:t>Disponibilidad en tiempo real, reserva instantánea</a:t>
+            </a:r>
+            <a:endParaRPr lang="en-US" sz="1000" dirty="0"/>
+          </a:p>
+        </p:txBody>
+      </p:sp>
+      <p:sp>
+        <p:nvSpPr>
+          <p:cNvPr id="18" name="Shape 16"/>
+          <p:cNvSpPr/>
+          <p:nvPr/>
+        </p:nvSpPr>
+        <p:spPr>
+          <a:xfrm>
+            <a:off x="5806440" y="2212848"/>
+            <a:ext cx="2331720" cy="2359152"/>
+          </a:xfrm>
+          <a:prstGeom prst="rect">
+            <a:avLst/>
+          </a:prstGeom>
+          <a:solidFill>
+            <a:srgbClr val="FCFAF7"/>
+          </a:solidFill>
+          <a:ln/>
+        </p:spPr>
+      </p:sp>
+      <p:sp>
+        <p:nvSpPr>
+          <p:cNvPr id="19" name="Shape 17"/>
+          <p:cNvSpPr/>
+          <p:nvPr/>
+        </p:nvSpPr>
+        <p:spPr>
+          <a:xfrm>
+            <a:off x="5806440" y="2212848"/>
+            <a:ext cx="2331720" cy="50292"/>
+          </a:xfrm>
+          <a:prstGeom prst="rect">
+            <a:avLst/>
+          </a:prstGeom>
+          <a:solidFill>
+            <a:srgbClr val="A31422"/>
+          </a:solidFill>
+          <a:ln/>
+        </p:spPr>
+      </p:sp>
+      <p:sp>
+        <p:nvSpPr>
+          <p:cNvPr id="20" name="Text 18"/>
+          <p:cNvSpPr/>
+          <p:nvPr/>
+        </p:nvSpPr>
+        <p:spPr>
+          <a:xfrm>
+            <a:off x="5989320" y="2377440"/>
+            <a:ext cx="2286000" cy="201168"/>
           </a:xfrm>
           <a:prstGeom prst="rect">
             <a:avLst/>
@@ -1262,404 +1701,100 @@
               <a:buNone/>
             </a:pPr>
             <a:r>
-              <a:rPr lang="en-US" sz="1600" dirty="0">
-                <a:solidFill>
-                  <a:srgbClr val="6B5E4A"/>
-                </a:solidFill>
-              </a:rPr>
-              <a:t>The idea.</a:t>
-            </a:r>
-            <a:endParaRPr lang="en-US" sz="1600" dirty="0"/>
-          </a:p>
-        </p:txBody>
-      </p:sp>
-      <p:sp>
-        <p:nvSpPr>
-          <p:cNvPr id="9" name="Text 7"/>
-          <p:cNvSpPr/>
-          <p:nvPr/>
-        </p:nvSpPr>
-        <p:spPr>
-          <a:xfrm>
-            <a:off x="6858000" y="1600200"/>
-            <a:ext cx="1828800" cy="228600"/>
-          </a:xfrm>
-          <a:prstGeom prst="rect">
-            <a:avLst/>
-          </a:prstGeom>
-          <a:noFill/>
-          <a:ln/>
-        </p:spPr>
-        <p:txBody>
-          <a:bodyPr wrap="square" lIns="0" tIns="0" rIns="0" bIns="0" rtlCol="0" anchor="ctr"/>
-          <a:lstStyle/>
-          <a:p>
-            <a:pPr algn="r" indent="0" marL="0">
-              <a:buNone/>
-            </a:pPr>
-            <a:r>
-              <a:rPr lang="en-US" sz="800" dirty="0">
-                <a:solidFill>
-                  <a:srgbClr val="B8A98A"/>
-                </a:solidFill>
-              </a:rPr>
-              <a:t>Slide 1 of 3</a:t>
-            </a:r>
-            <a:endParaRPr lang="en-US" sz="800" dirty="0"/>
-          </a:p>
-        </p:txBody>
-      </p:sp>
-      <p:sp>
-        <p:nvSpPr>
-          <p:cNvPr id="10" name="Shape 8"/>
-          <p:cNvSpPr/>
-          <p:nvPr/>
-        </p:nvSpPr>
-        <p:spPr>
-          <a:xfrm>
-            <a:off x="640080" y="2057400"/>
-            <a:ext cx="7863840" cy="22860"/>
-          </a:xfrm>
-          <a:prstGeom prst="rect">
-            <a:avLst/>
-          </a:prstGeom>
-          <a:solidFill>
-            <a:srgbClr val="D4A532"/>
-          </a:solidFill>
-          <a:ln/>
-        </p:spPr>
-      </p:sp>
-      <p:sp>
-        <p:nvSpPr>
-          <p:cNvPr id="11" name="Shape 9"/>
-          <p:cNvSpPr/>
-          <p:nvPr/>
-        </p:nvSpPr>
-        <p:spPr>
-          <a:xfrm>
-            <a:off x="640080" y="2240280"/>
-            <a:ext cx="2331720" cy="2423160"/>
-          </a:xfrm>
-          <a:prstGeom prst="rect">
-            <a:avLst/>
-          </a:prstGeom>
-          <a:solidFill>
-            <a:srgbClr val="EDE5D8"/>
-          </a:solidFill>
-          <a:ln/>
-        </p:spPr>
-      </p:sp>
-      <p:sp>
-        <p:nvSpPr>
-          <p:cNvPr id="12" name="Shape 10"/>
-          <p:cNvSpPr/>
-          <p:nvPr/>
-        </p:nvSpPr>
-        <p:spPr>
-          <a:xfrm>
-            <a:off x="640080" y="2240280"/>
-            <a:ext cx="2331720" cy="54864"/>
-          </a:xfrm>
-          <a:prstGeom prst="rect">
-            <a:avLst/>
-          </a:prstGeom>
-          <a:solidFill>
-            <a:srgbClr val="8B1A2B"/>
-          </a:solidFill>
-          <a:ln/>
-        </p:spPr>
-      </p:sp>
-      <p:sp>
-        <p:nvSpPr>
-          <p:cNvPr id="13" name="Text 11"/>
-          <p:cNvSpPr/>
-          <p:nvPr/>
-        </p:nvSpPr>
-        <p:spPr>
-          <a:xfrm>
-            <a:off x="822960" y="2404872"/>
-            <a:ext cx="1965960" cy="228600"/>
-          </a:xfrm>
-          <a:prstGeom prst="rect">
-            <a:avLst/>
-          </a:prstGeom>
-          <a:noFill/>
-          <a:ln/>
-        </p:spPr>
-        <p:txBody>
-          <a:bodyPr wrap="square" lIns="0" tIns="0" rIns="0" bIns="0" rtlCol="0" anchor="ctr"/>
-          <a:lstStyle/>
-          <a:p>
-            <a:pPr indent="0" marL="0">
-              <a:buNone/>
-            </a:pPr>
-            <a:r>
-              <a:rPr lang="en-US" sz="800" b="1" spc="300" kern="0" dirty="0">
-                <a:solidFill>
-                  <a:srgbClr val="8B1A2B"/>
-                </a:solidFill>
-              </a:rPr>
-              <a:t>THE PROBLEM</a:t>
-            </a:r>
-            <a:endParaRPr lang="en-US" sz="800" dirty="0"/>
-          </a:p>
-        </p:txBody>
-      </p:sp>
-      <p:sp>
-        <p:nvSpPr>
-          <p:cNvPr id="14" name="Text 12"/>
-          <p:cNvSpPr/>
-          <p:nvPr/>
-        </p:nvSpPr>
-        <p:spPr>
-          <a:xfrm>
-            <a:off x="822960" y="2715768"/>
-            <a:ext cx="1965960" cy="1645920"/>
-          </a:xfrm>
-          <a:prstGeom prst="rect">
-            <a:avLst/>
-          </a:prstGeom>
-          <a:noFill/>
-          <a:ln/>
-        </p:spPr>
-        <p:txBody>
-          <a:bodyPr wrap="square" lIns="0" tIns="0" rIns="0" bIns="0" rtlCol="0" anchor="ctr"/>
-          <a:lstStyle/>
-          <a:p>
-            <a:pPr indent="0" marL="0">
-              <a:buNone/>
+              <a:rPr lang="en-US" sz="750" b="1" spc="300" kern="0" dirty="0">
+                <a:solidFill>
+                  <a:srgbClr val="A31422"/>
+                </a:solidFill>
+                <a:latin typeface="Calibri" pitchFamily="34" charset="0"/>
+                <a:ea typeface="Calibri" pitchFamily="34" charset="-122"/>
+                <a:cs typeface="Calibri" pitchFamily="34" charset="-120"/>
+              </a:rPr>
+              <a:t>TARGET AUDIENCE</a:t>
+            </a:r>
+            <a:endParaRPr lang="en-US" sz="750" dirty="0"/>
+          </a:p>
+        </p:txBody>
+      </p:sp>
+      <p:sp>
+        <p:nvSpPr>
+          <p:cNvPr id="21" name="Text 19"/>
+          <p:cNvSpPr/>
+          <p:nvPr/>
+        </p:nvSpPr>
+        <p:spPr>
+          <a:xfrm>
+            <a:off x="5989320" y="2670048"/>
+            <a:ext cx="1965960" cy="1737360"/>
+          </a:xfrm>
+          <a:prstGeom prst="rect">
+            <a:avLst/>
+          </a:prstGeom>
+          <a:noFill/>
+          <a:ln/>
+        </p:spPr>
+        <p:txBody>
+          <a:bodyPr wrap="square" lIns="0" tIns="0" rIns="0" bIns="0" rtlCol="0" anchor="ctr"/>
+          <a:lstStyle/>
+          <a:p>
+            <a:pPr marL="342900" indent="-342900">
+              <a:spcAft>
+                <a:spcPts val="500"/>
+              </a:spcAft>
+              <a:buSzPct val="100000"/>
+              <a:buChar char="•"/>
             </a:pPr>
             <a:r>
               <a:rPr lang="en-US" sz="1000" dirty="0">
                 <a:solidFill>
-                  <a:srgbClr val="6B5E4A"/>
-                </a:solidFill>
-              </a:rPr>
-              <a:t>Booking a massage in Madrid is harder than it should be. No central platform, no live availability, no easy discovery. People give up before they start.</a:t>
+                  <a:srgbClr val="331313"/>
+                </a:solidFill>
+                <a:latin typeface="Calibri" pitchFamily="34" charset="0"/>
+                <a:ea typeface="Calibri" pitchFamily="34" charset="-122"/>
+                <a:cs typeface="Calibri" pitchFamily="34" charset="-120"/>
+              </a:rPr>
+              <a:t>Profesionales urbanos en Madrid, 25–45 años</a:t>
             </a:r>
             <a:endParaRPr lang="en-US" sz="1000" dirty="0"/>
           </a:p>
-        </p:txBody>
-      </p:sp>
-      <p:sp>
-        <p:nvSpPr>
-          <p:cNvPr id="15" name="Shape 13"/>
-          <p:cNvSpPr/>
-          <p:nvPr/>
-        </p:nvSpPr>
-        <p:spPr>
-          <a:xfrm>
-            <a:off x="3246120" y="2240280"/>
-            <a:ext cx="2331720" cy="2423160"/>
-          </a:xfrm>
-          <a:prstGeom prst="rect">
-            <a:avLst/>
-          </a:prstGeom>
-          <a:solidFill>
-            <a:srgbClr val="EDE5D8"/>
-          </a:solidFill>
-          <a:ln/>
-        </p:spPr>
-      </p:sp>
-      <p:sp>
-        <p:nvSpPr>
-          <p:cNvPr id="16" name="Shape 14"/>
-          <p:cNvSpPr/>
-          <p:nvPr/>
-        </p:nvSpPr>
-        <p:spPr>
-          <a:xfrm>
-            <a:off x="3246120" y="2240280"/>
-            <a:ext cx="2331720" cy="54864"/>
-          </a:xfrm>
-          <a:prstGeom prst="rect">
-            <a:avLst/>
-          </a:prstGeom>
-          <a:solidFill>
-            <a:srgbClr val="D4A532"/>
-          </a:solidFill>
-          <a:ln/>
-        </p:spPr>
-      </p:sp>
-      <p:sp>
-        <p:nvSpPr>
-          <p:cNvPr id="17" name="Text 15"/>
-          <p:cNvSpPr/>
-          <p:nvPr/>
-        </p:nvSpPr>
-        <p:spPr>
-          <a:xfrm>
-            <a:off x="3429000" y="2404872"/>
-            <a:ext cx="1965960" cy="228600"/>
-          </a:xfrm>
-          <a:prstGeom prst="rect">
-            <a:avLst/>
-          </a:prstGeom>
-          <a:noFill/>
-          <a:ln/>
-        </p:spPr>
-        <p:txBody>
-          <a:bodyPr wrap="square" lIns="0" tIns="0" rIns="0" bIns="0" rtlCol="0" anchor="ctr"/>
-          <a:lstStyle/>
-          <a:p>
-            <a:pPr indent="0" marL="0">
-              <a:buNone/>
-            </a:pPr>
-            <a:r>
-              <a:rPr lang="en-US" sz="800" b="1" spc="300" kern="0" dirty="0">
-                <a:solidFill>
-                  <a:srgbClr val="D4A532"/>
-                </a:solidFill>
-              </a:rPr>
-              <a:t>THE SOLUTION</a:t>
-            </a:r>
-            <a:endParaRPr lang="en-US" sz="800" dirty="0"/>
-          </a:p>
-        </p:txBody>
-      </p:sp>
-      <p:sp>
-        <p:nvSpPr>
-          <p:cNvPr id="18" name="Text 16"/>
-          <p:cNvSpPr/>
-          <p:nvPr/>
-        </p:nvSpPr>
-        <p:spPr>
-          <a:xfrm>
-            <a:off x="3429000" y="2715768"/>
-            <a:ext cx="1965960" cy="1645920"/>
-          </a:xfrm>
-          <a:prstGeom prst="rect">
-            <a:avLst/>
-          </a:prstGeom>
-          <a:noFill/>
-          <a:ln/>
-        </p:spPr>
-        <p:txBody>
-          <a:bodyPr wrap="square" lIns="0" tIns="0" rIns="0" bIns="0" rtlCol="0" anchor="ctr"/>
-          <a:lstStyle/>
-          <a:p>
-            <a:pPr indent="0" marL="0">
-              <a:buNone/>
+          <a:p>
+            <a:pPr marL="342900" indent="-342900">
+              <a:spcAft>
+                <a:spcPts val="500"/>
+              </a:spcAft>
+              <a:buSzPct val="100000"/>
+              <a:buChar char="•"/>
             </a:pPr>
             <a:r>
               <a:rPr lang="en-US" sz="1000" dirty="0">
                 <a:solidFill>
-                  <a:srgbClr val="6B5E4A"/>
-                </a:solidFill>
-              </a:rPr>
-              <a:t>One app. Every top massage studio in the city. Real availability, instant booking, no friction.</a:t>
+                  <a:srgbClr val="331313"/>
+                </a:solidFill>
+                <a:latin typeface="Calibri" pitchFamily="34" charset="0"/>
+                <a:ea typeface="Calibri" pitchFamily="34" charset="-122"/>
+                <a:cs typeface="Calibri" pitchFamily="34" charset="-120"/>
+              </a:rPr>
+              <a:t>Valoran el bienestar y su tiempo por igual</a:t>
             </a:r>
             <a:endParaRPr lang="en-US" sz="1000" dirty="0"/>
           </a:p>
-        </p:txBody>
-      </p:sp>
-      <p:sp>
-        <p:nvSpPr>
-          <p:cNvPr id="19" name="Shape 17"/>
-          <p:cNvSpPr/>
-          <p:nvPr/>
-        </p:nvSpPr>
-        <p:spPr>
-          <a:xfrm>
-            <a:off x="5852160" y="2240280"/>
-            <a:ext cx="2331720" cy="2423160"/>
-          </a:xfrm>
-          <a:prstGeom prst="rect">
-            <a:avLst/>
-          </a:prstGeom>
-          <a:solidFill>
-            <a:srgbClr val="EDE5D8"/>
-          </a:solidFill>
-          <a:ln/>
-        </p:spPr>
-      </p:sp>
-      <p:sp>
-        <p:nvSpPr>
-          <p:cNvPr id="20" name="Shape 18"/>
-          <p:cNvSpPr/>
-          <p:nvPr/>
-        </p:nvSpPr>
-        <p:spPr>
-          <a:xfrm>
-            <a:off x="5852160" y="2240280"/>
-            <a:ext cx="2331720" cy="54864"/>
-          </a:xfrm>
-          <a:prstGeom prst="rect">
-            <a:avLst/>
-          </a:prstGeom>
-          <a:solidFill>
-            <a:srgbClr val="3D0A10"/>
-          </a:solidFill>
-          <a:ln/>
-        </p:spPr>
-      </p:sp>
-      <p:sp>
-        <p:nvSpPr>
-          <p:cNvPr id="21" name="Text 19"/>
-          <p:cNvSpPr/>
-          <p:nvPr/>
-        </p:nvSpPr>
-        <p:spPr>
-          <a:xfrm>
-            <a:off x="6035040" y="2404872"/>
-            <a:ext cx="1965960" cy="228600"/>
-          </a:xfrm>
-          <a:prstGeom prst="rect">
-            <a:avLst/>
-          </a:prstGeom>
-          <a:noFill/>
-          <a:ln/>
-        </p:spPr>
-        <p:txBody>
-          <a:bodyPr wrap="square" lIns="0" tIns="0" rIns="0" bIns="0" rtlCol="0" anchor="ctr"/>
-          <a:lstStyle/>
-          <a:p>
-            <a:pPr indent="0" marL="0">
-              <a:buNone/>
-            </a:pPr>
-            <a:r>
-              <a:rPr lang="en-US" sz="800" b="1" spc="300" kern="0" dirty="0">
-                <a:solidFill>
-                  <a:srgbClr val="3D0A10"/>
-                </a:solidFill>
-              </a:rPr>
-              <a:t>TARGET AUDIENCE</a:t>
-            </a:r>
-            <a:endParaRPr lang="en-US" sz="800" dirty="0"/>
-          </a:p>
-        </p:txBody>
-      </p:sp>
-      <p:sp>
-        <p:nvSpPr>
-          <p:cNvPr id="22" name="Text 20"/>
-          <p:cNvSpPr/>
-          <p:nvPr/>
-        </p:nvSpPr>
-        <p:spPr>
-          <a:xfrm>
-            <a:off x="6035040" y="2715768"/>
-            <a:ext cx="1965960" cy="1645920"/>
-          </a:xfrm>
-          <a:prstGeom prst="rect">
-            <a:avLst/>
-          </a:prstGeom>
-          <a:noFill/>
-          <a:ln/>
-        </p:spPr>
-        <p:txBody>
-          <a:bodyPr wrap="square" lIns="0" tIns="0" rIns="0" bIns="0" rtlCol="0" anchor="ctr"/>
-          <a:lstStyle/>
-          <a:p>
-            <a:pPr indent="0" marL="0">
-              <a:buNone/>
+          <a:p>
+            <a:pPr marL="342900" indent="-342900">
+              <a:spcAft>
+                <a:spcPts val="500"/>
+              </a:spcAft>
+              <a:buSzPct val="100000"/>
+              <a:buChar char="•"/>
             </a:pPr>
             <a:r>
               <a:rPr lang="en-US" sz="1000" dirty="0">
                 <a:solidFill>
-                  <a:srgbClr val="6B5E4A"/>
-                </a:solidFill>
-              </a:rPr>
-              <a:t>Urban professionals in Madrid, 25–45, who value wellbeing and their time equally.</a:t>
+                  <a:srgbClr val="331313"/>
+                </a:solidFill>
+                <a:latin typeface="Calibri" pitchFamily="34" charset="0"/>
+                <a:ea typeface="Calibri" pitchFamily="34" charset="-122"/>
+                <a:cs typeface="Calibri" pitchFamily="34" charset="-120"/>
+              </a:rPr>
+              <a:t>Visitantes frecuentes de estudios de masaje</a:t>
             </a:r>
             <a:endParaRPr lang="en-US" sz="1000" dirty="0"/>
           </a:p>
@@ -1667,7 +1802,7 @@
       </p:sp>
       <p:sp>
         <p:nvSpPr>
-          <p:cNvPr id="23" name="Shape 21"/>
+          <p:cNvPr id="22" name="Shape 20"/>
           <p:cNvSpPr/>
           <p:nvPr/>
         </p:nvSpPr>
@@ -1680,10 +1815,49 @@
             <a:avLst/>
           </a:prstGeom>
           <a:solidFill>
-            <a:srgbClr val="3D0A10"/>
-          </a:solidFill>
-          <a:ln/>
-        </p:spPr>
+            <a:srgbClr val="A31422"/>
+          </a:solidFill>
+          <a:ln/>
+        </p:spPr>
+      </p:sp>
+      <p:sp>
+        <p:nvSpPr>
+          <p:cNvPr id="23" name="Text 21"/>
+          <p:cNvSpPr/>
+          <p:nvPr/>
+        </p:nvSpPr>
+        <p:spPr>
+          <a:xfrm>
+            <a:off x="594360" y="4754880"/>
+            <a:ext cx="4572000" cy="256032"/>
+          </a:xfrm>
+          <a:prstGeom prst="rect">
+            <a:avLst/>
+          </a:prstGeom>
+          <a:noFill/>
+          <a:ln/>
+        </p:spPr>
+        <p:txBody>
+          <a:bodyPr wrap="square" lIns="0" tIns="0" rIns="0" bIns="0" rtlCol="0" anchor="ctr"/>
+          <a:lstStyle/>
+          <a:p>
+            <a:pPr indent="0" marL="0">
+              <a:buNone/>
+            </a:pPr>
+            <a:r>
+              <a:rPr lang="en-US" sz="900" dirty="0">
+                <a:solidFill>
+                  <a:srgbClr val="E8B4B4"/>
+                </a:solidFill>
+                <a:latin typeface="Calibri" pitchFamily="34" charset="0"/>
+                <a:ea typeface="Calibri" pitchFamily="34" charset="-122"/>
+                <a:cs typeface="Calibri" pitchFamily="34" charset="-120"/>
+              </a:rPr>
+              <a:t>massageclub.io</a:t>
+            </a:r>
+            <a:endParaRPr lang="en-US" sz="900" dirty="0"/>
+          </a:p>
+        </p:txBody>
       </p:sp>
       <p:sp>
         <p:nvSpPr>
@@ -1693,63 +1867,30 @@
         </p:nvSpPr>
         <p:spPr>
           <a:xfrm>
-            <a:off x="640080" y="4736592"/>
-            <a:ext cx="7315200" cy="274320"/>
-          </a:xfrm>
-          <a:prstGeom prst="rect">
-            <a:avLst/>
-          </a:prstGeom>
-          <a:noFill/>
-          <a:ln/>
-        </p:spPr>
-        <p:txBody>
-          <a:bodyPr wrap="square" lIns="0" tIns="0" rIns="0" bIns="0" rtlCol="0" anchor="ctr"/>
-          <a:lstStyle/>
-          <a:p>
-            <a:pPr indent="0" marL="0">
+            <a:off x="8321040" y="4754880"/>
+            <a:ext cx="457200" cy="256032"/>
+          </a:xfrm>
+          <a:prstGeom prst="rect">
+            <a:avLst/>
+          </a:prstGeom>
+          <a:noFill/>
+          <a:ln/>
+        </p:spPr>
+        <p:txBody>
+          <a:bodyPr wrap="square" lIns="0" tIns="0" rIns="0" bIns="0" rtlCol="0" anchor="ctr"/>
+          <a:lstStyle/>
+          <a:p>
+            <a:pPr algn="r" indent="0" marL="0">
               <a:buNone/>
             </a:pPr>
             <a:r>
               <a:rPr lang="en-US" sz="900" dirty="0">
                 <a:solidFill>
-                  <a:srgbClr val="C9B89A"/>
-                </a:solidFill>
-              </a:rPr>
-              <a:t>Current team: Founder (solo)  ·  massageclub.io</a:t>
-            </a:r>
-            <a:endParaRPr lang="en-US" sz="900" dirty="0"/>
-          </a:p>
-        </p:txBody>
-      </p:sp>
-      <p:sp>
-        <p:nvSpPr>
-          <p:cNvPr id="25" name="Text 23"/>
-          <p:cNvSpPr/>
-          <p:nvPr/>
-        </p:nvSpPr>
-        <p:spPr>
-          <a:xfrm>
-            <a:off x="8412480" y="4736592"/>
-            <a:ext cx="548640" cy="256032"/>
-          </a:xfrm>
-          <a:prstGeom prst="rect">
-            <a:avLst/>
-          </a:prstGeom>
-          <a:noFill/>
-          <a:ln/>
-        </p:spPr>
-        <p:txBody>
-          <a:bodyPr wrap="square" lIns="0" tIns="0" rIns="0" bIns="0" rtlCol="0" anchor="ctr"/>
-          <a:lstStyle/>
-          <a:p>
-            <a:pPr algn="r" indent="0" marL="0">
-              <a:buNone/>
-            </a:pPr>
-            <a:r>
-              <a:rPr lang="en-US" sz="900" dirty="0">
-                <a:solidFill>
-                  <a:srgbClr val="8B7355"/>
-                </a:solidFill>
+                  <a:srgbClr val="A07070"/>
+                </a:solidFill>
+                <a:latin typeface="Calibri" pitchFamily="34" charset="0"/>
+                <a:ea typeface="Calibri" pitchFamily="34" charset="-122"/>
+                <a:cs typeface="Calibri" pitchFamily="34" charset="-120"/>
               </a:rPr>
               <a:t>01</a:t>
             </a:r>
@@ -1771,7 +1912,7 @@
     <p:bg>
       <p:bgPr>
         <a:solidFill>
-          <a:srgbClr val="F5F0E8"/>
+          <a:srgbClr val="F8F6F0"/>
         </a:solidFill>
       </p:bgPr>
     </p:bg>
@@ -1798,13 +1939,13 @@
         <p:spPr>
           <a:xfrm>
             <a:off x="0" y="0"/>
-            <a:ext cx="9144000" cy="777240"/>
-          </a:xfrm>
-          <a:prstGeom prst="rect">
-            <a:avLst/>
-          </a:prstGeom>
-          <a:solidFill>
-            <a:srgbClr val="3D0A10"/>
+            <a:ext cx="9144000" cy="804672"/>
+          </a:xfrm>
+          <a:prstGeom prst="rect">
+            <a:avLst/>
+          </a:prstGeom>
+          <a:solidFill>
+            <a:srgbClr val="A31422"/>
           </a:solidFill>
           <a:ln/>
         </p:spPr>
@@ -1817,14 +1958,14 @@
         </p:nvSpPr>
         <p:spPr>
           <a:xfrm>
-            <a:off x="0" y="777240"/>
-            <a:ext cx="9144000" cy="54864"/>
-          </a:xfrm>
-          <a:prstGeom prst="rect">
-            <a:avLst/>
-          </a:prstGeom>
-          <a:solidFill>
-            <a:srgbClr val="D4A532"/>
+            <a:off x="0" y="804672"/>
+            <a:ext cx="9144000" cy="50292"/>
+          </a:xfrm>
+          <a:prstGeom prst="rect">
+            <a:avLst/>
+          </a:prstGeom>
+          <a:solidFill>
+            <a:srgbClr val="E4AA25"/>
           </a:solidFill>
           <a:ln/>
         </p:spPr>
@@ -1837,8 +1978,8 @@
         </p:nvSpPr>
         <p:spPr>
           <a:xfrm>
-            <a:off x="640080" y="164592"/>
-            <a:ext cx="2743200" cy="274320"/>
+            <a:off x="594360" y="146304"/>
+            <a:ext cx="3200400" cy="292608"/>
           </a:xfrm>
           <a:prstGeom prst="rect">
             <a:avLst/>
@@ -1856,8 +1997,11 @@
             <a:r>
               <a:rPr lang="en-US" sz="1100" b="1" spc="500" kern="0" dirty="0">
                 <a:solidFill>
-                  <a:srgbClr val="D4A532"/>
-                </a:solidFill>
+                  <a:srgbClr val="E4AA25"/>
+                </a:solidFill>
+                <a:latin typeface="Calibri" pitchFamily="34" charset="0"/>
+                <a:ea typeface="Calibri" pitchFamily="34" charset="-122"/>
+                <a:cs typeface="Calibri" pitchFamily="34" charset="-120"/>
               </a:rPr>
               <a:t>MASSAGE CLUB</a:t>
             </a:r>
@@ -1873,8 +2017,145 @@
         </p:nvSpPr>
         <p:spPr>
           <a:xfrm>
-            <a:off x="4572000" y="164592"/>
-            <a:ext cx="3931920" cy="274320"/>
+            <a:off x="594360" y="475488"/>
+            <a:ext cx="3657600" cy="228600"/>
+          </a:xfrm>
+          <a:prstGeom prst="rect">
+            <a:avLst/>
+          </a:prstGeom>
+          <a:noFill/>
+          <a:ln/>
+        </p:spPr>
+        <p:txBody>
+          <a:bodyPr wrap="square" lIns="0" tIns="0" rIns="0" bIns="0" rtlCol="0" anchor="ctr"/>
+          <a:lstStyle/>
+          <a:p>
+            <a:pPr indent="0" marL="0">
+              <a:buNone/>
+            </a:pPr>
+            <a:r>
+              <a:rPr lang="en-US" sz="800" spc="300" kern="0" dirty="0">
+                <a:solidFill>
+                  <a:srgbClr val="E8B4B4"/>
+                </a:solidFill>
+                <a:latin typeface="Calibri" pitchFamily="34" charset="0"/>
+                <a:ea typeface="Calibri" pitchFamily="34" charset="-122"/>
+                <a:cs typeface="Calibri" pitchFamily="34" charset="-120"/>
+              </a:rPr>
+              <a:t>OPEN POSITION</a:t>
+            </a:r>
+            <a:endParaRPr lang="en-US" sz="800" dirty="0"/>
+          </a:p>
+        </p:txBody>
+      </p:sp>
+      <p:sp>
+        <p:nvSpPr>
+          <p:cNvPr id="6" name="Text 4"/>
+          <p:cNvSpPr/>
+          <p:nvPr/>
+        </p:nvSpPr>
+        <p:spPr>
+          <a:xfrm>
+            <a:off x="594360" y="987552"/>
+            <a:ext cx="6858000" cy="658368"/>
+          </a:xfrm>
+          <a:prstGeom prst="rect">
+            <a:avLst/>
+          </a:prstGeom>
+          <a:noFill/>
+          <a:ln/>
+        </p:spPr>
+        <p:txBody>
+          <a:bodyPr wrap="square" lIns="0" tIns="0" rIns="0" bIns="0" rtlCol="0" anchor="ctr"/>
+          <a:lstStyle/>
+          <a:p>
+            <a:pPr indent="0" marL="0">
+              <a:buNone/>
+            </a:pPr>
+            <a:r>
+              <a:rPr lang="en-US" sz="3600" b="1" dirty="0">
+                <a:solidFill>
+                  <a:srgbClr val="A31422"/>
+                </a:solidFill>
+                <a:latin typeface="Calibri" pitchFamily="34" charset="0"/>
+                <a:ea typeface="Calibri" pitchFamily="34" charset="-122"/>
+                <a:cs typeface="Calibri" pitchFamily="34" charset="-120"/>
+              </a:rPr>
+              <a:t>Who we're looking for.</a:t>
+            </a:r>
+            <a:endParaRPr lang="en-US" sz="3600" dirty="0"/>
+          </a:p>
+        </p:txBody>
+      </p:sp>
+      <p:sp>
+        <p:nvSpPr>
+          <p:cNvPr id="7" name="Shape 5"/>
+          <p:cNvSpPr/>
+          <p:nvPr/>
+        </p:nvSpPr>
+        <p:spPr>
+          <a:xfrm>
+            <a:off x="594360" y="1682496"/>
+            <a:ext cx="2377440" cy="274320"/>
+          </a:xfrm>
+          <a:prstGeom prst="rect">
+            <a:avLst/>
+          </a:prstGeom>
+          <a:solidFill>
+            <a:srgbClr val="E4AA25"/>
+          </a:solidFill>
+          <a:ln/>
+        </p:spPr>
+      </p:sp>
+      <p:sp>
+        <p:nvSpPr>
+          <p:cNvPr id="8" name="Text 6"/>
+          <p:cNvSpPr/>
+          <p:nvPr/>
+        </p:nvSpPr>
+        <p:spPr>
+          <a:xfrm>
+            <a:off x="594360" y="1682496"/>
+            <a:ext cx="2377440" cy="274320"/>
+          </a:xfrm>
+          <a:prstGeom prst="rect">
+            <a:avLst/>
+          </a:prstGeom>
+          <a:noFill/>
+          <a:ln/>
+        </p:spPr>
+        <p:txBody>
+          <a:bodyPr wrap="square" lIns="0" tIns="0" rIns="0" bIns="0" rtlCol="0" anchor="ctr"/>
+          <a:lstStyle/>
+          <a:p>
+            <a:pPr algn="ctr" indent="0" marL="0">
+              <a:buNone/>
+            </a:pPr>
+            <a:r>
+              <a:rPr lang="en-US" sz="800" b="1" dirty="0">
+                <a:solidFill>
+                  <a:srgbClr val="FFFFFF"/>
+                </a:solidFill>
+                <a:latin typeface="Calibri" pitchFamily="34" charset="0"/>
+                <a:ea typeface="Calibri" pitchFamily="34" charset="-122"/>
+                <a:cs typeface="Calibri" pitchFamily="34" charset="-120"/>
+              </a:rPr>
+              <a:t>Equity-based  ·  Madrid (hybrid)</a:t>
+            </a:r>
+            <a:endParaRPr lang="en-US" sz="800" dirty="0"/>
+          </a:p>
+        </p:txBody>
+      </p:sp>
+      <p:sp>
+        <p:nvSpPr>
+          <p:cNvPr id="9" name="Text 7"/>
+          <p:cNvSpPr/>
+          <p:nvPr/>
+        </p:nvSpPr>
+        <p:spPr>
+          <a:xfrm>
+            <a:off x="6858000" y="1682496"/>
+            <a:ext cx="1828800" cy="228600"/>
           </a:xfrm>
           <a:prstGeom prst="rect">
             <a:avLst/>
@@ -1890,27 +2171,90 @@
               <a:buNone/>
             </a:pPr>
             <a:r>
-              <a:rPr lang="en-US" sz="900" dirty="0">
-                <a:solidFill>
-                  <a:srgbClr val="EDE5D8"/>
-                </a:solidFill>
-              </a:rPr>
-              <a:t>Co-founder · CTO</a:t>
-            </a:r>
-            <a:endParaRPr lang="en-US" sz="900" dirty="0"/>
-          </a:p>
-        </p:txBody>
-      </p:sp>
-      <p:sp>
-        <p:nvSpPr>
-          <p:cNvPr id="6" name="Text 4"/>
-          <p:cNvSpPr/>
-          <p:nvPr/>
-        </p:nvSpPr>
-        <p:spPr>
-          <a:xfrm>
-            <a:off x="640080" y="475488"/>
-            <a:ext cx="2743200" cy="201168"/>
+              <a:rPr lang="en-US" sz="800" dirty="0">
+                <a:solidFill>
+                  <a:srgbClr val="B8A98A"/>
+                </a:solidFill>
+                <a:latin typeface="Calibri" pitchFamily="34" charset="0"/>
+                <a:ea typeface="Calibri" pitchFamily="34" charset="-122"/>
+                <a:cs typeface="Calibri" pitchFamily="34" charset="-120"/>
+              </a:rPr>
+              <a:t>Slide 2 of 3</a:t>
+            </a:r>
+            <a:endParaRPr lang="en-US" sz="800" dirty="0"/>
+          </a:p>
+        </p:txBody>
+      </p:sp>
+      <p:sp>
+        <p:nvSpPr>
+          <p:cNvPr id="10" name="Shape 8"/>
+          <p:cNvSpPr/>
+          <p:nvPr/>
+        </p:nvSpPr>
+        <p:spPr>
+          <a:xfrm>
+            <a:off x="594360" y="2121408"/>
+            <a:ext cx="7955280" cy="18288"/>
+          </a:xfrm>
+          <a:prstGeom prst="rect">
+            <a:avLst/>
+          </a:prstGeom>
+          <a:solidFill>
+            <a:srgbClr val="DED5C3"/>
+          </a:solidFill>
+          <a:ln/>
+        </p:spPr>
+      </p:sp>
+      <p:sp>
+        <p:nvSpPr>
+          <p:cNvPr id="11" name="Shape 9"/>
+          <p:cNvSpPr/>
+          <p:nvPr/>
+        </p:nvSpPr>
+        <p:spPr>
+          <a:xfrm>
+            <a:off x="594360" y="2286000"/>
+            <a:ext cx="3794760" cy="2395728"/>
+          </a:xfrm>
+          <a:prstGeom prst="rect">
+            <a:avLst/>
+          </a:prstGeom>
+          <a:solidFill>
+            <a:srgbClr val="FCFAF7"/>
+          </a:solidFill>
+          <a:ln/>
+        </p:spPr>
+      </p:sp>
+      <p:sp>
+        <p:nvSpPr>
+          <p:cNvPr id="12" name="Shape 10"/>
+          <p:cNvSpPr/>
+          <p:nvPr/>
+        </p:nvSpPr>
+        <p:spPr>
+          <a:xfrm>
+            <a:off x="594360" y="2286000"/>
+            <a:ext cx="3794760" cy="50292"/>
+          </a:xfrm>
+          <a:prstGeom prst="rect">
+            <a:avLst/>
+          </a:prstGeom>
+          <a:solidFill>
+            <a:srgbClr val="A31422"/>
+          </a:solidFill>
+          <a:ln/>
+        </p:spPr>
+      </p:sp>
+      <p:sp>
+        <p:nvSpPr>
+          <p:cNvPr id="13" name="Text 11"/>
+          <p:cNvSpPr/>
+          <p:nvPr/>
+        </p:nvSpPr>
+        <p:spPr>
+          <a:xfrm>
+            <a:off x="822960" y="2450592"/>
+            <a:ext cx="2286000" cy="201168"/>
           </a:xfrm>
           <a:prstGeom prst="rect">
             <a:avLst/>
@@ -1926,27 +2270,30 @@
               <a:buNone/>
             </a:pPr>
             <a:r>
-              <a:rPr lang="en-US" sz="800" b="1" spc="300" kern="0" dirty="0">
-                <a:solidFill>
-                  <a:srgbClr val="C9B89A"/>
-                </a:solidFill>
-              </a:rPr>
-              <a:t>OPEN POSITION</a:t>
-            </a:r>
-            <a:endParaRPr lang="en-US" sz="800" dirty="0"/>
-          </a:p>
-        </p:txBody>
-      </p:sp>
-      <p:sp>
-        <p:nvSpPr>
-          <p:cNvPr id="7" name="Text 5"/>
-          <p:cNvSpPr/>
-          <p:nvPr/>
-        </p:nvSpPr>
-        <p:spPr>
-          <a:xfrm>
-            <a:off x="640080" y="1005840"/>
-            <a:ext cx="6400800" cy="594360"/>
+              <a:rPr lang="en-US" sz="750" b="1" spc="300" kern="0" dirty="0">
+                <a:solidFill>
+                  <a:srgbClr val="A31422"/>
+                </a:solidFill>
+                <a:latin typeface="Calibri" pitchFamily="34" charset="0"/>
+                <a:ea typeface="Calibri" pitchFamily="34" charset="-122"/>
+                <a:cs typeface="Calibri" pitchFamily="34" charset="-120"/>
+              </a:rPr>
+              <a:t>WHAT WE NEED</a:t>
+            </a:r>
+            <a:endParaRPr lang="en-US" sz="750" dirty="0"/>
+          </a:p>
+        </p:txBody>
+      </p:sp>
+      <p:sp>
+        <p:nvSpPr>
+          <p:cNvPr id="14" name="Text 12"/>
+          <p:cNvSpPr/>
+          <p:nvPr/>
+        </p:nvSpPr>
+        <p:spPr>
+          <a:xfrm>
+            <a:off x="822960" y="2761488"/>
+            <a:ext cx="3337560" cy="237744"/>
           </a:xfrm>
           <a:prstGeom prst="rect">
             <a:avLst/>
@@ -1962,27 +2309,30 @@
               <a:buNone/>
             </a:pPr>
             <a:r>
-              <a:rPr lang="en-US" sz="3800" b="1" dirty="0">
-                <a:solidFill>
-                  <a:srgbClr val="3D0A10"/>
-                </a:solidFill>
-              </a:rPr>
-              <a:t>Who we're looking for.</a:t>
-            </a:r>
-            <a:endParaRPr lang="en-US" sz="3800" dirty="0"/>
-          </a:p>
-        </p:txBody>
-      </p:sp>
-      <p:sp>
-        <p:nvSpPr>
-          <p:cNvPr id="8" name="Text 6"/>
-          <p:cNvSpPr/>
-          <p:nvPr/>
-        </p:nvSpPr>
-        <p:spPr>
-          <a:xfrm>
-            <a:off x="640080" y="1627632"/>
-            <a:ext cx="3657600" cy="274320"/>
+              <a:rPr lang="en-US" sz="1100" b="1" dirty="0">
+                <a:solidFill>
+                  <a:srgbClr val="A31422"/>
+                </a:solidFill>
+                <a:latin typeface="Calibri" pitchFamily="34" charset="0"/>
+                <a:ea typeface="Calibri" pitchFamily="34" charset="-122"/>
+                <a:cs typeface="Calibri" pitchFamily="34" charset="-120"/>
+              </a:rPr>
+              <a:t>Full-stack development</a:t>
+            </a:r>
+            <a:endParaRPr lang="en-US" sz="1100" dirty="0"/>
+          </a:p>
+        </p:txBody>
+      </p:sp>
+      <p:sp>
+        <p:nvSpPr>
+          <p:cNvPr id="15" name="Text 13"/>
+          <p:cNvSpPr/>
+          <p:nvPr/>
+        </p:nvSpPr>
+        <p:spPr>
+          <a:xfrm>
+            <a:off x="822960" y="3017520"/>
+            <a:ext cx="3337560" cy="347472"/>
           </a:xfrm>
           <a:prstGeom prst="rect">
             <a:avLst/>
@@ -1998,12 +2348,54 @@
               <a:buNone/>
             </a:pPr>
             <a:r>
-              <a:rPr lang="en-US" sz="1100" dirty="0">
-                <a:solidFill>
-                  <a:srgbClr val="6B5E4A"/>
-                </a:solidFill>
-              </a:rPr>
-              <a:t>Equity-based  ·  Madrid (hybrid)</a:t>
+              <a:rPr lang="en-US" sz="950" dirty="0">
+                <a:solidFill>
+                  <a:srgbClr val="331313"/>
+                </a:solidFill>
+                <a:latin typeface="Calibri" pitchFamily="34" charset="0"/>
+                <a:ea typeface="Calibri" pitchFamily="34" charset="-122"/>
+                <a:cs typeface="Calibri" pitchFamily="34" charset="-120"/>
+              </a:rPr>
+              <a:t>React, TypeScript, Supabase — our stack is live and needs a real engineer to own it.</a:t>
+            </a:r>
+            <a:endParaRPr lang="en-US" sz="950" dirty="0"/>
+          </a:p>
+        </p:txBody>
+      </p:sp>
+      <p:sp>
+        <p:nvSpPr>
+          <p:cNvPr id="16" name="Text 14"/>
+          <p:cNvSpPr/>
+          <p:nvPr/>
+        </p:nvSpPr>
+        <p:spPr>
+          <a:xfrm>
+            <a:off x="822960" y="3383280"/>
+            <a:ext cx="3337560" cy="237744"/>
+          </a:xfrm>
+          <a:prstGeom prst="rect">
+            <a:avLst/>
+          </a:prstGeom>
+          <a:noFill/>
+          <a:ln/>
+        </p:spPr>
+        <p:txBody>
+          <a:bodyPr wrap="square" lIns="0" tIns="0" rIns="0" bIns="0" rtlCol="0" anchor="ctr"/>
+          <a:lstStyle/>
+          <a:p>
+            <a:pPr indent="0" marL="0">
+              <a:buNone/>
+            </a:pPr>
+            <a:r>
+              <a:rPr lang="en-US" sz="1100" b="1" dirty="0">
+                <a:solidFill>
+                  <a:srgbClr val="A31422"/>
+                </a:solidFill>
+                <a:latin typeface="Calibri" pitchFamily="34" charset="0"/>
+                <a:ea typeface="Calibri" pitchFamily="34" charset="-122"/>
+                <a:cs typeface="Calibri" pitchFamily="34" charset="-120"/>
+              </a:rPr>
+              <a:t>Product thinking</a:t>
             </a:r>
             <a:endParaRPr lang="en-US" sz="1100" dirty="0"/>
           </a:p>
@@ -2011,110 +2403,14 @@
       </p:sp>
       <p:sp>
         <p:nvSpPr>
-          <p:cNvPr id="9" name="Text 7"/>
-          <p:cNvSpPr/>
-          <p:nvPr/>
-        </p:nvSpPr>
-        <p:spPr>
-          <a:xfrm>
-            <a:off x="6858000" y="1627632"/>
-            <a:ext cx="1828800" cy="228600"/>
-          </a:xfrm>
-          <a:prstGeom prst="rect">
-            <a:avLst/>
-          </a:prstGeom>
-          <a:noFill/>
-          <a:ln/>
-        </p:spPr>
-        <p:txBody>
-          <a:bodyPr wrap="square" lIns="0" tIns="0" rIns="0" bIns="0" rtlCol="0" anchor="ctr"/>
-          <a:lstStyle/>
-          <a:p>
-            <a:pPr algn="r" indent="0" marL="0">
-              <a:buNone/>
-            </a:pPr>
-            <a:r>
-              <a:rPr lang="en-US" sz="800" dirty="0">
-                <a:solidFill>
-                  <a:srgbClr val="B8A98A"/>
-                </a:solidFill>
-              </a:rPr>
-              <a:t>Slide 2 of 3</a:t>
-            </a:r>
-            <a:endParaRPr lang="en-US" sz="800" dirty="0"/>
-          </a:p>
-        </p:txBody>
-      </p:sp>
-      <p:sp>
-        <p:nvSpPr>
-          <p:cNvPr id="10" name="Shape 8"/>
-          <p:cNvSpPr/>
-          <p:nvPr/>
-        </p:nvSpPr>
-        <p:spPr>
-          <a:xfrm>
-            <a:off x="640080" y="2084832"/>
-            <a:ext cx="7863840" cy="22860"/>
-          </a:xfrm>
-          <a:prstGeom prst="rect">
-            <a:avLst/>
-          </a:prstGeom>
-          <a:solidFill>
-            <a:srgbClr val="D4A532"/>
-          </a:solidFill>
-          <a:ln/>
-        </p:spPr>
-      </p:sp>
-      <p:sp>
-        <p:nvSpPr>
-          <p:cNvPr id="11" name="Shape 9"/>
-          <p:cNvSpPr/>
-          <p:nvPr/>
-        </p:nvSpPr>
-        <p:spPr>
-          <a:xfrm>
-            <a:off x="640080" y="2286000"/>
-            <a:ext cx="3794760" cy="2331720"/>
-          </a:xfrm>
-          <a:prstGeom prst="rect">
-            <a:avLst/>
-          </a:prstGeom>
-          <a:solidFill>
-            <a:srgbClr val="EDE5D8"/>
-          </a:solidFill>
-          <a:ln/>
-        </p:spPr>
-      </p:sp>
-      <p:sp>
-        <p:nvSpPr>
-          <p:cNvPr id="12" name="Shape 10"/>
-          <p:cNvSpPr/>
-          <p:nvPr/>
-        </p:nvSpPr>
-        <p:spPr>
-          <a:xfrm>
-            <a:off x="640080" y="2286000"/>
-            <a:ext cx="3794760" cy="54864"/>
-          </a:xfrm>
-          <a:prstGeom prst="rect">
-            <a:avLst/>
-          </a:prstGeom>
-          <a:solidFill>
-            <a:srgbClr val="8B1A2B"/>
-          </a:solidFill>
-          <a:ln/>
-        </p:spPr>
-      </p:sp>
-      <p:sp>
-        <p:nvSpPr>
-          <p:cNvPr id="13" name="Text 11"/>
-          <p:cNvSpPr/>
-          <p:nvPr/>
-        </p:nvSpPr>
-        <p:spPr>
-          <a:xfrm>
-            <a:off x="868680" y="2450592"/>
-            <a:ext cx="3200400" cy="228600"/>
+          <p:cNvPr id="17" name="Text 15"/>
+          <p:cNvSpPr/>
+          <p:nvPr/>
+        </p:nvSpPr>
+        <p:spPr>
+          <a:xfrm>
+            <a:off x="822960" y="3639312"/>
+            <a:ext cx="3337560" cy="347472"/>
           </a:xfrm>
           <a:prstGeom prst="rect">
             <a:avLst/>
@@ -2130,27 +2426,30 @@
               <a:buNone/>
             </a:pPr>
             <a:r>
-              <a:rPr lang="en-US" sz="800" b="1" spc="300" kern="0" dirty="0">
-                <a:solidFill>
-                  <a:srgbClr val="8B1A2B"/>
-                </a:solidFill>
-              </a:rPr>
-              <a:t>WHAT WE NEED</a:t>
-            </a:r>
-            <a:endParaRPr lang="en-US" sz="800" dirty="0"/>
-          </a:p>
-        </p:txBody>
-      </p:sp>
-      <p:sp>
-        <p:nvSpPr>
-          <p:cNvPr id="14" name="Text 12"/>
-          <p:cNvSpPr/>
-          <p:nvPr/>
-        </p:nvSpPr>
-        <p:spPr>
-          <a:xfrm>
-            <a:off x="868680" y="2788920"/>
-            <a:ext cx="3291840" cy="228600"/>
+              <a:rPr lang="en-US" sz="950" dirty="0">
+                <a:solidFill>
+                  <a:srgbClr val="331313"/>
+                </a:solidFill>
+                <a:latin typeface="Calibri" pitchFamily="34" charset="0"/>
+                <a:ea typeface="Calibri" pitchFamily="34" charset="-122"/>
+                <a:cs typeface="Calibri" pitchFamily="34" charset="-120"/>
+              </a:rPr>
+              <a:t>Someone who can build features users actually want, not just what sounds good.</a:t>
+            </a:r>
+            <a:endParaRPr lang="en-US" sz="950" dirty="0"/>
+          </a:p>
+        </p:txBody>
+      </p:sp>
+      <p:sp>
+        <p:nvSpPr>
+          <p:cNvPr id="18" name="Text 16"/>
+          <p:cNvSpPr/>
+          <p:nvPr/>
+        </p:nvSpPr>
+        <p:spPr>
+          <a:xfrm>
+            <a:off x="822960" y="4005072"/>
+            <a:ext cx="3337560" cy="237744"/>
           </a:xfrm>
           <a:prstGeom prst="rect">
             <a:avLst/>
@@ -2168,10 +2467,13 @@
             <a:r>
               <a:rPr lang="en-US" sz="1100" b="1" dirty="0">
                 <a:solidFill>
-                  <a:srgbClr val="3D0A10"/>
-                </a:solidFill>
-              </a:rPr>
-              <a:t>Full-stack development</a:t>
+                  <a:srgbClr val="A31422"/>
+                </a:solidFill>
+                <a:latin typeface="Calibri" pitchFamily="34" charset="0"/>
+                <a:ea typeface="Calibri" pitchFamily="34" charset="-122"/>
+                <a:cs typeface="Calibri" pitchFamily="34" charset="-120"/>
+              </a:rPr>
+              <a:t>Move fast</a:t>
             </a:r>
             <a:endParaRPr lang="en-US" sz="1100" dirty="0"/>
           </a:p>
@@ -2179,14 +2481,14 @@
       </p:sp>
       <p:sp>
         <p:nvSpPr>
-          <p:cNvPr id="15" name="Text 13"/>
-          <p:cNvSpPr/>
-          <p:nvPr/>
-        </p:nvSpPr>
-        <p:spPr>
-          <a:xfrm>
-            <a:off x="868680" y="3035808"/>
-            <a:ext cx="3291840" cy="347472"/>
+          <p:cNvPr id="19" name="Text 17"/>
+          <p:cNvSpPr/>
+          <p:nvPr/>
+        </p:nvSpPr>
+        <p:spPr>
+          <a:xfrm>
+            <a:off x="822960" y="4261104"/>
+            <a:ext cx="3337560" cy="347472"/>
           </a:xfrm>
           <a:prstGeom prst="rect">
             <a:avLst/>
@@ -2204,10 +2506,13 @@
             <a:r>
               <a:rPr lang="en-US" sz="950" dirty="0">
                 <a:solidFill>
-                  <a:srgbClr val="6B5E4A"/>
-                </a:solidFill>
-              </a:rPr>
-              <a:t>React, TypeScript, Supabase — our stack is live and needs a real engineer to own it.</a:t>
+                  <a:srgbClr val="331313"/>
+                </a:solidFill>
+                <a:latin typeface="Calibri" pitchFamily="34" charset="0"/>
+                <a:ea typeface="Calibri" pitchFamily="34" charset="-122"/>
+                <a:cs typeface="Calibri" pitchFamily="34" charset="-120"/>
+              </a:rPr>
+              <a:t>We have a product, a market, and a plan. We need someone who executes.</a:t>
             </a:r>
             <a:endParaRPr lang="en-US" sz="950" dirty="0"/>
           </a:p>
@@ -2215,14 +2520,54 @@
       </p:sp>
       <p:sp>
         <p:nvSpPr>
-          <p:cNvPr id="16" name="Text 14"/>
-          <p:cNvSpPr/>
-          <p:nvPr/>
-        </p:nvSpPr>
-        <p:spPr>
-          <a:xfrm>
-            <a:off x="868680" y="3383280"/>
-            <a:ext cx="3291840" cy="228600"/>
+          <p:cNvPr id="20" name="Shape 18"/>
+          <p:cNvSpPr/>
+          <p:nvPr/>
+        </p:nvSpPr>
+        <p:spPr>
+          <a:xfrm>
+            <a:off x="4663440" y="2286000"/>
+            <a:ext cx="3794760" cy="2395728"/>
+          </a:xfrm>
+          <a:prstGeom prst="rect">
+            <a:avLst/>
+          </a:prstGeom>
+          <a:solidFill>
+            <a:srgbClr val="FCFAF7"/>
+          </a:solidFill>
+          <a:ln/>
+        </p:spPr>
+      </p:sp>
+      <p:sp>
+        <p:nvSpPr>
+          <p:cNvPr id="21" name="Shape 19"/>
+          <p:cNvSpPr/>
+          <p:nvPr/>
+        </p:nvSpPr>
+        <p:spPr>
+          <a:xfrm>
+            <a:off x="4663440" y="2286000"/>
+            <a:ext cx="3794760" cy="50292"/>
+          </a:xfrm>
+          <a:prstGeom prst="rect">
+            <a:avLst/>
+          </a:prstGeom>
+          <a:solidFill>
+            <a:srgbClr val="E4AA25"/>
+          </a:solidFill>
+          <a:ln/>
+        </p:spPr>
+      </p:sp>
+      <p:sp>
+        <p:nvSpPr>
+          <p:cNvPr id="22" name="Text 20"/>
+          <p:cNvSpPr/>
+          <p:nvPr/>
+        </p:nvSpPr>
+        <p:spPr>
+          <a:xfrm>
+            <a:off x="4892040" y="2450592"/>
+            <a:ext cx="2286000" cy="201168"/>
           </a:xfrm>
           <a:prstGeom prst="rect">
             <a:avLst/>
@@ -2238,12 +2583,54 @@
               <a:buNone/>
             </a:pPr>
             <a:r>
+              <a:rPr lang="en-US" sz="750" b="1" spc="300" kern="0" dirty="0">
+                <a:solidFill>
+                  <a:srgbClr val="B67F20"/>
+                </a:solidFill>
+                <a:latin typeface="Calibri" pitchFamily="34" charset="0"/>
+                <a:ea typeface="Calibri" pitchFamily="34" charset="-122"/>
+                <a:cs typeface="Calibri" pitchFamily="34" charset="-120"/>
+              </a:rPr>
+              <a:t>THE OPPORTUNITY</a:t>
+            </a:r>
+            <a:endParaRPr lang="en-US" sz="750" dirty="0"/>
+          </a:p>
+        </p:txBody>
+      </p:sp>
+      <p:sp>
+        <p:nvSpPr>
+          <p:cNvPr id="23" name="Text 21"/>
+          <p:cNvSpPr/>
+          <p:nvPr/>
+        </p:nvSpPr>
+        <p:spPr>
+          <a:xfrm>
+            <a:off x="4892040" y="2761488"/>
+            <a:ext cx="3337560" cy="237744"/>
+          </a:xfrm>
+          <a:prstGeom prst="rect">
+            <a:avLst/>
+          </a:prstGeom>
+          <a:noFill/>
+          <a:ln/>
+        </p:spPr>
+        <p:txBody>
+          <a:bodyPr wrap="square" lIns="0" tIns="0" rIns="0" bIns="0" rtlCol="0" anchor="ctr"/>
+          <a:lstStyle/>
+          <a:p>
+            <a:pPr indent="0" marL="0">
+              <a:buNone/>
+            </a:pPr>
+            <a:r>
               <a:rPr lang="en-US" sz="1100" b="1" dirty="0">
                 <a:solidFill>
-                  <a:srgbClr val="3D0A10"/>
-                </a:solidFill>
-              </a:rPr>
-              <a:t>Product thinking</a:t>
+                  <a:srgbClr val="A31422"/>
+                </a:solidFill>
+                <a:latin typeface="Calibri" pitchFamily="34" charset="0"/>
+                <a:ea typeface="Calibri" pitchFamily="34" charset="-122"/>
+                <a:cs typeface="Calibri" pitchFamily="34" charset="-120"/>
+              </a:rPr>
+              <a:t>Co-founder title</a:t>
             </a:r>
             <a:endParaRPr lang="en-US" sz="1100" dirty="0"/>
           </a:p>
@@ -2251,14 +2638,14 @@
       </p:sp>
       <p:sp>
         <p:nvSpPr>
-          <p:cNvPr id="17" name="Text 15"/>
-          <p:cNvSpPr/>
-          <p:nvPr/>
-        </p:nvSpPr>
-        <p:spPr>
-          <a:xfrm>
-            <a:off x="868680" y="3630168"/>
-            <a:ext cx="3291840" cy="347472"/>
+          <p:cNvPr id="24" name="Text 22"/>
+          <p:cNvSpPr/>
+          <p:nvPr/>
+        </p:nvSpPr>
+        <p:spPr>
+          <a:xfrm>
+            <a:off x="4892040" y="3017520"/>
+            <a:ext cx="3337560" cy="347472"/>
           </a:xfrm>
           <a:prstGeom prst="rect">
             <a:avLst/>
@@ -2276,10 +2663,13 @@
             <a:r>
               <a:rPr lang="en-US" sz="950" dirty="0">
                 <a:solidFill>
-                  <a:srgbClr val="6B5E4A"/>
-                </a:solidFill>
-              </a:rPr>
-              <a:t>Someone who can build features users actually want, not just what sounds good.</a:t>
+                  <a:srgbClr val="331313"/>
+                </a:solidFill>
+                <a:latin typeface="Calibri" pitchFamily="34" charset="0"/>
+                <a:ea typeface="Calibri" pitchFamily="34" charset="-122"/>
+                <a:cs typeface="Calibri" pitchFamily="34" charset="-120"/>
+              </a:rPr>
+              <a:t>Not an early employee — a real co-founder with meaningful equity.</a:t>
             </a:r>
             <a:endParaRPr lang="en-US" sz="950" dirty="0"/>
           </a:p>
@@ -2287,14 +2677,14 @@
       </p:sp>
       <p:sp>
         <p:nvSpPr>
-          <p:cNvPr id="18" name="Text 16"/>
-          <p:cNvSpPr/>
-          <p:nvPr/>
-        </p:nvSpPr>
-        <p:spPr>
-          <a:xfrm>
-            <a:off x="868680" y="3977640"/>
-            <a:ext cx="3291840" cy="228600"/>
+          <p:cNvPr id="25" name="Text 23"/>
+          <p:cNvSpPr/>
+          <p:nvPr/>
+        </p:nvSpPr>
+        <p:spPr>
+          <a:xfrm>
+            <a:off x="4892040" y="3383280"/>
+            <a:ext cx="3337560" cy="237744"/>
           </a:xfrm>
           <a:prstGeom prst="rect">
             <a:avLst/>
@@ -2312,10 +2702,13 @@
             <a:r>
               <a:rPr lang="en-US" sz="1100" b="1" dirty="0">
                 <a:solidFill>
-                  <a:srgbClr val="3D0A10"/>
-                </a:solidFill>
-              </a:rPr>
-              <a:t>Move fast</a:t>
+                  <a:srgbClr val="A31422"/>
+                </a:solidFill>
+                <a:latin typeface="Calibri" pitchFamily="34" charset="0"/>
+                <a:ea typeface="Calibri" pitchFamily="34" charset="-122"/>
+                <a:cs typeface="Calibri" pitchFamily="34" charset="-120"/>
+              </a:rPr>
+              <a:t>Build something real</a:t>
             </a:r>
             <a:endParaRPr lang="en-US" sz="1100" dirty="0"/>
           </a:p>
@@ -2323,14 +2716,14 @@
       </p:sp>
       <p:sp>
         <p:nvSpPr>
-          <p:cNvPr id="19" name="Text 17"/>
-          <p:cNvSpPr/>
-          <p:nvPr/>
-        </p:nvSpPr>
-        <p:spPr>
-          <a:xfrm>
-            <a:off x="868680" y="4224528"/>
-            <a:ext cx="3291840" cy="347472"/>
+          <p:cNvPr id="26" name="Text 24"/>
+          <p:cNvSpPr/>
+          <p:nvPr/>
+        </p:nvSpPr>
+        <p:spPr>
+          <a:xfrm>
+            <a:off x="4892040" y="3639312"/>
+            <a:ext cx="3337560" cy="347472"/>
           </a:xfrm>
           <a:prstGeom prst="rect">
             <a:avLst/>
@@ -2348,10 +2741,13 @@
             <a:r>
               <a:rPr lang="en-US" sz="950" dirty="0">
                 <a:solidFill>
-                  <a:srgbClr val="6B5E4A"/>
-                </a:solidFill>
-              </a:rPr>
-              <a:t>We have a product, a market, and a plan. We need someone who executes.</a:t>
+                  <a:srgbClr val="331313"/>
+                </a:solidFill>
+                <a:latin typeface="Calibri" pitchFamily="34" charset="0"/>
+                <a:ea typeface="Calibri" pitchFamily="34" charset="-122"/>
+                <a:cs typeface="Calibri" pitchFamily="34" charset="-120"/>
+              </a:rPr>
+              <a:t>A consumer app in a city you live in. Real users, real bookings.</a:t>
             </a:r>
             <a:endParaRPr lang="en-US" sz="950" dirty="0"/>
           </a:p>
@@ -2359,54 +2755,14 @@
       </p:sp>
       <p:sp>
         <p:nvSpPr>
-          <p:cNvPr id="20" name="Shape 18"/>
-          <p:cNvSpPr/>
-          <p:nvPr/>
-        </p:nvSpPr>
-        <p:spPr>
-          <a:xfrm>
-            <a:off x="4709160" y="2286000"/>
-            <a:ext cx="3794760" cy="2331720"/>
-          </a:xfrm>
-          <a:prstGeom prst="rect">
-            <a:avLst/>
-          </a:prstGeom>
-          <a:solidFill>
-            <a:srgbClr val="EDE5D8"/>
-          </a:solidFill>
-          <a:ln/>
-        </p:spPr>
-      </p:sp>
-      <p:sp>
-        <p:nvSpPr>
-          <p:cNvPr id="21" name="Shape 19"/>
-          <p:cNvSpPr/>
-          <p:nvPr/>
-        </p:nvSpPr>
-        <p:spPr>
-          <a:xfrm>
-            <a:off x="4709160" y="2286000"/>
-            <a:ext cx="3794760" cy="54864"/>
-          </a:xfrm>
-          <a:prstGeom prst="rect">
-            <a:avLst/>
-          </a:prstGeom>
-          <a:solidFill>
-            <a:srgbClr val="D4A532"/>
-          </a:solidFill>
-          <a:ln/>
-        </p:spPr>
-      </p:sp>
-      <p:sp>
-        <p:nvSpPr>
-          <p:cNvPr id="22" name="Text 20"/>
-          <p:cNvSpPr/>
-          <p:nvPr/>
-        </p:nvSpPr>
-        <p:spPr>
-          <a:xfrm>
-            <a:off x="4937760" y="2450592"/>
-            <a:ext cx="3200400" cy="228600"/>
+          <p:cNvPr id="27" name="Text 25"/>
+          <p:cNvSpPr/>
+          <p:nvPr/>
+        </p:nvSpPr>
+        <p:spPr>
+          <a:xfrm>
+            <a:off x="4892040" y="4005072"/>
+            <a:ext cx="3337560" cy="237744"/>
           </a:xfrm>
           <a:prstGeom prst="rect">
             <a:avLst/>
@@ -2422,27 +2778,30 @@
               <a:buNone/>
             </a:pPr>
             <a:r>
-              <a:rPr lang="en-US" sz="800" b="1" spc="300" kern="0" dirty="0">
-                <a:solidFill>
-                  <a:srgbClr val="9A7A2E"/>
-                </a:solidFill>
-              </a:rPr>
-              <a:t>THE OPPORTUNITY</a:t>
-            </a:r>
-            <a:endParaRPr lang="en-US" sz="800" dirty="0"/>
-          </a:p>
-        </p:txBody>
-      </p:sp>
-      <p:sp>
-        <p:nvSpPr>
-          <p:cNvPr id="23" name="Text 21"/>
-          <p:cNvSpPr/>
-          <p:nvPr/>
-        </p:nvSpPr>
-        <p:spPr>
-          <a:xfrm>
-            <a:off x="4937760" y="2788920"/>
-            <a:ext cx="3291840" cy="228600"/>
+              <a:rPr lang="en-US" sz="1100" b="1" dirty="0">
+                <a:solidFill>
+                  <a:srgbClr val="A31422"/>
+                </a:solidFill>
+                <a:latin typeface="Calibri" pitchFamily="34" charset="0"/>
+                <a:ea typeface="Calibri" pitchFamily="34" charset="-122"/>
+                <a:cs typeface="Calibri" pitchFamily="34" charset="-120"/>
+              </a:rPr>
+              <a:t>Madrid is open</a:t>
+            </a:r>
+            <a:endParaRPr lang="en-US" sz="1100" dirty="0"/>
+          </a:p>
+        </p:txBody>
+      </p:sp>
+      <p:sp>
+        <p:nvSpPr>
+          <p:cNvPr id="28" name="Text 26"/>
+          <p:cNvSpPr/>
+          <p:nvPr/>
+        </p:nvSpPr>
+        <p:spPr>
+          <a:xfrm>
+            <a:off x="4892040" y="4261104"/>
+            <a:ext cx="3337560" cy="347472"/>
           </a:xfrm>
           <a:prstGeom prst="rect">
             <a:avLst/>
@@ -2458,192 +2817,15 @@
               <a:buNone/>
             </a:pPr>
             <a:r>
-              <a:rPr lang="en-US" sz="1100" b="1" dirty="0">
-                <a:solidFill>
-                  <a:srgbClr val="3D0A10"/>
-                </a:solidFill>
-              </a:rPr>
-              <a:t>Co-founder title</a:t>
-            </a:r>
-            <a:endParaRPr lang="en-US" sz="1100" dirty="0"/>
-          </a:p>
-        </p:txBody>
-      </p:sp>
-      <p:sp>
-        <p:nvSpPr>
-          <p:cNvPr id="24" name="Text 22"/>
-          <p:cNvSpPr/>
-          <p:nvPr/>
-        </p:nvSpPr>
-        <p:spPr>
-          <a:xfrm>
-            <a:off x="4937760" y="3035808"/>
-            <a:ext cx="3291840" cy="347472"/>
-          </a:xfrm>
-          <a:prstGeom prst="rect">
-            <a:avLst/>
-          </a:prstGeom>
-          <a:noFill/>
-          <a:ln/>
-        </p:spPr>
-        <p:txBody>
-          <a:bodyPr wrap="square" lIns="0" tIns="0" rIns="0" bIns="0" rtlCol="0" anchor="ctr"/>
-          <a:lstStyle/>
-          <a:p>
-            <a:pPr indent="0" marL="0">
-              <a:buNone/>
-            </a:pPr>
-            <a:r>
               <a:rPr lang="en-US" sz="950" dirty="0">
                 <a:solidFill>
-                  <a:srgbClr val="6B5E4A"/>
-                </a:solidFill>
-              </a:rPr>
-              <a:t>Not an early employee — a real co-founder with meaningful equity.</a:t>
-            </a:r>
-            <a:endParaRPr lang="en-US" sz="950" dirty="0"/>
-          </a:p>
-        </p:txBody>
-      </p:sp>
-      <p:sp>
-        <p:nvSpPr>
-          <p:cNvPr id="25" name="Text 23"/>
-          <p:cNvSpPr/>
-          <p:nvPr/>
-        </p:nvSpPr>
-        <p:spPr>
-          <a:xfrm>
-            <a:off x="4937760" y="3383280"/>
-            <a:ext cx="3291840" cy="228600"/>
-          </a:xfrm>
-          <a:prstGeom prst="rect">
-            <a:avLst/>
-          </a:prstGeom>
-          <a:noFill/>
-          <a:ln/>
-        </p:spPr>
-        <p:txBody>
-          <a:bodyPr wrap="square" lIns="0" tIns="0" rIns="0" bIns="0" rtlCol="0" anchor="ctr"/>
-          <a:lstStyle/>
-          <a:p>
-            <a:pPr indent="0" marL="0">
-              <a:buNone/>
-            </a:pPr>
-            <a:r>
-              <a:rPr lang="en-US" sz="1100" b="1" dirty="0">
-                <a:solidFill>
-                  <a:srgbClr val="3D0A10"/>
-                </a:solidFill>
-              </a:rPr>
-              <a:t>Build something real</a:t>
-            </a:r>
-            <a:endParaRPr lang="en-US" sz="1100" dirty="0"/>
-          </a:p>
-        </p:txBody>
-      </p:sp>
-      <p:sp>
-        <p:nvSpPr>
-          <p:cNvPr id="26" name="Text 24"/>
-          <p:cNvSpPr/>
-          <p:nvPr/>
-        </p:nvSpPr>
-        <p:spPr>
-          <a:xfrm>
-            <a:off x="4937760" y="3630168"/>
-            <a:ext cx="3291840" cy="347472"/>
-          </a:xfrm>
-          <a:prstGeom prst="rect">
-            <a:avLst/>
-          </a:prstGeom>
-          <a:noFill/>
-          <a:ln/>
-        </p:spPr>
-        <p:txBody>
-          <a:bodyPr wrap="square" lIns="0" tIns="0" rIns="0" bIns="0" rtlCol="0" anchor="ctr"/>
-          <a:lstStyle/>
-          <a:p>
-            <a:pPr indent="0" marL="0">
-              <a:buNone/>
-            </a:pPr>
-            <a:r>
-              <a:rPr lang="en-US" sz="950" dirty="0">
-                <a:solidFill>
-                  <a:srgbClr val="6B5E4A"/>
-                </a:solidFill>
-              </a:rPr>
-              <a:t>A consumer app in a city you live in. Real users, real bookings.</a:t>
-            </a:r>
-            <a:endParaRPr lang="en-US" sz="950" dirty="0"/>
-          </a:p>
-        </p:txBody>
-      </p:sp>
-      <p:sp>
-        <p:nvSpPr>
-          <p:cNvPr id="27" name="Text 25"/>
-          <p:cNvSpPr/>
-          <p:nvPr/>
-        </p:nvSpPr>
-        <p:spPr>
-          <a:xfrm>
-            <a:off x="4937760" y="3977640"/>
-            <a:ext cx="3291840" cy="228600"/>
-          </a:xfrm>
-          <a:prstGeom prst="rect">
-            <a:avLst/>
-          </a:prstGeom>
-          <a:noFill/>
-          <a:ln/>
-        </p:spPr>
-        <p:txBody>
-          <a:bodyPr wrap="square" lIns="0" tIns="0" rIns="0" bIns="0" rtlCol="0" anchor="ctr"/>
-          <a:lstStyle/>
-          <a:p>
-            <a:pPr indent="0" marL="0">
-              <a:buNone/>
-            </a:pPr>
-            <a:r>
-              <a:rPr lang="en-US" sz="1100" b="1" dirty="0">
-                <a:solidFill>
-                  <a:srgbClr val="3D0A10"/>
-                </a:solidFill>
-              </a:rPr>
-              <a:t>Market ready</a:t>
-            </a:r>
-            <a:endParaRPr lang="en-US" sz="1100" dirty="0"/>
-          </a:p>
-        </p:txBody>
-      </p:sp>
-      <p:sp>
-        <p:nvSpPr>
-          <p:cNvPr id="28" name="Text 26"/>
-          <p:cNvSpPr/>
-          <p:nvPr/>
-        </p:nvSpPr>
-        <p:spPr>
-          <a:xfrm>
-            <a:off x="4937760" y="4224528"/>
-            <a:ext cx="3291840" cy="347472"/>
-          </a:xfrm>
-          <a:prstGeom prst="rect">
-            <a:avLst/>
-          </a:prstGeom>
-          <a:noFill/>
-          <a:ln/>
-        </p:spPr>
-        <p:txBody>
-          <a:bodyPr wrap="square" lIns="0" tIns="0" rIns="0" bIns="0" rtlCol="0" anchor="ctr"/>
-          <a:lstStyle/>
-          <a:p>
-            <a:pPr indent="0" marL="0">
-              <a:buNone/>
-            </a:pPr>
-            <a:r>
-              <a:rPr lang="en-US" sz="950" dirty="0">
-                <a:solidFill>
-                  <a:srgbClr val="6B5E4A"/>
-                </a:solidFill>
-              </a:rPr>
-              <a:t>Madrid is untapped. No dominant player. Timing is right.</a:t>
+                  <a:srgbClr val="331313"/>
+                </a:solidFill>
+                <a:latin typeface="Calibri" pitchFamily="34" charset="0"/>
+                <a:ea typeface="Calibri" pitchFamily="34" charset="-122"/>
+                <a:cs typeface="Calibri" pitchFamily="34" charset="-120"/>
+              </a:rPr>
+              <a:t>No dominant player. Timing is right. Market is ready.</a:t>
             </a:r>
             <a:endParaRPr lang="en-US" sz="950" dirty="0"/>
           </a:p>
@@ -2664,7 +2846,7 @@
             <a:avLst/>
           </a:prstGeom>
           <a:solidFill>
-            <a:srgbClr val="3D0A10"/>
+            <a:srgbClr val="A31422"/>
           </a:solidFill>
           <a:ln/>
         </p:spPr>
@@ -2677,8 +2859,8 @@
         </p:nvSpPr>
         <p:spPr>
           <a:xfrm>
-            <a:off x="640080" y="4736592"/>
-            <a:ext cx="7315200" cy="274320"/>
+            <a:off x="594360" y="4754880"/>
+            <a:ext cx="4572000" cy="256032"/>
           </a:xfrm>
           <a:prstGeom prst="rect">
             <a:avLst/>
@@ -2696,8 +2878,11 @@
             <a:r>
               <a:rPr lang="en-US" sz="900" dirty="0">
                 <a:solidFill>
-                  <a:srgbClr val="C9B89A"/>
-                </a:solidFill>
+                  <a:srgbClr val="E8B4B4"/>
+                </a:solidFill>
+                <a:latin typeface="Calibri" pitchFamily="34" charset="0"/>
+                <a:ea typeface="Calibri" pitchFamily="34" charset="-122"/>
+                <a:cs typeface="Calibri" pitchFamily="34" charset="-120"/>
               </a:rPr>
               <a:t>massageclub.io</a:t>
             </a:r>
@@ -2713,8 +2898,8 @@
         </p:nvSpPr>
         <p:spPr>
           <a:xfrm>
-            <a:off x="8412480" y="4736592"/>
-            <a:ext cx="548640" cy="256032"/>
+            <a:off x="8321040" y="4754880"/>
+            <a:ext cx="457200" cy="256032"/>
           </a:xfrm>
           <a:prstGeom prst="rect">
             <a:avLst/>
@@ -2732,8 +2917,11 @@
             <a:r>
               <a:rPr lang="en-US" sz="900" dirty="0">
                 <a:solidFill>
-                  <a:srgbClr val="8B7355"/>
-                </a:solidFill>
+                  <a:srgbClr val="A07070"/>
+                </a:solidFill>
+                <a:latin typeface="Calibri" pitchFamily="34" charset="0"/>
+                <a:ea typeface="Calibri" pitchFamily="34" charset="-122"/>
+                <a:cs typeface="Calibri" pitchFamily="34" charset="-120"/>
               </a:rPr>
               <a:t>02</a:t>
             </a:r>
@@ -2755,7 +2943,7 @@
     <p:bg>
       <p:bgPr>
         <a:solidFill>
-          <a:srgbClr val="F5F0E8"/>
+          <a:srgbClr val="F8F6F0"/>
         </a:solidFill>
       </p:bgPr>
     </p:bg>
@@ -2782,13 +2970,13 @@
         <p:spPr>
           <a:xfrm>
             <a:off x="0" y="0"/>
-            <a:ext cx="9144000" cy="777240"/>
-          </a:xfrm>
-          <a:prstGeom prst="rect">
-            <a:avLst/>
-          </a:prstGeom>
-          <a:solidFill>
-            <a:srgbClr val="3D0A10"/>
+            <a:ext cx="9144000" cy="804672"/>
+          </a:xfrm>
+          <a:prstGeom prst="rect">
+            <a:avLst/>
+          </a:prstGeom>
+          <a:solidFill>
+            <a:srgbClr val="A31422"/>
           </a:solidFill>
           <a:ln/>
         </p:spPr>
@@ -2801,14 +2989,14 @@
         </p:nvSpPr>
         <p:spPr>
           <a:xfrm>
-            <a:off x="0" y="777240"/>
-            <a:ext cx="9144000" cy="54864"/>
-          </a:xfrm>
-          <a:prstGeom prst="rect">
-            <a:avLst/>
-          </a:prstGeom>
-          <a:solidFill>
-            <a:srgbClr val="D4A532"/>
+            <a:off x="0" y="804672"/>
+            <a:ext cx="9144000" cy="50292"/>
+          </a:xfrm>
+          <a:prstGeom prst="rect">
+            <a:avLst/>
+          </a:prstGeom>
+          <a:solidFill>
+            <a:srgbClr val="E4AA25"/>
           </a:solidFill>
           <a:ln/>
         </p:spPr>
@@ -2821,8 +3009,8 @@
         </p:nvSpPr>
         <p:spPr>
           <a:xfrm>
-            <a:off x="640080" y="164592"/>
-            <a:ext cx="2743200" cy="274320"/>
+            <a:off x="594360" y="146304"/>
+            <a:ext cx="3200400" cy="292608"/>
           </a:xfrm>
           <a:prstGeom prst="rect">
             <a:avLst/>
@@ -2840,8 +3028,11 @@
             <a:r>
               <a:rPr lang="en-US" sz="1100" b="1" spc="500" kern="0" dirty="0">
                 <a:solidFill>
-                  <a:srgbClr val="D4A532"/>
-                </a:solidFill>
+                  <a:srgbClr val="E4AA25"/>
+                </a:solidFill>
+                <a:latin typeface="Calibri" pitchFamily="34" charset="0"/>
+                <a:ea typeface="Calibri" pitchFamily="34" charset="-122"/>
+                <a:cs typeface="Calibri" pitchFamily="34" charset="-120"/>
               </a:rPr>
               <a:t>MASSAGE CLUB</a:t>
             </a:r>
@@ -2857,8 +3048,86 @@
         </p:nvSpPr>
         <p:spPr>
           <a:xfrm>
-            <a:off x="4572000" y="164592"/>
-            <a:ext cx="3931920" cy="274320"/>
+            <a:off x="594360" y="475488"/>
+            <a:ext cx="3657600" cy="228600"/>
+          </a:xfrm>
+          <a:prstGeom prst="rect">
+            <a:avLst/>
+          </a:prstGeom>
+          <a:noFill/>
+          <a:ln/>
+        </p:spPr>
+        <p:txBody>
+          <a:bodyPr wrap="square" lIns="0" tIns="0" rIns="0" bIns="0" rtlCol="0" anchor="ctr"/>
+          <a:lstStyle/>
+          <a:p>
+            <a:pPr indent="0" marL="0">
+              <a:buNone/>
+            </a:pPr>
+            <a:r>
+              <a:rPr lang="en-US" sz="800" spc="300" kern="0" dirty="0">
+                <a:solidFill>
+                  <a:srgbClr val="E8B4B4"/>
+                </a:solidFill>
+                <a:latin typeface="Calibri" pitchFamily="34" charset="0"/>
+                <a:ea typeface="Calibri" pitchFamily="34" charset="-122"/>
+                <a:cs typeface="Calibri" pitchFamily="34" charset="-120"/>
+              </a:rPr>
+              <a:t>WHY THIS, WHY NOW</a:t>
+            </a:r>
+            <a:endParaRPr lang="en-US" sz="800" dirty="0"/>
+          </a:p>
+        </p:txBody>
+      </p:sp>
+      <p:sp>
+        <p:nvSpPr>
+          <p:cNvPr id="6" name="Text 4"/>
+          <p:cNvSpPr/>
+          <p:nvPr/>
+        </p:nvSpPr>
+        <p:spPr>
+          <a:xfrm>
+            <a:off x="594360" y="987552"/>
+            <a:ext cx="6400800" cy="658368"/>
+          </a:xfrm>
+          <a:prstGeom prst="rect">
+            <a:avLst/>
+          </a:prstGeom>
+          <a:noFill/>
+          <a:ln/>
+        </p:spPr>
+        <p:txBody>
+          <a:bodyPr wrap="square" lIns="0" tIns="0" rIns="0" bIns="0" rtlCol="0" anchor="ctr"/>
+          <a:lstStyle/>
+          <a:p>
+            <a:pPr indent="0" marL="0">
+              <a:buNone/>
+            </a:pPr>
+            <a:r>
+              <a:rPr lang="en-US" sz="4200" b="1" dirty="0">
+                <a:solidFill>
+                  <a:srgbClr val="A31422"/>
+                </a:solidFill>
+                <a:latin typeface="Calibri" pitchFamily="34" charset="0"/>
+                <a:ea typeface="Calibri" pitchFamily="34" charset="-122"/>
+                <a:cs typeface="Calibri" pitchFamily="34" charset="-120"/>
+              </a:rPr>
+              <a:t>Why join us.</a:t>
+            </a:r>
+            <a:endParaRPr lang="en-US" sz="4200" dirty="0"/>
+          </a:p>
+        </p:txBody>
+      </p:sp>
+      <p:sp>
+        <p:nvSpPr>
+          <p:cNvPr id="7" name="Text 5"/>
+          <p:cNvSpPr/>
+          <p:nvPr/>
+        </p:nvSpPr>
+        <p:spPr>
+          <a:xfrm>
+            <a:off x="6858000" y="987552"/>
+            <a:ext cx="1828800" cy="228600"/>
           </a:xfrm>
           <a:prstGeom prst="rect">
             <a:avLst/>
@@ -2874,27 +3143,90 @@
               <a:buNone/>
             </a:pPr>
             <a:r>
-              <a:rPr lang="en-US" sz="900" dirty="0">
-                <a:solidFill>
-                  <a:srgbClr val="EDE5D8"/>
-                </a:solidFill>
-              </a:rPr>
-              <a:t>massageclub.io</a:t>
-            </a:r>
-            <a:endParaRPr lang="en-US" sz="900" dirty="0"/>
-          </a:p>
-        </p:txBody>
-      </p:sp>
-      <p:sp>
-        <p:nvSpPr>
-          <p:cNvPr id="6" name="Text 4"/>
-          <p:cNvSpPr/>
-          <p:nvPr/>
-        </p:nvSpPr>
-        <p:spPr>
-          <a:xfrm>
-            <a:off x="640080" y="475488"/>
-            <a:ext cx="2743200" cy="201168"/>
+              <a:rPr lang="en-US" sz="800" dirty="0">
+                <a:solidFill>
+                  <a:srgbClr val="B8A98A"/>
+                </a:solidFill>
+                <a:latin typeface="Calibri" pitchFamily="34" charset="0"/>
+                <a:ea typeface="Calibri" pitchFamily="34" charset="-122"/>
+                <a:cs typeface="Calibri" pitchFamily="34" charset="-120"/>
+              </a:rPr>
+              <a:t>Slide 3 of 3</a:t>
+            </a:r>
+            <a:endParaRPr lang="en-US" sz="800" dirty="0"/>
+          </a:p>
+        </p:txBody>
+      </p:sp>
+      <p:sp>
+        <p:nvSpPr>
+          <p:cNvPr id="8" name="Shape 6"/>
+          <p:cNvSpPr/>
+          <p:nvPr/>
+        </p:nvSpPr>
+        <p:spPr>
+          <a:xfrm>
+            <a:off x="594360" y="1737360"/>
+            <a:ext cx="7955280" cy="18288"/>
+          </a:xfrm>
+          <a:prstGeom prst="rect">
+            <a:avLst/>
+          </a:prstGeom>
+          <a:solidFill>
+            <a:srgbClr val="DED5C3"/>
+          </a:solidFill>
+          <a:ln/>
+        </p:spPr>
+      </p:sp>
+      <p:sp>
+        <p:nvSpPr>
+          <p:cNvPr id="9" name="Shape 7"/>
+          <p:cNvSpPr/>
+          <p:nvPr/>
+        </p:nvSpPr>
+        <p:spPr>
+          <a:xfrm>
+            <a:off x="594360" y="1901952"/>
+            <a:ext cx="3794760" cy="1170432"/>
+          </a:xfrm>
+          <a:prstGeom prst="rect">
+            <a:avLst/>
+          </a:prstGeom>
+          <a:solidFill>
+            <a:srgbClr val="FCFAF7"/>
+          </a:solidFill>
+          <a:ln/>
+        </p:spPr>
+      </p:sp>
+      <p:sp>
+        <p:nvSpPr>
+          <p:cNvPr id="10" name="Shape 8"/>
+          <p:cNvSpPr/>
+          <p:nvPr/>
+        </p:nvSpPr>
+        <p:spPr>
+          <a:xfrm>
+            <a:off x="594360" y="1901952"/>
+            <a:ext cx="3794760" cy="50292"/>
+          </a:xfrm>
+          <a:prstGeom prst="rect">
+            <a:avLst/>
+          </a:prstGeom>
+          <a:solidFill>
+            <a:srgbClr val="A31422"/>
+          </a:solidFill>
+          <a:ln/>
+        </p:spPr>
+      </p:sp>
+      <p:sp>
+        <p:nvSpPr>
+          <p:cNvPr id="11" name="Text 9"/>
+          <p:cNvSpPr/>
+          <p:nvPr/>
+        </p:nvSpPr>
+        <p:spPr>
+          <a:xfrm>
+            <a:off x="795528" y="2011680"/>
+            <a:ext cx="457200" cy="320040"/>
           </a:xfrm>
           <a:prstGeom prst="rect">
             <a:avLst/>
@@ -2910,27 +3242,30 @@
               <a:buNone/>
             </a:pPr>
             <a:r>
-              <a:rPr lang="en-US" sz="800" b="1" spc="300" kern="0" dirty="0">
-                <a:solidFill>
-                  <a:srgbClr val="C9B89A"/>
-                </a:solidFill>
-              </a:rPr>
-              <a:t>WHY THIS, WHY NOW</a:t>
-            </a:r>
-            <a:endParaRPr lang="en-US" sz="800" dirty="0"/>
-          </a:p>
-        </p:txBody>
-      </p:sp>
-      <p:sp>
-        <p:nvSpPr>
-          <p:cNvPr id="7" name="Text 5"/>
-          <p:cNvSpPr/>
-          <p:nvPr/>
-        </p:nvSpPr>
-        <p:spPr>
-          <a:xfrm>
-            <a:off x="640080" y="1005840"/>
-            <a:ext cx="6400800" cy="594360"/>
+              <a:rPr lang="en-US" sz="2000" b="1" dirty="0">
+                <a:solidFill>
+                  <a:srgbClr val="A31422"/>
+                </a:solidFill>
+                <a:latin typeface="Calibri" pitchFamily="34" charset="0"/>
+                <a:ea typeface="Calibri" pitchFamily="34" charset="-122"/>
+                <a:cs typeface="Calibri" pitchFamily="34" charset="-120"/>
+              </a:rPr>
+              <a:t>01</a:t>
+            </a:r>
+            <a:endParaRPr lang="en-US" sz="2000" dirty="0"/>
+          </a:p>
+        </p:txBody>
+      </p:sp>
+      <p:sp>
+        <p:nvSpPr>
+          <p:cNvPr id="12" name="Text 10"/>
+          <p:cNvSpPr/>
+          <p:nvPr/>
+        </p:nvSpPr>
+        <p:spPr>
+          <a:xfrm>
+            <a:off x="1252728" y="2029968"/>
+            <a:ext cx="2926080" cy="292608"/>
           </a:xfrm>
           <a:prstGeom prst="rect">
             <a:avLst/>
@@ -2946,122 +3281,108 @@
               <a:buNone/>
             </a:pPr>
             <a:r>
-              <a:rPr lang="en-US" sz="4200" b="1" dirty="0">
-                <a:solidFill>
-                  <a:srgbClr val="3D0A10"/>
-                </a:solidFill>
-              </a:rPr>
-              <a:t>Why join us.</a:t>
-            </a:r>
-            <a:endParaRPr lang="en-US" sz="4200" dirty="0"/>
-          </a:p>
-        </p:txBody>
-      </p:sp>
-      <p:sp>
-        <p:nvSpPr>
-          <p:cNvPr id="8" name="Text 6"/>
-          <p:cNvSpPr/>
-          <p:nvPr/>
-        </p:nvSpPr>
-        <p:spPr>
-          <a:xfrm>
-            <a:off x="6858000" y="1005840"/>
-            <a:ext cx="1828800" cy="228600"/>
-          </a:xfrm>
-          <a:prstGeom prst="rect">
-            <a:avLst/>
-          </a:prstGeom>
-          <a:noFill/>
-          <a:ln/>
-        </p:spPr>
-        <p:txBody>
-          <a:bodyPr wrap="square" lIns="0" tIns="0" rIns="0" bIns="0" rtlCol="0" anchor="ctr"/>
-          <a:lstStyle/>
-          <a:p>
-            <a:pPr algn="r" indent="0" marL="0">
-              <a:buNone/>
-            </a:pPr>
-            <a:r>
-              <a:rPr lang="en-US" sz="800" dirty="0">
-                <a:solidFill>
-                  <a:srgbClr val="B8A98A"/>
-                </a:solidFill>
-              </a:rPr>
-              <a:t>Slide 3 of 3</a:t>
-            </a:r>
-            <a:endParaRPr lang="en-US" sz="800" dirty="0"/>
-          </a:p>
-        </p:txBody>
-      </p:sp>
-      <p:sp>
-        <p:nvSpPr>
-          <p:cNvPr id="9" name="Shape 7"/>
-          <p:cNvSpPr/>
-          <p:nvPr/>
-        </p:nvSpPr>
-        <p:spPr>
-          <a:xfrm>
-            <a:off x="640080" y="1755648"/>
-            <a:ext cx="7863840" cy="22860"/>
-          </a:xfrm>
-          <a:prstGeom prst="rect">
-            <a:avLst/>
-          </a:prstGeom>
-          <a:solidFill>
-            <a:srgbClr val="D4A532"/>
-          </a:solidFill>
-          <a:ln/>
-        </p:spPr>
-      </p:sp>
-      <p:sp>
-        <p:nvSpPr>
-          <p:cNvPr id="10" name="Shape 8"/>
-          <p:cNvSpPr/>
-          <p:nvPr/>
-        </p:nvSpPr>
-        <p:spPr>
-          <a:xfrm>
-            <a:off x="640080" y="1920240"/>
+              <a:rPr lang="en-US" sz="1200" b="1" dirty="0">
+                <a:solidFill>
+                  <a:srgbClr val="A31422"/>
+                </a:solidFill>
+                <a:latin typeface="Calibri" pitchFamily="34" charset="0"/>
+                <a:ea typeface="Calibri" pitchFamily="34" charset="-122"/>
+                <a:cs typeface="Calibri" pitchFamily="34" charset="-120"/>
+              </a:rPr>
+              <a:t>Real product, real market</a:t>
+            </a:r>
+            <a:endParaRPr lang="en-US" sz="1200" dirty="0"/>
+          </a:p>
+        </p:txBody>
+      </p:sp>
+      <p:sp>
+        <p:nvSpPr>
+          <p:cNvPr id="13" name="Text 11"/>
+          <p:cNvSpPr/>
+          <p:nvPr/>
+        </p:nvSpPr>
+        <p:spPr>
+          <a:xfrm>
+            <a:off x="795528" y="2395728"/>
+            <a:ext cx="3383280" cy="566928"/>
+          </a:xfrm>
+          <a:prstGeom prst="rect">
+            <a:avLst/>
+          </a:prstGeom>
+          <a:noFill/>
+          <a:ln/>
+        </p:spPr>
+        <p:txBody>
+          <a:bodyPr wrap="square" lIns="0" tIns="0" rIns="0" bIns="0" rtlCol="0" anchor="ctr"/>
+          <a:lstStyle/>
+          <a:p>
+            <a:pPr indent="0" marL="0">
+              <a:buNone/>
+            </a:pPr>
+            <a:r>
+              <a:rPr lang="en-US" sz="1000" dirty="0">
+                <a:solidFill>
+                  <a:srgbClr val="331313"/>
+                </a:solidFill>
+                <a:latin typeface="Calibri" pitchFamily="34" charset="0"/>
+                <a:ea typeface="Calibri" pitchFamily="34" charset="-122"/>
+                <a:cs typeface="Calibri" pitchFamily="34" charset="-120"/>
+              </a:rPr>
+              <a:t>The app is live. The subscription model proven elsewhere. Madrid is untapped and ready.</a:t>
+            </a:r>
+            <a:endParaRPr lang="en-US" sz="1000" dirty="0"/>
+          </a:p>
+        </p:txBody>
+      </p:sp>
+      <p:sp>
+        <p:nvSpPr>
+          <p:cNvPr id="14" name="Shape 12"/>
+          <p:cNvSpPr/>
+          <p:nvPr/>
+        </p:nvSpPr>
+        <p:spPr>
+          <a:xfrm>
+            <a:off x="4663440" y="1901952"/>
             <a:ext cx="3794760" cy="1170432"/>
           </a:xfrm>
           <a:prstGeom prst="rect">
             <a:avLst/>
           </a:prstGeom>
           <a:solidFill>
-            <a:srgbClr val="EDE5D8"/>
-          </a:solidFill>
-          <a:ln/>
-        </p:spPr>
-      </p:sp>
-      <p:sp>
-        <p:nvSpPr>
-          <p:cNvPr id="11" name="Shape 9"/>
-          <p:cNvSpPr/>
-          <p:nvPr/>
-        </p:nvSpPr>
-        <p:spPr>
-          <a:xfrm>
-            <a:off x="640080" y="1920240"/>
-            <a:ext cx="3794760" cy="54864"/>
-          </a:xfrm>
-          <a:prstGeom prst="rect">
-            <a:avLst/>
-          </a:prstGeom>
-          <a:solidFill>
-            <a:srgbClr val="3D0A10"/>
-          </a:solidFill>
-          <a:ln/>
-        </p:spPr>
-      </p:sp>
-      <p:sp>
-        <p:nvSpPr>
-          <p:cNvPr id="12" name="Text 10"/>
-          <p:cNvSpPr/>
-          <p:nvPr/>
-        </p:nvSpPr>
-        <p:spPr>
-          <a:xfrm>
-            <a:off x="868680" y="2048256"/>
+            <a:srgbClr val="FCFAF7"/>
+          </a:solidFill>
+          <a:ln/>
+        </p:spPr>
+      </p:sp>
+      <p:sp>
+        <p:nvSpPr>
+          <p:cNvPr id="15" name="Shape 13"/>
+          <p:cNvSpPr/>
+          <p:nvPr/>
+        </p:nvSpPr>
+        <p:spPr>
+          <a:xfrm>
+            <a:off x="4663440" y="1901952"/>
+            <a:ext cx="3794760" cy="50292"/>
+          </a:xfrm>
+          <a:prstGeom prst="rect">
+            <a:avLst/>
+          </a:prstGeom>
+          <a:solidFill>
+            <a:srgbClr val="E4AA25"/>
+          </a:solidFill>
+          <a:ln/>
+        </p:spPr>
+      </p:sp>
+      <p:sp>
+        <p:nvSpPr>
+          <p:cNvPr id="16" name="Text 14"/>
+          <p:cNvSpPr/>
+          <p:nvPr/>
+        </p:nvSpPr>
+        <p:spPr>
+          <a:xfrm>
+            <a:off x="4864608" y="2011680"/>
             <a:ext cx="457200" cy="320040"/>
           </a:xfrm>
           <a:prstGeom prst="rect">
@@ -3080,10 +3401,13 @@
             <a:r>
               <a:rPr lang="en-US" sz="2000" b="1" dirty="0">
                 <a:solidFill>
-                  <a:srgbClr val="3D0A10"/>
-                </a:solidFill>
-              </a:rPr>
-              <a:t>01</a:t>
+                  <a:srgbClr val="E4AA25"/>
+                </a:solidFill>
+                <a:latin typeface="Calibri" pitchFamily="34" charset="0"/>
+                <a:ea typeface="Calibri" pitchFamily="34" charset="-122"/>
+                <a:cs typeface="Calibri" pitchFamily="34" charset="-120"/>
+              </a:rPr>
+              <a:t>02</a:t>
             </a:r>
             <a:endParaRPr lang="en-US" sz="2000" dirty="0"/>
           </a:p>
@@ -3091,14 +3415,14 @@
       </p:sp>
       <p:sp>
         <p:nvSpPr>
-          <p:cNvPr id="13" name="Text 11"/>
-          <p:cNvSpPr/>
-          <p:nvPr/>
-        </p:nvSpPr>
-        <p:spPr>
-          <a:xfrm>
-            <a:off x="1325880" y="2066544"/>
-            <a:ext cx="2834640" cy="292608"/>
+          <p:cNvPr id="17" name="Text 15"/>
+          <p:cNvSpPr/>
+          <p:nvPr/>
+        </p:nvSpPr>
+        <p:spPr>
+          <a:xfrm>
+            <a:off x="5321808" y="2029968"/>
+            <a:ext cx="2926080" cy="292608"/>
           </a:xfrm>
           <a:prstGeom prst="rect">
             <a:avLst/>
@@ -3116,10 +3440,13 @@
             <a:r>
               <a:rPr lang="en-US" sz="1200" b="1" dirty="0">
                 <a:solidFill>
-                  <a:srgbClr val="3D0A10"/>
-                </a:solidFill>
-              </a:rPr>
-              <a:t>Real product, real market</a:t>
+                  <a:srgbClr val="A31422"/>
+                </a:solidFill>
+                <a:latin typeface="Calibri" pitchFamily="34" charset="0"/>
+                <a:ea typeface="Calibri" pitchFamily="34" charset="-122"/>
+                <a:cs typeface="Calibri" pitchFamily="34" charset="-120"/>
+              </a:rPr>
+              <a:t>Get in at the start</a:t>
             </a:r>
             <a:endParaRPr lang="en-US" sz="1200" dirty="0"/>
           </a:p>
@@ -3127,14 +3454,14 @@
       </p:sp>
       <p:sp>
         <p:nvSpPr>
-          <p:cNvPr id="14" name="Text 12"/>
-          <p:cNvSpPr/>
-          <p:nvPr/>
-        </p:nvSpPr>
-        <p:spPr>
-          <a:xfrm>
-            <a:off x="868680" y="2432304"/>
-            <a:ext cx="3337560" cy="566928"/>
+          <p:cNvPr id="18" name="Text 16"/>
+          <p:cNvSpPr/>
+          <p:nvPr/>
+        </p:nvSpPr>
+        <p:spPr>
+          <a:xfrm>
+            <a:off x="4864608" y="2395728"/>
+            <a:ext cx="3383280" cy="566928"/>
           </a:xfrm>
           <a:prstGeom prst="rect">
             <a:avLst/>
@@ -3152,10 +3479,13 @@
             <a:r>
               <a:rPr lang="en-US" sz="1000" dirty="0">
                 <a:solidFill>
-                  <a:srgbClr val="6B5E4A"/>
-                </a:solidFill>
-              </a:rPr>
-              <a:t>The app is live. The model is proven elsewhere. Madrid is untapped and ready.</a:t>
+                  <a:srgbClr val="331313"/>
+                </a:solidFill>
+                <a:latin typeface="Calibri" pitchFamily="34" charset="0"/>
+                <a:ea typeface="Calibri" pitchFamily="34" charset="-122"/>
+                <a:cs typeface="Calibri" pitchFamily="34" charset="-120"/>
+              </a:rPr>
+              <a:t>Co-founder title, meaningful equity. You build this — not join it.</a:t>
             </a:r>
             <a:endParaRPr lang="en-US" sz="1000" dirty="0"/>
           </a:p>
@@ -3163,53 +3493,53 @@
       </p:sp>
       <p:sp>
         <p:nvSpPr>
-          <p:cNvPr id="15" name="Shape 13"/>
-          <p:cNvSpPr/>
-          <p:nvPr/>
-        </p:nvSpPr>
-        <p:spPr>
-          <a:xfrm>
-            <a:off x="4709160" y="1920240"/>
+          <p:cNvPr id="19" name="Shape 17"/>
+          <p:cNvSpPr/>
+          <p:nvPr/>
+        </p:nvSpPr>
+        <p:spPr>
+          <a:xfrm>
+            <a:off x="594360" y="3246120"/>
             <a:ext cx="3794760" cy="1170432"/>
           </a:xfrm>
           <a:prstGeom prst="rect">
             <a:avLst/>
           </a:prstGeom>
           <a:solidFill>
-            <a:srgbClr val="EDE5D8"/>
-          </a:solidFill>
-          <a:ln/>
-        </p:spPr>
-      </p:sp>
-      <p:sp>
-        <p:nvSpPr>
-          <p:cNvPr id="16" name="Shape 14"/>
-          <p:cNvSpPr/>
-          <p:nvPr/>
-        </p:nvSpPr>
-        <p:spPr>
-          <a:xfrm>
-            <a:off x="4709160" y="1920240"/>
-            <a:ext cx="3794760" cy="54864"/>
-          </a:xfrm>
-          <a:prstGeom prst="rect">
-            <a:avLst/>
-          </a:prstGeom>
-          <a:solidFill>
-            <a:srgbClr val="8B1A2B"/>
-          </a:solidFill>
-          <a:ln/>
-        </p:spPr>
-      </p:sp>
-      <p:sp>
-        <p:nvSpPr>
-          <p:cNvPr id="17" name="Text 15"/>
-          <p:cNvSpPr/>
-          <p:nvPr/>
-        </p:nvSpPr>
-        <p:spPr>
-          <a:xfrm>
-            <a:off x="4937760" y="2048256"/>
+            <a:srgbClr val="FCFAF7"/>
+          </a:solidFill>
+          <a:ln/>
+        </p:spPr>
+      </p:sp>
+      <p:sp>
+        <p:nvSpPr>
+          <p:cNvPr id="20" name="Shape 18"/>
+          <p:cNvSpPr/>
+          <p:nvPr/>
+        </p:nvSpPr>
+        <p:spPr>
+          <a:xfrm>
+            <a:off x="594360" y="3246120"/>
+            <a:ext cx="3794760" cy="50292"/>
+          </a:xfrm>
+          <a:prstGeom prst="rect">
+            <a:avLst/>
+          </a:prstGeom>
+          <a:solidFill>
+            <a:srgbClr val="A31422"/>
+          </a:solidFill>
+          <a:ln/>
+        </p:spPr>
+      </p:sp>
+      <p:sp>
+        <p:nvSpPr>
+          <p:cNvPr id="21" name="Text 19"/>
+          <p:cNvSpPr/>
+          <p:nvPr/>
+        </p:nvSpPr>
+        <p:spPr>
+          <a:xfrm>
+            <a:off x="795528" y="3355848"/>
             <a:ext cx="457200" cy="320040"/>
           </a:xfrm>
           <a:prstGeom prst="rect">
@@ -3228,10 +3558,13 @@
             <a:r>
               <a:rPr lang="en-US" sz="2000" b="1" dirty="0">
                 <a:solidFill>
-                  <a:srgbClr val="8B1A2B"/>
-                </a:solidFill>
-              </a:rPr>
-              <a:t>02</a:t>
+                  <a:srgbClr val="A31422"/>
+                </a:solidFill>
+                <a:latin typeface="Calibri" pitchFamily="34" charset="0"/>
+                <a:ea typeface="Calibri" pitchFamily="34" charset="-122"/>
+                <a:cs typeface="Calibri" pitchFamily="34" charset="-120"/>
+              </a:rPr>
+              <a:t>03</a:t>
             </a:r>
             <a:endParaRPr lang="en-US" sz="2000" dirty="0"/>
           </a:p>
@@ -3239,14 +3572,14 @@
       </p:sp>
       <p:sp>
         <p:nvSpPr>
-          <p:cNvPr id="18" name="Text 16"/>
-          <p:cNvSpPr/>
-          <p:nvPr/>
-        </p:nvSpPr>
-        <p:spPr>
-          <a:xfrm>
-            <a:off x="5394960" y="2066544"/>
-            <a:ext cx="2834640" cy="292608"/>
+          <p:cNvPr id="22" name="Text 20"/>
+          <p:cNvSpPr/>
+          <p:nvPr/>
+        </p:nvSpPr>
+        <p:spPr>
+          <a:xfrm>
+            <a:off x="1252728" y="3374136"/>
+            <a:ext cx="2926080" cy="292608"/>
           </a:xfrm>
           <a:prstGeom prst="rect">
             <a:avLst/>
@@ -3264,10 +3597,13 @@
             <a:r>
               <a:rPr lang="en-US" sz="1200" b="1" dirty="0">
                 <a:solidFill>
-                  <a:srgbClr val="3D0A10"/>
-                </a:solidFill>
-              </a:rPr>
-              <a:t>Get in at the start</a:t>
+                  <a:srgbClr val="A31422"/>
+                </a:solidFill>
+                <a:latin typeface="Calibri" pitchFamily="34" charset="0"/>
+                <a:ea typeface="Calibri" pitchFamily="34" charset="-122"/>
+                <a:cs typeface="Calibri" pitchFamily="34" charset="-120"/>
+              </a:rPr>
+              <a:t>A market that isn’t going anywhere</a:t>
             </a:r>
             <a:endParaRPr lang="en-US" sz="1200" dirty="0"/>
           </a:p>
@@ -3275,14 +3611,14 @@
       </p:sp>
       <p:sp>
         <p:nvSpPr>
-          <p:cNvPr id="19" name="Text 17"/>
-          <p:cNvSpPr/>
-          <p:nvPr/>
-        </p:nvSpPr>
-        <p:spPr>
-          <a:xfrm>
-            <a:off x="4937760" y="2432304"/>
-            <a:ext cx="3337560" cy="566928"/>
+          <p:cNvPr id="23" name="Text 21"/>
+          <p:cNvSpPr/>
+          <p:nvPr/>
+        </p:nvSpPr>
+        <p:spPr>
+          <a:xfrm>
+            <a:off x="795528" y="3739896"/>
+            <a:ext cx="3383280" cy="566928"/>
           </a:xfrm>
           <a:prstGeom prst="rect">
             <a:avLst/>
@@ -3300,10 +3636,13 @@
             <a:r>
               <a:rPr lang="en-US" sz="1000" dirty="0">
                 <a:solidFill>
-                  <a:srgbClr val="6B5E4A"/>
-                </a:solidFill>
-              </a:rPr>
-              <a:t>Co-founder title, meaningful equity. You won't be employee #47 — you build this.</a:t>
+                  <a:srgbClr val="331313"/>
+                </a:solidFill>
+                <a:latin typeface="Calibri" pitchFamily="34" charset="0"/>
+                <a:ea typeface="Calibri" pitchFamily="34" charset="-122"/>
+                <a:cs typeface="Calibri" pitchFamily="34" charset="-120"/>
+              </a:rPr>
+              <a:t>Wellness is growing. People spend more on their bodies. Right category, right time.</a:t>
             </a:r>
             <a:endParaRPr lang="en-US" sz="1000" dirty="0"/>
           </a:p>
@@ -3311,53 +3650,53 @@
       </p:sp>
       <p:sp>
         <p:nvSpPr>
-          <p:cNvPr id="20" name="Shape 18"/>
-          <p:cNvSpPr/>
-          <p:nvPr/>
-        </p:nvSpPr>
-        <p:spPr>
-          <a:xfrm>
-            <a:off x="640080" y="3291840"/>
+          <p:cNvPr id="24" name="Shape 22"/>
+          <p:cNvSpPr/>
+          <p:nvPr/>
+        </p:nvSpPr>
+        <p:spPr>
+          <a:xfrm>
+            <a:off x="4663440" y="3246120"/>
             <a:ext cx="3794760" cy="1170432"/>
           </a:xfrm>
           <a:prstGeom prst="rect">
             <a:avLst/>
           </a:prstGeom>
           <a:solidFill>
-            <a:srgbClr val="EDE5D8"/>
-          </a:solidFill>
-          <a:ln/>
-        </p:spPr>
-      </p:sp>
-      <p:sp>
-        <p:nvSpPr>
-          <p:cNvPr id="21" name="Shape 19"/>
-          <p:cNvSpPr/>
-          <p:nvPr/>
-        </p:nvSpPr>
-        <p:spPr>
-          <a:xfrm>
-            <a:off x="640080" y="3291840"/>
-            <a:ext cx="3794760" cy="54864"/>
-          </a:xfrm>
-          <a:prstGeom prst="rect">
-            <a:avLst/>
-          </a:prstGeom>
-          <a:solidFill>
-            <a:srgbClr val="D4A532"/>
-          </a:solidFill>
-          <a:ln/>
-        </p:spPr>
-      </p:sp>
-      <p:sp>
-        <p:nvSpPr>
-          <p:cNvPr id="22" name="Text 20"/>
-          <p:cNvSpPr/>
-          <p:nvPr/>
-        </p:nvSpPr>
-        <p:spPr>
-          <a:xfrm>
-            <a:off x="868680" y="3419856"/>
+            <a:srgbClr val="FCFAF7"/>
+          </a:solidFill>
+          <a:ln/>
+        </p:spPr>
+      </p:sp>
+      <p:sp>
+        <p:nvSpPr>
+          <p:cNvPr id="25" name="Shape 23"/>
+          <p:cNvSpPr/>
+          <p:nvPr/>
+        </p:nvSpPr>
+        <p:spPr>
+          <a:xfrm>
+            <a:off x="4663440" y="3246120"/>
+            <a:ext cx="3794760" cy="50292"/>
+          </a:xfrm>
+          <a:prstGeom prst="rect">
+            <a:avLst/>
+          </a:prstGeom>
+          <a:solidFill>
+            <a:srgbClr val="E4AA25"/>
+          </a:solidFill>
+          <a:ln/>
+        </p:spPr>
+      </p:sp>
+      <p:sp>
+        <p:nvSpPr>
+          <p:cNvPr id="26" name="Text 24"/>
+          <p:cNvSpPr/>
+          <p:nvPr/>
+        </p:nvSpPr>
+        <p:spPr>
+          <a:xfrm>
+            <a:off x="4864608" y="3355848"/>
             <a:ext cx="457200" cy="320040"/>
           </a:xfrm>
           <a:prstGeom prst="rect">
@@ -3376,10 +3715,13 @@
             <a:r>
               <a:rPr lang="en-US" sz="2000" b="1" dirty="0">
                 <a:solidFill>
-                  <a:srgbClr val="D4A532"/>
-                </a:solidFill>
-              </a:rPr>
-              <a:t>03</a:t>
+                  <a:srgbClr val="E4AA25"/>
+                </a:solidFill>
+                <a:latin typeface="Calibri" pitchFamily="34" charset="0"/>
+                <a:ea typeface="Calibri" pitchFamily="34" charset="-122"/>
+                <a:cs typeface="Calibri" pitchFamily="34" charset="-120"/>
+              </a:rPr>
+              <a:t>04</a:t>
             </a:r>
             <a:endParaRPr lang="en-US" sz="2000" dirty="0"/>
           </a:p>
@@ -3387,14 +3729,14 @@
       </p:sp>
       <p:sp>
         <p:nvSpPr>
-          <p:cNvPr id="23" name="Text 21"/>
-          <p:cNvSpPr/>
-          <p:nvPr/>
-        </p:nvSpPr>
-        <p:spPr>
-          <a:xfrm>
-            <a:off x="1325880" y="3438144"/>
-            <a:ext cx="2834640" cy="292608"/>
+          <p:cNvPr id="27" name="Text 25"/>
+          <p:cNvSpPr/>
+          <p:nvPr/>
+        </p:nvSpPr>
+        <p:spPr>
+          <a:xfrm>
+            <a:off x="5321808" y="3374136"/>
+            <a:ext cx="2926080" cy="292608"/>
           </a:xfrm>
           <a:prstGeom prst="rect">
             <a:avLst/>
@@ -3412,10 +3754,13 @@
             <a:r>
               <a:rPr lang="en-US" sz="1200" b="1" dirty="0">
                 <a:solidFill>
-                  <a:srgbClr val="3D0A10"/>
-                </a:solidFill>
-              </a:rPr>
-              <a:t>A market that isn’t going anywhere</a:t>
+                  <a:srgbClr val="A31422"/>
+                </a:solidFill>
+                <a:latin typeface="Calibri" pitchFamily="34" charset="0"/>
+                <a:ea typeface="Calibri" pitchFamily="34" charset="-122"/>
+                <a:cs typeface="Calibri" pitchFamily="34" charset="-120"/>
+              </a:rPr>
+              <a:t>Build something you can show</a:t>
             </a:r>
             <a:endParaRPr lang="en-US" sz="1200" dirty="0"/>
           </a:p>
@@ -3423,14 +3768,14 @@
       </p:sp>
       <p:sp>
         <p:nvSpPr>
-          <p:cNvPr id="24" name="Text 22"/>
-          <p:cNvSpPr/>
-          <p:nvPr/>
-        </p:nvSpPr>
-        <p:spPr>
-          <a:xfrm>
-            <a:off x="868680" y="3803904"/>
-            <a:ext cx="3337560" cy="566928"/>
+          <p:cNvPr id="28" name="Text 26"/>
+          <p:cNvSpPr/>
+          <p:nvPr/>
+        </p:nvSpPr>
+        <p:spPr>
+          <a:xfrm>
+            <a:off x="4864608" y="3739896"/>
+            <a:ext cx="3383280" cy="566928"/>
           </a:xfrm>
           <a:prstGeom prst="rect">
             <a:avLst/>
@@ -3448,10 +3793,13 @@
             <a:r>
               <a:rPr lang="en-US" sz="1000" dirty="0">
                 <a:solidFill>
-                  <a:srgbClr val="6B5E4A"/>
-                </a:solidFill>
-              </a:rPr>
-              <a:t>Wellness is growing. People spend more on their bodies. Right category, right time.</a:t>
+                  <a:srgbClr val="331313"/>
+                </a:solidFill>
+                <a:latin typeface="Calibri" pitchFamily="34" charset="0"/>
+                <a:ea typeface="Calibri" pitchFamily="34" charset="-122"/>
+                <a:cs typeface="Calibri" pitchFamily="34" charset="-120"/>
+              </a:rPr>
+              <a:t>A consumer app in a city you live in. Real users, real bookings, real impact.</a:t>
             </a:r>
             <a:endParaRPr lang="en-US" sz="1000" dirty="0"/>
           </a:p>
@@ -3459,155 +3807,7 @@
       </p:sp>
       <p:sp>
         <p:nvSpPr>
-          <p:cNvPr id="25" name="Shape 23"/>
-          <p:cNvSpPr/>
-          <p:nvPr/>
-        </p:nvSpPr>
-        <p:spPr>
-          <a:xfrm>
-            <a:off x="4709160" y="3291840"/>
-            <a:ext cx="3794760" cy="1170432"/>
-          </a:xfrm>
-          <a:prstGeom prst="rect">
-            <a:avLst/>
-          </a:prstGeom>
-          <a:solidFill>
-            <a:srgbClr val="EDE5D8"/>
-          </a:solidFill>
-          <a:ln/>
-        </p:spPr>
-      </p:sp>
-      <p:sp>
-        <p:nvSpPr>
-          <p:cNvPr id="26" name="Shape 24"/>
-          <p:cNvSpPr/>
-          <p:nvPr/>
-        </p:nvSpPr>
-        <p:spPr>
-          <a:xfrm>
-            <a:off x="4709160" y="3291840"/>
-            <a:ext cx="3794760" cy="54864"/>
-          </a:xfrm>
-          <a:prstGeom prst="rect">
-            <a:avLst/>
-          </a:prstGeom>
-          <a:solidFill>
-            <a:srgbClr val="3D0A10"/>
-          </a:solidFill>
-          <a:ln/>
-        </p:spPr>
-      </p:sp>
-      <p:sp>
-        <p:nvSpPr>
-          <p:cNvPr id="27" name="Text 25"/>
-          <p:cNvSpPr/>
-          <p:nvPr/>
-        </p:nvSpPr>
-        <p:spPr>
-          <a:xfrm>
-            <a:off x="4937760" y="3419856"/>
-            <a:ext cx="457200" cy="320040"/>
-          </a:xfrm>
-          <a:prstGeom prst="rect">
-            <a:avLst/>
-          </a:prstGeom>
-          <a:noFill/>
-          <a:ln/>
-        </p:spPr>
-        <p:txBody>
-          <a:bodyPr wrap="square" lIns="0" tIns="0" rIns="0" bIns="0" rtlCol="0" anchor="ctr"/>
-          <a:lstStyle/>
-          <a:p>
-            <a:pPr indent="0" marL="0">
-              <a:buNone/>
-            </a:pPr>
-            <a:r>
-              <a:rPr lang="en-US" sz="2000" b="1" dirty="0">
-                <a:solidFill>
-                  <a:srgbClr val="3D0A10"/>
-                </a:solidFill>
-              </a:rPr>
-              <a:t>04</a:t>
-            </a:r>
-            <a:endParaRPr lang="en-US" sz="2000" dirty="0"/>
-          </a:p>
-        </p:txBody>
-      </p:sp>
-      <p:sp>
-        <p:nvSpPr>
-          <p:cNvPr id="28" name="Text 26"/>
-          <p:cNvSpPr/>
-          <p:nvPr/>
-        </p:nvSpPr>
-        <p:spPr>
-          <a:xfrm>
-            <a:off x="5394960" y="3438144"/>
-            <a:ext cx="2834640" cy="292608"/>
-          </a:xfrm>
-          <a:prstGeom prst="rect">
-            <a:avLst/>
-          </a:prstGeom>
-          <a:noFill/>
-          <a:ln/>
-        </p:spPr>
-        <p:txBody>
-          <a:bodyPr wrap="square" lIns="0" tIns="0" rIns="0" bIns="0" rtlCol="0" anchor="ctr"/>
-          <a:lstStyle/>
-          <a:p>
-            <a:pPr indent="0" marL="0">
-              <a:buNone/>
-            </a:pPr>
-            <a:r>
-              <a:rPr lang="en-US" sz="1200" b="1" dirty="0">
-                <a:solidFill>
-                  <a:srgbClr val="3D0A10"/>
-                </a:solidFill>
-              </a:rPr>
-              <a:t>Build something you can show</a:t>
-            </a:r>
-            <a:endParaRPr lang="en-US" sz="1200" dirty="0"/>
-          </a:p>
-        </p:txBody>
-      </p:sp>
-      <p:sp>
-        <p:nvSpPr>
-          <p:cNvPr id="29" name="Text 27"/>
-          <p:cNvSpPr/>
-          <p:nvPr/>
-        </p:nvSpPr>
-        <p:spPr>
-          <a:xfrm>
-            <a:off x="4937760" y="3803904"/>
-            <a:ext cx="3337560" cy="566928"/>
-          </a:xfrm>
-          <a:prstGeom prst="rect">
-            <a:avLst/>
-          </a:prstGeom>
-          <a:noFill/>
-          <a:ln/>
-        </p:spPr>
-        <p:txBody>
-          <a:bodyPr wrap="square" lIns="0" tIns="0" rIns="0" bIns="0" rtlCol="0" anchor="ctr"/>
-          <a:lstStyle/>
-          <a:p>
-            <a:pPr indent="0" marL="0">
-              <a:buNone/>
-            </a:pPr>
-            <a:r>
-              <a:rPr lang="en-US" sz="1000" dirty="0">
-                <a:solidFill>
-                  <a:srgbClr val="6B5E4A"/>
-                </a:solidFill>
-              </a:rPr>
-              <a:t>A consumer app in a city you live in. Real users, real bookings, real impact.</a:t>
-            </a:r>
-            <a:endParaRPr lang="en-US" sz="1000" dirty="0"/>
-          </a:p>
-        </p:txBody>
-      </p:sp>
-      <p:sp>
-        <p:nvSpPr>
-          <p:cNvPr id="30" name="Shape 28"/>
+          <p:cNvPr id="29" name="Shape 27"/>
           <p:cNvSpPr/>
           <p:nvPr/>
         </p:nvSpPr>
@@ -3620,10 +3820,49 @@
             <a:avLst/>
           </a:prstGeom>
           <a:solidFill>
-            <a:srgbClr val="3D0A10"/>
-          </a:solidFill>
-          <a:ln/>
-        </p:spPr>
+            <a:srgbClr val="A31422"/>
+          </a:solidFill>
+          <a:ln/>
+        </p:spPr>
+      </p:sp>
+      <p:sp>
+        <p:nvSpPr>
+          <p:cNvPr id="30" name="Text 28"/>
+          <p:cNvSpPr/>
+          <p:nvPr/>
+        </p:nvSpPr>
+        <p:spPr>
+          <a:xfrm>
+            <a:off x="594360" y="4754880"/>
+            <a:ext cx="5486400" cy="256032"/>
+          </a:xfrm>
+          <a:prstGeom prst="rect">
+            <a:avLst/>
+          </a:prstGeom>
+          <a:noFill/>
+          <a:ln/>
+        </p:spPr>
+        <p:txBody>
+          <a:bodyPr wrap="square" lIns="0" tIns="0" rIns="0" bIns="0" rtlCol="0" anchor="ctr"/>
+          <a:lstStyle/>
+          <a:p>
+            <a:pPr indent="0" marL="0">
+              <a:buNone/>
+            </a:pPr>
+            <a:r>
+              <a:rPr lang="en-US" sz="1000" dirty="0">
+                <a:solidFill>
+                  <a:srgbClr val="E4AA25"/>
+                </a:solidFill>
+                <a:latin typeface="Calibri" pitchFamily="34" charset="0"/>
+                <a:ea typeface="Calibri" pitchFamily="34" charset="-122"/>
+                <a:cs typeface="Calibri" pitchFamily="34" charset="-120"/>
+              </a:rPr>
+              <a:t>Interested? Let’s talk.  →  jordan@massageclub.io</a:t>
+            </a:r>
+            <a:endParaRPr lang="en-US" sz="1000" dirty="0"/>
+          </a:p>
+        </p:txBody>
       </p:sp>
       <p:sp>
         <p:nvSpPr>
@@ -3633,44 +3872,8 @@
         </p:nvSpPr>
         <p:spPr>
           <a:xfrm>
-            <a:off x="640080" y="4736592"/>
-            <a:ext cx="6400800" cy="274320"/>
-          </a:xfrm>
-          <a:prstGeom prst="rect">
-            <a:avLst/>
-          </a:prstGeom>
-          <a:noFill/>
-          <a:ln/>
-        </p:spPr>
-        <p:txBody>
-          <a:bodyPr wrap="square" lIns="0" tIns="0" rIns="0" bIns="0" rtlCol="0" anchor="ctr"/>
-          <a:lstStyle/>
-          <a:p>
-            <a:pPr indent="0" marL="0">
-              <a:buNone/>
-            </a:pPr>
-            <a:r>
-              <a:rPr lang="en-US" sz="1000" dirty="0">
-                <a:solidFill>
-                  <a:srgbClr val="D4A532"/>
-                </a:solidFill>
-              </a:rPr>
-              <a:t>Interested? Let’s talk.  →  jordan@massageclub.io</a:t>
-            </a:r>
-            <a:endParaRPr lang="en-US" sz="1000" dirty="0"/>
-          </a:p>
-        </p:txBody>
-      </p:sp>
-      <p:sp>
-        <p:nvSpPr>
-          <p:cNvPr id="32" name="Text 30"/>
-          <p:cNvSpPr/>
-          <p:nvPr/>
-        </p:nvSpPr>
-        <p:spPr>
-          <a:xfrm>
-            <a:off x="8412480" y="4736592"/>
-            <a:ext cx="548640" cy="256032"/>
+            <a:off x="8321040" y="4754880"/>
+            <a:ext cx="457200" cy="256032"/>
           </a:xfrm>
           <a:prstGeom prst="rect">
             <a:avLst/>
@@ -3688,8 +3891,11 @@
             <a:r>
               <a:rPr lang="en-US" sz="900" dirty="0">
                 <a:solidFill>
-                  <a:srgbClr val="8B7355"/>
-                </a:solidFill>
+                  <a:srgbClr val="A07070"/>
+                </a:solidFill>
+                <a:latin typeface="Calibri" pitchFamily="34" charset="0"/>
+                <a:ea typeface="Calibri" pitchFamily="34" charset="-122"/>
+                <a:cs typeface="Calibri" pitchFamily="34" charset="-120"/>
               </a:rPr>
               <a:t>03</a:t>
             </a:r>
